--- a/reference_material/slides/025_Bayes.pptx
+++ b/reference_material/slides/025_Bayes.pptx
@@ -5,27 +5,49 @@
     <p:sldMasterId id="2147483660" r:id="rId1"/>
   </p:sldMasterIdLst>
   <p:sldIdLst>
-    <p:sldId id="273" r:id="rId2"/>
-    <p:sldId id="274" r:id="rId3"/>
-    <p:sldId id="275" r:id="rId4"/>
-    <p:sldId id="276" r:id="rId5"/>
-    <p:sldId id="270" r:id="rId6"/>
-    <p:sldId id="271" r:id="rId7"/>
-    <p:sldId id="256" r:id="rId8"/>
-    <p:sldId id="266" r:id="rId9"/>
-    <p:sldId id="268" r:id="rId10"/>
-    <p:sldId id="267" r:id="rId11"/>
-    <p:sldId id="269" r:id="rId12"/>
-    <p:sldId id="272" r:id="rId13"/>
-    <p:sldId id="257" r:id="rId14"/>
-    <p:sldId id="258" r:id="rId15"/>
-    <p:sldId id="259" r:id="rId16"/>
-    <p:sldId id="260" r:id="rId17"/>
-    <p:sldId id="261" r:id="rId18"/>
-    <p:sldId id="262" r:id="rId19"/>
-    <p:sldId id="263" r:id="rId20"/>
-    <p:sldId id="264" r:id="rId21"/>
-    <p:sldId id="265" r:id="rId22"/>
+    <p:sldId id="292" r:id="rId2"/>
+    <p:sldId id="273" r:id="rId3"/>
+    <p:sldId id="290" r:id="rId4"/>
+    <p:sldId id="291" r:id="rId5"/>
+    <p:sldId id="294" r:id="rId6"/>
+    <p:sldId id="293" r:id="rId7"/>
+    <p:sldId id="298" r:id="rId8"/>
+    <p:sldId id="295" r:id="rId9"/>
+    <p:sldId id="274" r:id="rId10"/>
+    <p:sldId id="275" r:id="rId11"/>
+    <p:sldId id="276" r:id="rId12"/>
+    <p:sldId id="270" r:id="rId13"/>
+    <p:sldId id="271" r:id="rId14"/>
+    <p:sldId id="256" r:id="rId15"/>
+    <p:sldId id="266" r:id="rId16"/>
+    <p:sldId id="268" r:id="rId17"/>
+    <p:sldId id="267" r:id="rId18"/>
+    <p:sldId id="269" r:id="rId19"/>
+    <p:sldId id="272" r:id="rId20"/>
+    <p:sldId id="278" r:id="rId21"/>
+    <p:sldId id="284" r:id="rId22"/>
+    <p:sldId id="279" r:id="rId23"/>
+    <p:sldId id="280" r:id="rId24"/>
+    <p:sldId id="281" r:id="rId25"/>
+    <p:sldId id="282" r:id="rId26"/>
+    <p:sldId id="285" r:id="rId27"/>
+    <p:sldId id="257" r:id="rId28"/>
+    <p:sldId id="258" r:id="rId29"/>
+    <p:sldId id="288" r:id="rId30"/>
+    <p:sldId id="259" r:id="rId31"/>
+    <p:sldId id="260" r:id="rId32"/>
+    <p:sldId id="261" r:id="rId33"/>
+    <p:sldId id="262" r:id="rId34"/>
+    <p:sldId id="287" r:id="rId35"/>
+    <p:sldId id="277" r:id="rId36"/>
+    <p:sldId id="289" r:id="rId37"/>
+    <p:sldId id="263" r:id="rId38"/>
+    <p:sldId id="264" r:id="rId39"/>
+    <p:sldId id="283" r:id="rId40"/>
+    <p:sldId id="286" r:id="rId41"/>
+    <p:sldId id="265" r:id="rId42"/>
+    <p:sldId id="296" r:id="rId43"/>
+    <p:sldId id="297" r:id="rId44"/>
   </p:sldIdLst>
   <p:sldSz cx="12192000" cy="6858000"/>
   <p:notesSz cx="6858000" cy="9144000"/>
@@ -129,7 +151,14 @@
       <p14:sectionLst xmlns:p14="http://schemas.microsoft.com/office/powerpoint/2010/main">
         <p14:section name="Default Section" id="{B68BA21F-7F32-4540-9208-09D77F5B03BA}">
           <p14:sldIdLst>
+            <p14:sldId id="292"/>
             <p14:sldId id="273"/>
+            <p14:sldId id="290"/>
+            <p14:sldId id="291"/>
+            <p14:sldId id="294"/>
+            <p14:sldId id="293"/>
+            <p14:sldId id="298"/>
+            <p14:sldId id="295"/>
           </p14:sldIdLst>
         </p14:section>
         <p14:section name="Weird Charts" id="{2AEAC93D-C99C-1047-830D-43486A067398}">
@@ -151,17 +180,44 @@
             <p14:sldId id="272"/>
           </p14:sldIdLst>
         </p14:section>
+        <p14:section name="Untitled Section" id="{4742D186-45D8-B14F-B58C-3B6342FA3E4D}">
+          <p14:sldIdLst>
+            <p14:sldId id="278"/>
+            <p14:sldId id="284"/>
+            <p14:sldId id="279"/>
+            <p14:sldId id="280"/>
+            <p14:sldId id="281"/>
+            <p14:sldId id="282"/>
+            <p14:sldId id="285"/>
+          </p14:sldIdLst>
+        </p14:section>
         <p14:section name="Bayes" id="{1EE95CFD-4D78-9A43-80C9-00F166D1574B}">
           <p14:sldIdLst>
             <p14:sldId id="257"/>
             <p14:sldId id="258"/>
+            <p14:sldId id="288"/>
             <p14:sldId id="259"/>
             <p14:sldId id="260"/>
             <p14:sldId id="261"/>
             <p14:sldId id="262"/>
+          </p14:sldIdLst>
+        </p14:section>
+        <p14:section name="Interpretability" id="{D528C759-143A-6446-821D-C964BB8BF507}">
+          <p14:sldIdLst>
+            <p14:sldId id="287"/>
+          </p14:sldIdLst>
+        </p14:section>
+        <p14:section name="Bayes has it Made" id="{350DA108-D506-D043-A2F9-C3A173631B9B}">
+          <p14:sldIdLst>
+            <p14:sldId id="277"/>
+            <p14:sldId id="289"/>
             <p14:sldId id="263"/>
             <p14:sldId id="264"/>
+            <p14:sldId id="283"/>
+            <p14:sldId id="286"/>
             <p14:sldId id="265"/>
+            <p14:sldId id="296"/>
+            <p14:sldId id="297"/>
           </p14:sldIdLst>
         </p14:section>
       </p14:sectionLst>
@@ -3698,7 +3754,7 @@
           <p:cNvPr id="2" name="Title 1">
             <a:extLst>
               <a:ext uri="{FF2B5EF4-FFF2-40B4-BE49-F238E27FC236}">
-                <a16:creationId xmlns:a16="http://schemas.microsoft.com/office/drawing/2014/main" id="{0FFC9AEB-116D-42CD-AAFB-F9DFF9A14DB8}"/>
+                <a16:creationId xmlns:a16="http://schemas.microsoft.com/office/drawing/2014/main" id="{E2D16E7C-3D31-C579-52CB-0BF2A8BA897D}"/>
               </a:ext>
             </a:extLst>
           </p:cNvPr>
@@ -3716,7 +3772,7 @@
           <a:p>
             <a:r>
               <a:rPr lang="en-US" dirty="0"/>
-              <a:t>Housekeeping</a:t>
+              <a:t>A Fun Game…</a:t>
             </a:r>
           </a:p>
         </p:txBody>
@@ -3726,7 +3782,7 @@
           <p:cNvPr id="3" name="Content Placeholder 2">
             <a:extLst>
               <a:ext uri="{FF2B5EF4-FFF2-40B4-BE49-F238E27FC236}">
-                <a16:creationId xmlns:a16="http://schemas.microsoft.com/office/drawing/2014/main" id="{638B2240-35C9-D562-BADA-D7D93C21F02E}"/>
+                <a16:creationId xmlns:a16="http://schemas.microsoft.com/office/drawing/2014/main" id="{673106B5-3092-7972-E770-A5115637E76D}"/>
               </a:ext>
             </a:extLst>
           </p:cNvPr>
@@ -3739,8 +3795,8 @@
         </p:nvSpPr>
         <p:spPr>
           <a:xfrm>
-            <a:off x="1451579" y="1981200"/>
-            <a:ext cx="9603275" cy="4072281"/>
+            <a:off x="1451579" y="1853754"/>
+            <a:ext cx="9603275" cy="4199727"/>
           </a:xfrm>
         </p:spPr>
         <p:txBody>
@@ -3749,55 +3805,132 @@
           <a:p>
             <a:r>
               <a:rPr lang="en-US" dirty="0"/>
-              <a:t>Probability, conditional probability, and (potentially) Bayes. </a:t>
-            </a:r>
-          </a:p>
-          <a:p>
-            <a:pPr lvl="1"/>
-            <a:r>
-              <a:rPr lang="en-US" dirty="0"/>
-              <a:t>Please be honest about what makes sense, we’ll see how far we can get. </a:t>
-            </a:r>
-          </a:p>
-          <a:p>
-            <a:pPr lvl="1"/>
-            <a:r>
-              <a:rPr lang="en-US" dirty="0"/>
-              <a:t>Largely example based, the core theory of probability is pretty simple. </a:t>
-            </a:r>
-          </a:p>
-          <a:p>
-            <a:r>
-              <a:rPr lang="en-US" dirty="0"/>
-              <a:t>For test things, conditional probability is fair game, after that is off. </a:t>
-            </a:r>
-          </a:p>
-          <a:p>
-            <a:r>
-              <a:rPr lang="en-US" dirty="0"/>
-              <a:t>We’ll finish the topic next Monday, the last class.</a:t>
-            </a:r>
-          </a:p>
-          <a:p>
-            <a:pPr lvl="1"/>
-            <a:r>
-              <a:rPr lang="en-US" dirty="0"/>
-              <a:t>We’ll cover the actual sklearn model then. </a:t>
-            </a:r>
-          </a:p>
-          <a:p>
-            <a:pPr lvl="1"/>
-            <a:r>
-              <a:rPr lang="en-US" dirty="0"/>
-              <a:t>We (probably) won’t get to deriving it, that’s worth a read through (w.b.32). </a:t>
-            </a:r>
-          </a:p>
-        </p:txBody>
-      </p:sp>
+              <a:t>Suppose you're on a game show, and you're given the choice of three doors: </a:t>
+            </a:r>
+          </a:p>
+          <a:p>
+            <a:pPr lvl="1"/>
+            <a:r>
+              <a:rPr lang="en-US" dirty="0"/>
+              <a:t>Behind one door is a car; </a:t>
+            </a:r>
+          </a:p>
+          <a:p>
+            <a:pPr lvl="1"/>
+            <a:r>
+              <a:rPr lang="en-US" dirty="0"/>
+              <a:t>behind the others, goats. </a:t>
+            </a:r>
+          </a:p>
+          <a:p>
+            <a:r>
+              <a:rPr lang="en-US" dirty="0"/>
+              <a:t>Game:</a:t>
+            </a:r>
+          </a:p>
+          <a:p>
+            <a:pPr marL="800100" lvl="1" indent="-342900">
+              <a:buFont typeface="+mj-lt"/>
+              <a:buAutoNum type="arabicPeriod"/>
+            </a:pPr>
+            <a:r>
+              <a:rPr lang="en-US" dirty="0"/>
+              <a:t>You pick a door. </a:t>
+            </a:r>
+          </a:p>
+          <a:p>
+            <a:pPr marL="800100" lvl="1" indent="-342900">
+              <a:buFont typeface="+mj-lt"/>
+              <a:buAutoNum type="arabicPeriod"/>
+            </a:pPr>
+            <a:r>
+              <a:rPr lang="en-US" dirty="0"/>
+              <a:t>The host, who knows what's behind the doors, opens another door to reveal a goat. </a:t>
+            </a:r>
+          </a:p>
+          <a:p>
+            <a:pPr marL="800100" lvl="1" indent="-342900">
+              <a:buFont typeface="+mj-lt"/>
+              <a:buAutoNum type="arabicPeriod"/>
+            </a:pPr>
+            <a:r>
+              <a:rPr lang="en-US" dirty="0"/>
+              <a:t>You are given the choice to swap to the remaining door, or hold your pick. </a:t>
+            </a:r>
+          </a:p>
+          <a:p>
+            <a:pPr marL="800100" lvl="1" indent="-342900">
+              <a:buFont typeface="+mj-lt"/>
+              <a:buAutoNum type="arabicPeriod"/>
+            </a:pPr>
+            <a:r>
+              <a:rPr lang="en-US" dirty="0"/>
+              <a:t>The doors are open, you get what was behind the door you settled on. </a:t>
+            </a:r>
+          </a:p>
+          <a:p>
+            <a:pPr marL="342900" indent="-342900">
+              <a:buFont typeface="+mj-lt"/>
+              <a:buAutoNum type="arabicPeriod"/>
+            </a:pPr>
+            <a:r>
+              <a:rPr lang="en-US" dirty="0"/>
+              <a:t>Do you switch? </a:t>
+            </a:r>
+          </a:p>
+        </p:txBody>
+      </p:sp>
+      <p:pic>
+        <p:nvPicPr>
+          <p:cNvPr id="4102" name="Picture 6">
+            <a:extLst>
+              <a:ext uri="{FF2B5EF4-FFF2-40B4-BE49-F238E27FC236}">
+                <a16:creationId xmlns:a16="http://schemas.microsoft.com/office/drawing/2014/main" id="{90F866C5-390E-E85F-B6D6-71950F1CB865}"/>
+              </a:ext>
+            </a:extLst>
+          </p:cNvPr>
+          <p:cNvPicPr>
+            <a:picLocks noChangeAspect="1" noChangeArrowheads="1"/>
+          </p:cNvPicPr>
+          <p:nvPr/>
+        </p:nvPicPr>
+        <p:blipFill>
+          <a:blip r:embed="rId2">
+            <a:extLst>
+              <a:ext uri="{28A0092B-C50C-407E-A947-70E740481C1C}">
+                <a14:useLocalDpi xmlns:a14="http://schemas.microsoft.com/office/drawing/2010/main" val="0"/>
+              </a:ext>
+            </a:extLst>
+          </a:blip>
+          <a:srcRect/>
+          <a:stretch>
+            <a:fillRect/>
+          </a:stretch>
+        </p:blipFill>
+        <p:spPr bwMode="auto">
+          <a:xfrm>
+            <a:off x="8606366" y="88454"/>
+            <a:ext cx="3175000" cy="1765300"/>
+          </a:xfrm>
+          <a:prstGeom prst="rect">
+            <a:avLst/>
+          </a:prstGeom>
+          <a:noFill/>
+          <a:extLst>
+            <a:ext uri="{909E8E84-426E-40DD-AFC4-6F175D3DCCD1}">
+              <a14:hiddenFill xmlns:a14="http://schemas.microsoft.com/office/drawing/2010/main">
+                <a:solidFill>
+                  <a:srgbClr val="FFFFFF"/>
+                </a:solidFill>
+              </a14:hiddenFill>
+            </a:ext>
+          </a:extLst>
+        </p:spPr>
+      </p:pic>
     </p:spTree>
     <p:extLst>
       <p:ext uri="{BB962C8B-B14F-4D97-AF65-F5344CB8AC3E}">
-        <p14:creationId xmlns:p14="http://schemas.microsoft.com/office/powerpoint/2010/main" val="1560395533"/>
+        <p14:creationId xmlns:p14="http://schemas.microsoft.com/office/powerpoint/2010/main" val="4126456136"/>
       </p:ext>
     </p:extLst>
   </p:cSld>
@@ -3829,7 +3962,7 @@
           <p:cNvPr id="2" name="Title 1">
             <a:extLst>
               <a:ext uri="{FF2B5EF4-FFF2-40B4-BE49-F238E27FC236}">
-                <a16:creationId xmlns:a16="http://schemas.microsoft.com/office/drawing/2014/main" id="{C434CD5E-C5F9-36E1-D902-FBC23F1EE80F}"/>
+                <a16:creationId xmlns:a16="http://schemas.microsoft.com/office/drawing/2014/main" id="{02A7EEAC-B5F8-286E-45A6-8A0E3866A796}"/>
               </a:ext>
             </a:extLst>
           </p:cNvPr>
@@ -3847,7 +3980,7 @@
           <a:p>
             <a:r>
               <a:rPr lang="en-US" dirty="0"/>
-              <a:t>Conditional Probability</a:t>
+              <a:t>What’s the Density… Really…?</a:t>
             </a:r>
           </a:p>
         </p:txBody>
@@ -3857,7 +3990,7 @@
           <p:cNvPr id="3" name="Content Placeholder 2">
             <a:extLst>
               <a:ext uri="{FF2B5EF4-FFF2-40B4-BE49-F238E27FC236}">
-                <a16:creationId xmlns:a16="http://schemas.microsoft.com/office/drawing/2014/main" id="{F4C2CACC-9724-6AB9-0C2C-94E7AFD07733}"/>
+                <a16:creationId xmlns:a16="http://schemas.microsoft.com/office/drawing/2014/main" id="{1E013EB2-9902-4D0F-B459-E6FF4D1F5778}"/>
               </a:ext>
             </a:extLst>
           </p:cNvPr>
@@ -3870,79 +4003,195 @@
         </p:nvSpPr>
         <p:spPr>
           <a:xfrm>
-            <a:off x="1451579" y="1853754"/>
-            <a:ext cx="9603275" cy="4199727"/>
+            <a:off x="5996940" y="1927860"/>
+            <a:ext cx="6195060" cy="4190326"/>
           </a:xfrm>
         </p:spPr>
         <p:txBody>
-          <a:bodyPr/>
-          <a:lstStyle/>
-          <a:p>
-            <a:r>
-              <a:rPr lang="en-US" dirty="0"/>
-              <a:t>Using probabilities for prediction relies on conditional probabilities. </a:t>
-            </a:r>
-          </a:p>
-          <a:p>
-            <a:pPr lvl="1"/>
-            <a:r>
-              <a:rPr lang="en-US" dirty="0"/>
-              <a:t>Given this fact, what is the probability. </a:t>
-            </a:r>
-          </a:p>
-          <a:p>
-            <a:pPr lvl="1"/>
-            <a:r>
-              <a:rPr lang="en-US" dirty="0"/>
-              <a:t>E.g. if you have high blood pressure, what is the likelihood of a stroke. </a:t>
-            </a:r>
-          </a:p>
-          <a:p>
-            <a:r>
-              <a:rPr lang="en-US" dirty="0"/>
-              <a:t>We can express conditional probabilities like this:</a:t>
-            </a:r>
-          </a:p>
-          <a:p>
-            <a:pPr lvl="1"/>
-            <a:r>
-              <a:rPr lang="en-US" dirty="0"/>
-              <a:t>P(A | B) – probability of A, given that B is true. </a:t>
-            </a:r>
-          </a:p>
-          <a:p>
-            <a:r>
-              <a:rPr lang="en-US" dirty="0"/>
-              <a:t>In datasets, this conditional probability could be calculated for any combo. E.g.</a:t>
-            </a:r>
-          </a:p>
-          <a:p>
-            <a:pPr lvl="1"/>
-            <a:r>
-              <a:rPr lang="en-US" dirty="0"/>
-              <a:t>P( stroke | high blood pressure)</a:t>
-            </a:r>
-          </a:p>
-          <a:p>
-            <a:pPr lvl="1"/>
-            <a:r>
-              <a:rPr lang="en-US" dirty="0"/>
-              <a:t>P( stroke | high BMI)</a:t>
-            </a:r>
-          </a:p>
-          <a:p>
-            <a:pPr lvl="1"/>
-            <a:r>
-              <a:rPr lang="en-US" dirty="0"/>
-              <a:t>P( stroke | high BMI and high blood pressure)</a:t>
-            </a:r>
-          </a:p>
-        </p:txBody>
-      </p:sp>
+          <a:bodyPr>
+            <a:normAutofit lnSpcReduction="10000"/>
+          </a:bodyPr>
+          <a:lstStyle/>
+          <a:p>
+            <a:r>
+              <a:rPr lang="en-US" dirty="0"/>
+              <a:t>Density means the total area under curve is 1. </a:t>
+            </a:r>
+          </a:p>
+          <a:p>
+            <a:pPr lvl="1"/>
+            <a:r>
+              <a:rPr lang="en-US" dirty="0"/>
+              <a:t>If we have a continuous dataset, this works, but…</a:t>
+            </a:r>
+          </a:p>
+          <a:p>
+            <a:r>
+              <a:rPr lang="en-US" dirty="0"/>
+              <a:t>The area is the integral, not a count. </a:t>
+            </a:r>
+          </a:p>
+          <a:p>
+            <a:pPr lvl="1"/>
+            <a:r>
+              <a:rPr lang="en-US" dirty="0"/>
+              <a:t>Works over an area, not a point (like a bin w/ discreet).</a:t>
+            </a:r>
+          </a:p>
+          <a:p>
+            <a:pPr lvl="1"/>
+            <a:r>
+              <a:rPr lang="en-US" dirty="0"/>
+              <a:t>Sparse discreet data can make this weird. </a:t>
+            </a:r>
+          </a:p>
+          <a:p>
+            <a:pPr lvl="1"/>
+            <a:r>
+              <a:rPr lang="en-US" dirty="0"/>
+              <a:t>We don’t get a ‘rectangle’ we get stalagmites. </a:t>
+            </a:r>
+          </a:p>
+          <a:p>
+            <a:r>
+              <a:rPr lang="en-US" dirty="0"/>
+              <a:t>With discreet data there’s estimating going on. </a:t>
+            </a:r>
+          </a:p>
+          <a:p>
+            <a:pPr lvl="1"/>
+            <a:r>
+              <a:rPr lang="en-US" dirty="0"/>
+              <a:t>The KDE line is an approximation of the actual data. </a:t>
+            </a:r>
+          </a:p>
+          <a:p>
+            <a:pPr lvl="1"/>
+            <a:r>
+              <a:rPr lang="en-US" dirty="0"/>
+              <a:t>There is a smoothing parameter that can help.  </a:t>
+            </a:r>
+          </a:p>
+          <a:p>
+            <a:r>
+              <a:rPr lang="en-US" dirty="0"/>
+              <a:t>Fundamentally a mismatch data/visual tool. </a:t>
+            </a:r>
+          </a:p>
+        </p:txBody>
+      </p:sp>
+      <p:pic>
+        <p:nvPicPr>
+          <p:cNvPr id="4" name="Picture 3">
+            <a:extLst>
+              <a:ext uri="{FF2B5EF4-FFF2-40B4-BE49-F238E27FC236}">
+                <a16:creationId xmlns:a16="http://schemas.microsoft.com/office/drawing/2014/main" id="{31686271-D1FA-EAD9-4BA2-151754E5111B}"/>
+              </a:ext>
+            </a:extLst>
+          </p:cNvPr>
+          <p:cNvPicPr>
+            <a:picLocks noChangeAspect="1"/>
+          </p:cNvPicPr>
+          <p:nvPr/>
+        </p:nvPicPr>
+        <p:blipFill>
+          <a:blip r:embed="rId2"/>
+          <a:srcRect r="19608"/>
+          <a:stretch>
+            <a:fillRect/>
+          </a:stretch>
+        </p:blipFill>
+        <p:spPr>
+          <a:xfrm>
+            <a:off x="0" y="1927860"/>
+            <a:ext cx="6040066" cy="2148503"/>
+          </a:xfrm>
+          <a:prstGeom prst="rect">
+            <a:avLst/>
+          </a:prstGeom>
+        </p:spPr>
+      </p:pic>
+      <p:pic>
+        <p:nvPicPr>
+          <p:cNvPr id="4098" name="Picture 2" descr="Area under the Curve Formula">
+            <a:extLst>
+              <a:ext uri="{FF2B5EF4-FFF2-40B4-BE49-F238E27FC236}">
+                <a16:creationId xmlns:a16="http://schemas.microsoft.com/office/drawing/2014/main" id="{629798F0-9DFB-2B16-53B9-08F7AA504CF0}"/>
+              </a:ext>
+            </a:extLst>
+          </p:cNvPr>
+          <p:cNvPicPr>
+            <a:picLocks noChangeAspect="1" noChangeArrowheads="1"/>
+          </p:cNvPicPr>
+          <p:nvPr/>
+        </p:nvPicPr>
+        <p:blipFill>
+          <a:blip r:embed="rId3">
+            <a:extLst>
+              <a:ext uri="{28A0092B-C50C-407E-A947-70E740481C1C}">
+                <a14:useLocalDpi xmlns:a14="http://schemas.microsoft.com/office/drawing/2010/main" val="0"/>
+              </a:ext>
+            </a:extLst>
+          </a:blip>
+          <a:srcRect/>
+          <a:stretch>
+            <a:fillRect/>
+          </a:stretch>
+        </p:blipFill>
+        <p:spPr bwMode="auto">
+          <a:xfrm>
+            <a:off x="137160" y="4086186"/>
+            <a:ext cx="3524250" cy="2032000"/>
+          </a:xfrm>
+          <a:prstGeom prst="rect">
+            <a:avLst/>
+          </a:prstGeom>
+          <a:noFill/>
+          <a:extLst>
+            <a:ext uri="{909E8E84-426E-40DD-AFC4-6F175D3DCCD1}">
+              <a14:hiddenFill xmlns:a14="http://schemas.microsoft.com/office/drawing/2010/main">
+                <a:solidFill>
+                  <a:srgbClr val="FFFFFF"/>
+                </a:solidFill>
+              </a14:hiddenFill>
+            </a:ext>
+          </a:extLst>
+        </p:spPr>
+      </p:pic>
+      <p:pic>
+        <p:nvPicPr>
+          <p:cNvPr id="5" name="Picture 4">
+            <a:extLst>
+              <a:ext uri="{FF2B5EF4-FFF2-40B4-BE49-F238E27FC236}">
+                <a16:creationId xmlns:a16="http://schemas.microsoft.com/office/drawing/2014/main" id="{76DEACD2-979A-A564-465A-679079D0EAF9}"/>
+              </a:ext>
+            </a:extLst>
+          </p:cNvPr>
+          <p:cNvPicPr>
+            <a:picLocks noChangeAspect="1"/>
+          </p:cNvPicPr>
+          <p:nvPr/>
+        </p:nvPicPr>
+        <p:blipFill>
+          <a:blip r:embed="rId4"/>
+          <a:stretch>
+            <a:fillRect/>
+          </a:stretch>
+        </p:blipFill>
+        <p:spPr>
+          <a:xfrm>
+            <a:off x="3661410" y="4076362"/>
+            <a:ext cx="2378656" cy="2325797"/>
+          </a:xfrm>
+          <a:prstGeom prst="rect">
+            <a:avLst/>
+          </a:prstGeom>
+        </p:spPr>
+      </p:pic>
     </p:spTree>
     <p:extLst>
       <p:ext uri="{BB962C8B-B14F-4D97-AF65-F5344CB8AC3E}">
-        <p14:creationId xmlns:p14="http://schemas.microsoft.com/office/powerpoint/2010/main" val="2149056855"/>
+        <p14:creationId xmlns:p14="http://schemas.microsoft.com/office/powerpoint/2010/main" val="1118521392"/>
       </p:ext>
     </p:extLst>
   </p:cSld>
@@ -3974,6 +4223,1169 @@
           <p:cNvPr id="2" name="Title 1">
             <a:extLst>
               <a:ext uri="{FF2B5EF4-FFF2-40B4-BE49-F238E27FC236}">
+                <a16:creationId xmlns:a16="http://schemas.microsoft.com/office/drawing/2014/main" id="{61D2589B-47C1-266A-40AF-130E85189A6B}"/>
+              </a:ext>
+            </a:extLst>
+          </p:cNvPr>
+          <p:cNvSpPr>
+            <a:spLocks noGrp="1"/>
+          </p:cNvSpPr>
+          <p:nvPr>
+            <p:ph type="title"/>
+          </p:nvPr>
+        </p:nvSpPr>
+        <p:spPr>
+          <a:xfrm>
+            <a:off x="1451579" y="804519"/>
+            <a:ext cx="2968021" cy="1049235"/>
+          </a:xfrm>
+        </p:spPr>
+        <p:txBody>
+          <a:bodyPr/>
+          <a:lstStyle/>
+          <a:p>
+            <a:r>
+              <a:rPr lang="en-US" dirty="0"/>
+              <a:t>Discreetness</a:t>
+            </a:r>
+          </a:p>
+        </p:txBody>
+      </p:sp>
+      <p:sp>
+        <p:nvSpPr>
+          <p:cNvPr id="3" name="Content Placeholder 2">
+            <a:extLst>
+              <a:ext uri="{FF2B5EF4-FFF2-40B4-BE49-F238E27FC236}">
+                <a16:creationId xmlns:a16="http://schemas.microsoft.com/office/drawing/2014/main" id="{A6B19449-E5C9-6B55-A0C0-F2C0EA6A2D57}"/>
+              </a:ext>
+            </a:extLst>
+          </p:cNvPr>
+          <p:cNvSpPr>
+            <a:spLocks noGrp="1"/>
+          </p:cNvSpPr>
+          <p:nvPr>
+            <p:ph idx="1"/>
+          </p:nvPr>
+        </p:nvSpPr>
+        <p:spPr>
+          <a:xfrm>
+            <a:off x="0" y="1853754"/>
+            <a:ext cx="6132884" cy="4199727"/>
+          </a:xfrm>
+        </p:spPr>
+        <p:txBody>
+          <a:bodyPr>
+            <a:normAutofit lnSpcReduction="10000"/>
+          </a:bodyPr>
+          <a:lstStyle/>
+          <a:p>
+            <a:r>
+              <a:rPr lang="en-US" dirty="0"/>
+              <a:t>With discreet data, those y values can be odd. </a:t>
+            </a:r>
+          </a:p>
+          <a:p>
+            <a:pPr lvl="1"/>
+            <a:r>
+              <a:rPr lang="en-US" dirty="0"/>
+              <a:t>’Area’ is not the most meaningful concept. </a:t>
+            </a:r>
+          </a:p>
+          <a:p>
+            <a:pPr lvl="1"/>
+            <a:r>
+              <a:rPr lang="en-US" dirty="0"/>
+              <a:t>Discreet data is ‘meant’ for a histogram. </a:t>
+            </a:r>
+          </a:p>
+          <a:p>
+            <a:r>
+              <a:rPr lang="en-US" dirty="0"/>
+              <a:t>Change to ‘probability’ to get something more readable. </a:t>
+            </a:r>
+          </a:p>
+          <a:p>
+            <a:pPr lvl="1"/>
+            <a:r>
+              <a:rPr lang="en-US" dirty="0"/>
+              <a:t>Height of bars sums to 1. </a:t>
+            </a:r>
+          </a:p>
+          <a:p>
+            <a:r>
+              <a:rPr lang="en-US" dirty="0"/>
+              <a:t>In practice this isn’t really an issue often.</a:t>
+            </a:r>
+          </a:p>
+          <a:p>
+            <a:pPr lvl="1"/>
+            <a:r>
+              <a:rPr lang="en-US" dirty="0"/>
+              <a:t>Only if you need to read Y value from KDE. </a:t>
+            </a:r>
+          </a:p>
+          <a:p>
+            <a:pPr lvl="1"/>
+            <a:r>
+              <a:rPr lang="en-US" dirty="0"/>
+              <a:t>Pattern, comparisons, etc.. Still work fine. </a:t>
+            </a:r>
+          </a:p>
+          <a:p>
+            <a:pPr lvl="1"/>
+            <a:r>
+              <a:rPr lang="en-US" b="1" dirty="0"/>
+              <a:t>Bigger and smoother data lessens impact. </a:t>
+            </a:r>
+          </a:p>
+          <a:p>
+            <a:r>
+              <a:rPr lang="en-US" dirty="0"/>
+              <a:t>Seaborn has a “visualizing distributions” page. </a:t>
+            </a:r>
+          </a:p>
+        </p:txBody>
+      </p:sp>
+      <p:pic>
+        <p:nvPicPr>
+          <p:cNvPr id="4" name="Picture 3">
+            <a:extLst>
+              <a:ext uri="{FF2B5EF4-FFF2-40B4-BE49-F238E27FC236}">
+                <a16:creationId xmlns:a16="http://schemas.microsoft.com/office/drawing/2014/main" id="{B651E070-22D1-F4BF-7166-7DC567863255}"/>
+              </a:ext>
+            </a:extLst>
+          </p:cNvPr>
+          <p:cNvPicPr>
+            <a:picLocks noChangeAspect="1"/>
+          </p:cNvPicPr>
+          <p:nvPr/>
+        </p:nvPicPr>
+        <p:blipFill>
+          <a:blip r:embed="rId2"/>
+          <a:stretch>
+            <a:fillRect/>
+          </a:stretch>
+        </p:blipFill>
+        <p:spPr>
+          <a:xfrm>
+            <a:off x="6132884" y="717579"/>
+            <a:ext cx="6059116" cy="4738341"/>
+          </a:xfrm>
+          <a:prstGeom prst="rect">
+            <a:avLst/>
+          </a:prstGeom>
+        </p:spPr>
+      </p:pic>
+    </p:spTree>
+    <p:extLst>
+      <p:ext uri="{BB962C8B-B14F-4D97-AF65-F5344CB8AC3E}">
+        <p14:creationId xmlns:p14="http://schemas.microsoft.com/office/powerpoint/2010/main" val="2479989442"/>
+      </p:ext>
+    </p:extLst>
+  </p:cSld>
+  <p:clrMapOvr>
+    <a:masterClrMapping/>
+  </p:clrMapOvr>
+</p:sld>
+</file>
+
+<file path=ppt/slides/slide12.xml><?xml version="1.0" encoding="utf-8"?>
+<p:sld xmlns:a="http://schemas.openxmlformats.org/drawingml/2006/main" xmlns:r="http://schemas.openxmlformats.org/officeDocument/2006/relationships" xmlns:p="http://schemas.openxmlformats.org/presentationml/2006/main">
+  <p:cSld>
+    <p:spTree>
+      <p:nvGrpSpPr>
+        <p:cNvPr id="1" name=""/>
+        <p:cNvGrpSpPr/>
+        <p:nvPr/>
+      </p:nvGrpSpPr>
+      <p:grpSpPr>
+        <a:xfrm>
+          <a:off x="0" y="0"/>
+          <a:ext cx="0" cy="0"/>
+          <a:chOff x="0" y="0"/>
+          <a:chExt cx="0" cy="0"/>
+        </a:xfrm>
+      </p:grpSpPr>
+      <p:sp>
+        <p:nvSpPr>
+          <p:cNvPr id="2" name="Title 1">
+            <a:extLst>
+              <a:ext uri="{FF2B5EF4-FFF2-40B4-BE49-F238E27FC236}">
+                <a16:creationId xmlns:a16="http://schemas.microsoft.com/office/drawing/2014/main" id="{BBC16C9E-B79D-AB5E-8508-79F50D9B320E}"/>
+              </a:ext>
+            </a:extLst>
+          </p:cNvPr>
+          <p:cNvSpPr>
+            <a:spLocks noGrp="1"/>
+          </p:cNvSpPr>
+          <p:nvPr>
+            <p:ph type="title"/>
+          </p:nvPr>
+        </p:nvSpPr>
+        <p:spPr>
+          <a:xfrm>
+            <a:off x="1451579" y="804519"/>
+            <a:ext cx="6252241" cy="1049235"/>
+          </a:xfrm>
+        </p:spPr>
+        <p:txBody>
+          <a:bodyPr/>
+          <a:lstStyle/>
+          <a:p>
+            <a:r>
+              <a:rPr lang="en-US" dirty="0"/>
+              <a:t>Review - Gradient Descent and Logistic Regression</a:t>
+            </a:r>
+          </a:p>
+        </p:txBody>
+      </p:sp>
+      <p:sp>
+        <p:nvSpPr>
+          <p:cNvPr id="3" name="Content Placeholder 2">
+            <a:extLst>
+              <a:ext uri="{FF2B5EF4-FFF2-40B4-BE49-F238E27FC236}">
+                <a16:creationId xmlns:a16="http://schemas.microsoft.com/office/drawing/2014/main" id="{51E3EC63-4186-A738-8B18-E965F1B9E3E7}"/>
+              </a:ext>
+            </a:extLst>
+          </p:cNvPr>
+          <p:cNvSpPr>
+            <a:spLocks noGrp="1"/>
+          </p:cNvSpPr>
+          <p:nvPr>
+            <p:ph idx="1"/>
+          </p:nvPr>
+        </p:nvSpPr>
+        <p:spPr>
+          <a:xfrm>
+            <a:off x="327660" y="2015732"/>
+            <a:ext cx="10727195" cy="3981208"/>
+          </a:xfrm>
+        </p:spPr>
+        <p:txBody>
+          <a:bodyPr/>
+          <a:lstStyle/>
+          <a:p>
+            <a:r>
+              <a:rPr lang="en-US" dirty="0"/>
+              <a:t>Last week we looked at classification using logistic regression. </a:t>
+            </a:r>
+          </a:p>
+          <a:p>
+            <a:pPr lvl="1"/>
+            <a:r>
+              <a:rPr lang="en-US" dirty="0"/>
+              <a:t>Instead of predicting a value we predict T/F, a class membership. </a:t>
+            </a:r>
+          </a:p>
+          <a:p>
+            <a:r>
+              <a:rPr lang="en-US" dirty="0"/>
+              <a:t>Still a linear calculation, but the details differ – need to predict probability not value. </a:t>
+            </a:r>
+          </a:p>
+          <a:p>
+            <a:pPr lvl="1"/>
+            <a:r>
+              <a:rPr lang="en-US" dirty="0"/>
+              <a:t>Uses a regression to the logit to get (something convertible to) probabilities. </a:t>
+            </a:r>
+          </a:p>
+          <a:p>
+            <a:pPr lvl="1"/>
+            <a:r>
+              <a:rPr lang="en-US" dirty="0"/>
+              <a:t>Sigmoid calculation converts any logit to a probability. </a:t>
+            </a:r>
+          </a:p>
+          <a:p>
+            <a:r>
+              <a:rPr lang="en-US" dirty="0"/>
+              <a:t>The slope and intercepts can’t be calculated directly here like with LLS. </a:t>
+            </a:r>
+          </a:p>
+          <a:p>
+            <a:pPr lvl="1"/>
+            <a:r>
+              <a:rPr lang="en-US" dirty="0"/>
+              <a:t>Need an alternative way to find best </a:t>
+            </a:r>
+            <a:r>
+              <a:rPr lang="en-US" dirty="0" err="1"/>
+              <a:t>coef</a:t>
+            </a:r>
+            <a:r>
+              <a:rPr lang="en-US" dirty="0"/>
+              <a:t> – gradient descent. </a:t>
+            </a:r>
+          </a:p>
+          <a:p>
+            <a:pPr lvl="1"/>
+            <a:r>
+              <a:rPr lang="en-US" dirty="0"/>
+              <a:t>Guess some coefficients, calculate cost, adjust </a:t>
+            </a:r>
+            <a:r>
+              <a:rPr lang="en-US" dirty="0" err="1"/>
+              <a:t>coef</a:t>
+            </a:r>
+            <a:r>
+              <a:rPr lang="en-US" dirty="0"/>
+              <a:t> (using gradient), repeat until done. </a:t>
+            </a:r>
+          </a:p>
+          <a:p>
+            <a:pPr lvl="1"/>
+            <a:r>
+              <a:rPr lang="en-US" dirty="0"/>
+              <a:t>This process is very common, coefficients can rarely be directly calculated. </a:t>
+            </a:r>
+          </a:p>
+        </p:txBody>
+      </p:sp>
+      <p:pic>
+        <p:nvPicPr>
+          <p:cNvPr id="3074" name="Picture 2" descr="A Beginners Guide to Gradient Descent Algorithm for Data Scientists!">
+            <a:extLst>
+              <a:ext uri="{FF2B5EF4-FFF2-40B4-BE49-F238E27FC236}">
+                <a16:creationId xmlns:a16="http://schemas.microsoft.com/office/drawing/2014/main" id="{D781402D-BF2D-6CDB-E1B2-1503F49C18B0}"/>
+              </a:ext>
+            </a:extLst>
+          </p:cNvPr>
+          <p:cNvPicPr>
+            <a:picLocks noChangeAspect="1" noChangeArrowheads="1"/>
+          </p:cNvPicPr>
+          <p:nvPr/>
+        </p:nvPicPr>
+        <p:blipFill>
+          <a:blip r:embed="rId2">
+            <a:extLst>
+              <a:ext uri="{28A0092B-C50C-407E-A947-70E740481C1C}">
+                <a14:useLocalDpi xmlns:a14="http://schemas.microsoft.com/office/drawing/2010/main" val="0"/>
+              </a:ext>
+            </a:extLst>
+          </a:blip>
+          <a:srcRect/>
+          <a:stretch>
+            <a:fillRect/>
+          </a:stretch>
+        </p:blipFill>
+        <p:spPr bwMode="auto">
+          <a:xfrm>
+            <a:off x="7746351" y="132098"/>
+            <a:ext cx="4445649" cy="2771121"/>
+          </a:xfrm>
+          <a:prstGeom prst="rect">
+            <a:avLst/>
+          </a:prstGeom>
+          <a:noFill/>
+          <a:extLst>
+            <a:ext uri="{909E8E84-426E-40DD-AFC4-6F175D3DCCD1}">
+              <a14:hiddenFill xmlns:a14="http://schemas.microsoft.com/office/drawing/2010/main">
+                <a:solidFill>
+                  <a:srgbClr val="FFFFFF"/>
+                </a:solidFill>
+              </a14:hiddenFill>
+            </a:ext>
+          </a:extLst>
+        </p:spPr>
+      </p:pic>
+      <p:pic>
+        <p:nvPicPr>
+          <p:cNvPr id="3076" name="Picture 4" descr="Logistic Regression">
+            <a:extLst>
+              <a:ext uri="{FF2B5EF4-FFF2-40B4-BE49-F238E27FC236}">
+                <a16:creationId xmlns:a16="http://schemas.microsoft.com/office/drawing/2014/main" id="{2AA27453-B847-AD5C-4877-5ED568E5E049}"/>
+              </a:ext>
+            </a:extLst>
+          </p:cNvPr>
+          <p:cNvPicPr>
+            <a:picLocks noChangeAspect="1" noChangeArrowheads="1"/>
+          </p:cNvPicPr>
+          <p:nvPr/>
+        </p:nvPicPr>
+        <p:blipFill>
+          <a:blip r:embed="rId3">
+            <a:extLst>
+              <a:ext uri="{28A0092B-C50C-407E-A947-70E740481C1C}">
+                <a14:useLocalDpi xmlns:a14="http://schemas.microsoft.com/office/drawing/2010/main" val="0"/>
+              </a:ext>
+            </a:extLst>
+          </a:blip>
+          <a:srcRect/>
+          <a:stretch>
+            <a:fillRect/>
+          </a:stretch>
+        </p:blipFill>
+        <p:spPr bwMode="auto">
+          <a:xfrm>
+            <a:off x="9311640" y="3063239"/>
+            <a:ext cx="2880361" cy="3040381"/>
+          </a:xfrm>
+          <a:prstGeom prst="rect">
+            <a:avLst/>
+          </a:prstGeom>
+          <a:noFill/>
+          <a:extLst>
+            <a:ext uri="{909E8E84-426E-40DD-AFC4-6F175D3DCCD1}">
+              <a14:hiddenFill xmlns:a14="http://schemas.microsoft.com/office/drawing/2010/main">
+                <a:solidFill>
+                  <a:srgbClr val="FFFFFF"/>
+                </a:solidFill>
+              </a14:hiddenFill>
+            </a:ext>
+          </a:extLst>
+        </p:spPr>
+      </p:pic>
+    </p:spTree>
+    <p:extLst>
+      <p:ext uri="{BB962C8B-B14F-4D97-AF65-F5344CB8AC3E}">
+        <p14:creationId xmlns:p14="http://schemas.microsoft.com/office/powerpoint/2010/main" val="1557148674"/>
+      </p:ext>
+    </p:extLst>
+  </p:cSld>
+  <p:clrMapOvr>
+    <a:masterClrMapping/>
+  </p:clrMapOvr>
+</p:sld>
+</file>
+
+<file path=ppt/slides/slide13.xml><?xml version="1.0" encoding="utf-8"?>
+<p:sld xmlns:a="http://schemas.openxmlformats.org/drawingml/2006/main" xmlns:r="http://schemas.openxmlformats.org/officeDocument/2006/relationships" xmlns:p="http://schemas.openxmlformats.org/presentationml/2006/main">
+  <p:cSld>
+    <p:spTree>
+      <p:nvGrpSpPr>
+        <p:cNvPr id="1" name=""/>
+        <p:cNvGrpSpPr/>
+        <p:nvPr/>
+      </p:nvGrpSpPr>
+      <p:grpSpPr>
+        <a:xfrm>
+          <a:off x="0" y="0"/>
+          <a:ext cx="0" cy="0"/>
+          <a:chOff x="0" y="0"/>
+          <a:chExt cx="0" cy="0"/>
+        </a:xfrm>
+      </p:grpSpPr>
+      <p:sp>
+        <p:nvSpPr>
+          <p:cNvPr id="2" name="Title 1">
+            <a:extLst>
+              <a:ext uri="{FF2B5EF4-FFF2-40B4-BE49-F238E27FC236}">
+                <a16:creationId xmlns:a16="http://schemas.microsoft.com/office/drawing/2014/main" id="{DBADC23E-81B1-D949-ED13-5AA32B801B31}"/>
+              </a:ext>
+            </a:extLst>
+          </p:cNvPr>
+          <p:cNvSpPr>
+            <a:spLocks noGrp="1"/>
+          </p:cNvSpPr>
+          <p:nvPr>
+            <p:ph type="title"/>
+          </p:nvPr>
+        </p:nvSpPr>
+        <p:spPr>
+          <a:xfrm>
+            <a:off x="1451579" y="1"/>
+            <a:ext cx="9603275" cy="708659"/>
+          </a:xfrm>
+        </p:spPr>
+        <p:txBody>
+          <a:bodyPr/>
+          <a:lstStyle/>
+          <a:p>
+            <a:r>
+              <a:rPr lang="en-US" dirty="0"/>
+              <a:t>At bottom of Logistic Regression Code</a:t>
+            </a:r>
+          </a:p>
+        </p:txBody>
+      </p:sp>
+      <p:sp>
+        <p:nvSpPr>
+          <p:cNvPr id="3" name="Content Placeholder 2">
+            <a:extLst>
+              <a:ext uri="{FF2B5EF4-FFF2-40B4-BE49-F238E27FC236}">
+                <a16:creationId xmlns:a16="http://schemas.microsoft.com/office/drawing/2014/main" id="{05452937-88E5-8960-688A-42135C3CB740}"/>
+              </a:ext>
+            </a:extLst>
+          </p:cNvPr>
+          <p:cNvSpPr>
+            <a:spLocks noGrp="1"/>
+          </p:cNvSpPr>
+          <p:nvPr>
+            <p:ph idx="1"/>
+          </p:nvPr>
+        </p:nvSpPr>
+        <p:spPr/>
+        <p:txBody>
+          <a:bodyPr/>
+          <a:lstStyle/>
+          <a:p>
+            <a:endParaRPr lang="en-US"/>
+          </a:p>
+        </p:txBody>
+      </p:sp>
+      <p:pic>
+        <p:nvPicPr>
+          <p:cNvPr id="6" name="Picture 5">
+            <a:extLst>
+              <a:ext uri="{FF2B5EF4-FFF2-40B4-BE49-F238E27FC236}">
+                <a16:creationId xmlns:a16="http://schemas.microsoft.com/office/drawing/2014/main" id="{4B3016EB-70FA-7AC3-CA72-EF73322A694F}"/>
+              </a:ext>
+            </a:extLst>
+          </p:cNvPr>
+          <p:cNvPicPr>
+            <a:picLocks noChangeAspect="1"/>
+          </p:cNvPicPr>
+          <p:nvPr/>
+        </p:nvPicPr>
+        <p:blipFill>
+          <a:blip r:embed="rId2"/>
+          <a:stretch>
+            <a:fillRect/>
+          </a:stretch>
+        </p:blipFill>
+        <p:spPr>
+          <a:xfrm>
+            <a:off x="0" y="605590"/>
+            <a:ext cx="12183342" cy="5642810"/>
+          </a:xfrm>
+          <a:prstGeom prst="rect">
+            <a:avLst/>
+          </a:prstGeom>
+        </p:spPr>
+      </p:pic>
+    </p:spTree>
+    <p:extLst>
+      <p:ext uri="{BB962C8B-B14F-4D97-AF65-F5344CB8AC3E}">
+        <p14:creationId xmlns:p14="http://schemas.microsoft.com/office/powerpoint/2010/main" val="3758841877"/>
+      </p:ext>
+    </p:extLst>
+  </p:cSld>
+  <p:clrMapOvr>
+    <a:masterClrMapping/>
+  </p:clrMapOvr>
+</p:sld>
+</file>
+
+<file path=ppt/slides/slide14.xml><?xml version="1.0" encoding="utf-8"?>
+<p:sld xmlns:a="http://schemas.openxmlformats.org/drawingml/2006/main" xmlns:r="http://schemas.openxmlformats.org/officeDocument/2006/relationships" xmlns:p="http://schemas.openxmlformats.org/presentationml/2006/main">
+  <p:cSld>
+    <p:spTree>
+      <p:nvGrpSpPr>
+        <p:cNvPr id="1" name=""/>
+        <p:cNvGrpSpPr/>
+        <p:nvPr/>
+      </p:nvGrpSpPr>
+      <p:grpSpPr>
+        <a:xfrm>
+          <a:off x="0" y="0"/>
+          <a:ext cx="0" cy="0"/>
+          <a:chOff x="0" y="0"/>
+          <a:chExt cx="0" cy="0"/>
+        </a:xfrm>
+      </p:grpSpPr>
+      <p:sp>
+        <p:nvSpPr>
+          <p:cNvPr id="2" name="Title 1">
+            <a:extLst>
+              <a:ext uri="{FF2B5EF4-FFF2-40B4-BE49-F238E27FC236}">
+                <a16:creationId xmlns:a16="http://schemas.microsoft.com/office/drawing/2014/main" id="{B3895D26-77CB-5048-8DE4-A9B849C711E7}"/>
+              </a:ext>
+            </a:extLst>
+          </p:cNvPr>
+          <p:cNvSpPr>
+            <a:spLocks noGrp="1"/>
+          </p:cNvSpPr>
+          <p:nvPr>
+            <p:ph type="ctrTitle"/>
+          </p:nvPr>
+        </p:nvSpPr>
+        <p:spPr/>
+        <p:txBody>
+          <a:bodyPr/>
+          <a:lstStyle/>
+          <a:p>
+            <a:r>
+              <a:rPr lang="en-US" dirty="0"/>
+              <a:t>Naïve Bayes</a:t>
+            </a:r>
+          </a:p>
+        </p:txBody>
+      </p:sp>
+      <p:sp>
+        <p:nvSpPr>
+          <p:cNvPr id="3" name="Subtitle 2">
+            <a:extLst>
+              <a:ext uri="{FF2B5EF4-FFF2-40B4-BE49-F238E27FC236}">
+                <a16:creationId xmlns:a16="http://schemas.microsoft.com/office/drawing/2014/main" id="{A780B032-B292-674D-855C-81EE4ADE6150}"/>
+              </a:ext>
+            </a:extLst>
+          </p:cNvPr>
+          <p:cNvSpPr>
+            <a:spLocks noGrp="1"/>
+          </p:cNvSpPr>
+          <p:nvPr>
+            <p:ph type="subTitle" idx="1"/>
+          </p:nvPr>
+        </p:nvSpPr>
+        <p:spPr/>
+        <p:txBody>
+          <a:bodyPr/>
+          <a:lstStyle/>
+          <a:p>
+            <a:endParaRPr lang="en-US"/>
+          </a:p>
+        </p:txBody>
+      </p:sp>
+    </p:spTree>
+    <p:extLst>
+      <p:ext uri="{BB962C8B-B14F-4D97-AF65-F5344CB8AC3E}">
+        <p14:creationId xmlns:p14="http://schemas.microsoft.com/office/powerpoint/2010/main" val="103797951"/>
+      </p:ext>
+    </p:extLst>
+  </p:cSld>
+  <p:clrMapOvr>
+    <a:masterClrMapping/>
+  </p:clrMapOvr>
+</p:sld>
+</file>
+
+<file path=ppt/slides/slide15.xml><?xml version="1.0" encoding="utf-8"?>
+<p:sld xmlns:a="http://schemas.openxmlformats.org/drawingml/2006/main" xmlns:r="http://schemas.openxmlformats.org/officeDocument/2006/relationships" xmlns:p="http://schemas.openxmlformats.org/presentationml/2006/main">
+  <p:cSld>
+    <p:spTree>
+      <p:nvGrpSpPr>
+        <p:cNvPr id="1" name=""/>
+        <p:cNvGrpSpPr/>
+        <p:nvPr/>
+      </p:nvGrpSpPr>
+      <p:grpSpPr>
+        <a:xfrm>
+          <a:off x="0" y="0"/>
+          <a:ext cx="0" cy="0"/>
+          <a:chOff x="0" y="0"/>
+          <a:chExt cx="0" cy="0"/>
+        </a:xfrm>
+      </p:grpSpPr>
+      <p:sp>
+        <p:nvSpPr>
+          <p:cNvPr id="2" name="Title 1">
+            <a:extLst>
+              <a:ext uri="{FF2B5EF4-FFF2-40B4-BE49-F238E27FC236}">
+                <a16:creationId xmlns:a16="http://schemas.microsoft.com/office/drawing/2014/main" id="{0E22FC0B-61AD-1F6E-3C66-FF8CAE0E2AD4}"/>
+              </a:ext>
+            </a:extLst>
+          </p:cNvPr>
+          <p:cNvSpPr>
+            <a:spLocks noGrp="1"/>
+          </p:cNvSpPr>
+          <p:nvPr>
+            <p:ph type="title"/>
+          </p:nvPr>
+        </p:nvSpPr>
+        <p:spPr/>
+        <p:txBody>
+          <a:bodyPr/>
+          <a:lstStyle/>
+          <a:p>
+            <a:r>
+              <a:rPr lang="en-US" dirty="0"/>
+              <a:t>Probability – Remember it!</a:t>
+            </a:r>
+          </a:p>
+        </p:txBody>
+      </p:sp>
+      <p:sp>
+        <p:nvSpPr>
+          <p:cNvPr id="3" name="Content Placeholder 2">
+            <a:extLst>
+              <a:ext uri="{FF2B5EF4-FFF2-40B4-BE49-F238E27FC236}">
+                <a16:creationId xmlns:a16="http://schemas.microsoft.com/office/drawing/2014/main" id="{FCF803DB-F57D-5E3B-58C8-97671A475C9F}"/>
+              </a:ext>
+            </a:extLst>
+          </p:cNvPr>
+          <p:cNvSpPr>
+            <a:spLocks noGrp="1"/>
+          </p:cNvSpPr>
+          <p:nvPr>
+            <p:ph idx="1"/>
+          </p:nvPr>
+        </p:nvSpPr>
+        <p:spPr>
+          <a:xfrm>
+            <a:off x="1451579" y="1912620"/>
+            <a:ext cx="9603275" cy="4140861"/>
+          </a:xfrm>
+        </p:spPr>
+        <p:txBody>
+          <a:bodyPr>
+            <a:normAutofit lnSpcReduction="10000"/>
+          </a:bodyPr>
+          <a:lstStyle/>
+          <a:p>
+            <a:r>
+              <a:rPr lang="en-US" dirty="0"/>
+              <a:t>Recall the idea of probability. </a:t>
+            </a:r>
+          </a:p>
+          <a:p>
+            <a:pPr lvl="1"/>
+            <a:r>
+              <a:rPr lang="en-US" dirty="0"/>
+              <a:t>P(A) – what is the likelihood that A will happen. </a:t>
+            </a:r>
+          </a:p>
+          <a:p>
+            <a:r>
+              <a:rPr lang="en-US" dirty="0"/>
+              <a:t>Probability comes up directly in several inferential things:</a:t>
+            </a:r>
+          </a:p>
+          <a:p>
+            <a:pPr lvl="1"/>
+            <a:r>
+              <a:rPr lang="en-US" dirty="0"/>
+              <a:t>Monte Carlo simulation and hypothesis testing. </a:t>
+            </a:r>
+          </a:p>
+          <a:p>
+            <a:pPr lvl="1"/>
+            <a:r>
+              <a:rPr lang="en-US" dirty="0"/>
+              <a:t>Odds and logit for gradient descent and logistic regression. </a:t>
+            </a:r>
+          </a:p>
+          <a:p>
+            <a:r>
+              <a:rPr lang="en-US" dirty="0"/>
+              <a:t>We can understand all* of the stats we’ve done from the perspective of probability. </a:t>
+            </a:r>
+          </a:p>
+          <a:p>
+            <a:pPr lvl="1"/>
+            <a:r>
+              <a:rPr lang="en-US" dirty="0"/>
+              <a:t>We track what happens in data (assume categorical features/targets for this). </a:t>
+            </a:r>
+          </a:p>
+          <a:p>
+            <a:pPr lvl="1"/>
+            <a:r>
+              <a:rPr lang="en-US" dirty="0"/>
+              <a:t>These happenings can be converted into probabilities. </a:t>
+            </a:r>
+          </a:p>
+          <a:p>
+            <a:pPr lvl="1"/>
+            <a:r>
+              <a:rPr lang="en-US" dirty="0"/>
+              <a:t>Bayesian statistics explains the ideas we’ve covered, but looking at probability. </a:t>
+            </a:r>
+          </a:p>
+          <a:p>
+            <a:r>
+              <a:rPr lang="en-US" dirty="0"/>
+              <a:t>Log. Reg. Classification models predict the probability something will happen!</a:t>
+            </a:r>
+          </a:p>
+        </p:txBody>
+      </p:sp>
+    </p:spTree>
+    <p:extLst>
+      <p:ext uri="{BB962C8B-B14F-4D97-AF65-F5344CB8AC3E}">
+        <p14:creationId xmlns:p14="http://schemas.microsoft.com/office/powerpoint/2010/main" val="851535766"/>
+      </p:ext>
+    </p:extLst>
+  </p:cSld>
+  <p:clrMapOvr>
+    <a:masterClrMapping/>
+  </p:clrMapOvr>
+</p:sld>
+</file>
+
+<file path=ppt/slides/slide16.xml><?xml version="1.0" encoding="utf-8"?>
+<p:sld xmlns:a="http://schemas.openxmlformats.org/drawingml/2006/main" xmlns:r="http://schemas.openxmlformats.org/officeDocument/2006/relationships" xmlns:p="http://schemas.openxmlformats.org/presentationml/2006/main" show="0">
+  <p:cSld>
+    <p:spTree>
+      <p:nvGrpSpPr>
+        <p:cNvPr id="1" name=""/>
+        <p:cNvGrpSpPr/>
+        <p:nvPr/>
+      </p:nvGrpSpPr>
+      <p:grpSpPr>
+        <a:xfrm>
+          <a:off x="0" y="0"/>
+          <a:ext cx="0" cy="0"/>
+          <a:chOff x="0" y="0"/>
+          <a:chExt cx="0" cy="0"/>
+        </a:xfrm>
+      </p:grpSpPr>
+      <p:sp>
+        <p:nvSpPr>
+          <p:cNvPr id="2" name="Title 1">
+            <a:extLst>
+              <a:ext uri="{FF2B5EF4-FFF2-40B4-BE49-F238E27FC236}">
+                <a16:creationId xmlns:a16="http://schemas.microsoft.com/office/drawing/2014/main" id="{C350A8CB-103E-B491-DBA9-1234FE730BF2}"/>
+              </a:ext>
+            </a:extLst>
+          </p:cNvPr>
+          <p:cNvSpPr>
+            <a:spLocks noGrp="1"/>
+          </p:cNvSpPr>
+          <p:nvPr>
+            <p:ph type="title"/>
+          </p:nvPr>
+        </p:nvSpPr>
+        <p:spPr/>
+        <p:txBody>
+          <a:bodyPr/>
+          <a:lstStyle/>
+          <a:p>
+            <a:r>
+              <a:rPr lang="en-US" dirty="0"/>
+              <a:t>Note on Features </a:t>
+            </a:r>
+          </a:p>
+        </p:txBody>
+      </p:sp>
+      <p:sp>
+        <p:nvSpPr>
+          <p:cNvPr id="3" name="Content Placeholder 2">
+            <a:extLst>
+              <a:ext uri="{FF2B5EF4-FFF2-40B4-BE49-F238E27FC236}">
+                <a16:creationId xmlns:a16="http://schemas.microsoft.com/office/drawing/2014/main" id="{D46B6B3F-F17C-A75A-D035-14381BBCE32A}"/>
+              </a:ext>
+            </a:extLst>
+          </p:cNvPr>
+          <p:cNvSpPr>
+            <a:spLocks noGrp="1"/>
+          </p:cNvSpPr>
+          <p:nvPr>
+            <p:ph idx="1"/>
+          </p:nvPr>
+        </p:nvSpPr>
+        <p:spPr>
+          <a:xfrm>
+            <a:off x="1451579" y="1853754"/>
+            <a:ext cx="9603275" cy="4199727"/>
+          </a:xfrm>
+        </p:spPr>
+        <p:txBody>
+          <a:bodyPr/>
+          <a:lstStyle/>
+          <a:p>
+            <a:r>
+              <a:rPr lang="en-US" dirty="0"/>
+              <a:t>In this stuff we’ll use totally categorical data. </a:t>
+            </a:r>
+          </a:p>
+          <a:p>
+            <a:pPr lvl="1"/>
+            <a:r>
+              <a:rPr lang="en-US" dirty="0"/>
+              <a:t>Classification of categorical target. </a:t>
+            </a:r>
+          </a:p>
+          <a:p>
+            <a:pPr lvl="1"/>
+            <a:r>
+              <a:rPr lang="en-US" dirty="0"/>
+              <a:t>Features are all categorical. </a:t>
+            </a:r>
+          </a:p>
+          <a:p>
+            <a:r>
+              <a:rPr lang="en-US" dirty="0"/>
+              <a:t>We </a:t>
+            </a:r>
+            <a:r>
+              <a:rPr lang="en-US" i="1" dirty="0"/>
+              <a:t>can</a:t>
+            </a:r>
+            <a:r>
+              <a:rPr lang="en-US" dirty="0"/>
+              <a:t> use numeric features, but we won’t now. </a:t>
+            </a:r>
+          </a:p>
+          <a:p>
+            <a:pPr lvl="1"/>
+            <a:r>
+              <a:rPr lang="en-US" dirty="0"/>
+              <a:t>Practically, this is very easy to do, follows most sklearn conventions. </a:t>
+            </a:r>
+          </a:p>
+          <a:p>
+            <a:pPr lvl="1"/>
+            <a:r>
+              <a:rPr lang="en-US" dirty="0"/>
+              <a:t>Several model types just make more sense to explain with one or the other. </a:t>
+            </a:r>
+          </a:p>
+          <a:p>
+            <a:r>
+              <a:rPr lang="en-US" dirty="0"/>
+              <a:t>This is one where the model assumes normal distribution of features. </a:t>
+            </a:r>
+          </a:p>
+          <a:p>
+            <a:pPr lvl="1"/>
+            <a:r>
+              <a:rPr lang="en-US" dirty="0"/>
+              <a:t>Probability calculations are similar to hypothesis test probabilities. </a:t>
+            </a:r>
+          </a:p>
+          <a:p>
+            <a:pPr lvl="1"/>
+            <a:r>
+              <a:rPr lang="en-US" dirty="0"/>
+              <a:t>The closer the features are to normal, the better the results. </a:t>
+            </a:r>
+          </a:p>
+        </p:txBody>
+      </p:sp>
+      <p:pic>
+        <p:nvPicPr>
+          <p:cNvPr id="1026" name="Picture 2" descr="Gaussian Naive Bayes - GeeksforGeeks">
+            <a:extLst>
+              <a:ext uri="{FF2B5EF4-FFF2-40B4-BE49-F238E27FC236}">
+                <a16:creationId xmlns:a16="http://schemas.microsoft.com/office/drawing/2014/main" id="{33BDC3CA-1B3E-CF82-C90A-05DF2F13B97B}"/>
+              </a:ext>
+            </a:extLst>
+          </p:cNvPr>
+          <p:cNvPicPr>
+            <a:picLocks noChangeAspect="1" noChangeArrowheads="1"/>
+          </p:cNvPicPr>
+          <p:nvPr/>
+        </p:nvPicPr>
+        <p:blipFill rotWithShape="1">
+          <a:blip r:embed="rId2">
+            <a:extLst>
+              <a:ext uri="{28A0092B-C50C-407E-A947-70E740481C1C}">
+                <a14:useLocalDpi xmlns:a14="http://schemas.microsoft.com/office/drawing/2010/main" val="0"/>
+              </a:ext>
+            </a:extLst>
+          </a:blip>
+          <a:srcRect l="6236" r="4288"/>
+          <a:stretch>
+            <a:fillRect/>
+          </a:stretch>
+        </p:blipFill>
+        <p:spPr bwMode="auto">
+          <a:xfrm>
+            <a:off x="6705331" y="0"/>
+            <a:ext cx="5486669" cy="3066011"/>
+          </a:xfrm>
+          <a:prstGeom prst="rect">
+            <a:avLst/>
+          </a:prstGeom>
+          <a:noFill/>
+          <a:extLst>
+            <a:ext uri="{909E8E84-426E-40DD-AFC4-6F175D3DCCD1}">
+              <a14:hiddenFill xmlns:a14="http://schemas.microsoft.com/office/drawing/2010/main">
+                <a:solidFill>
+                  <a:srgbClr val="FFFFFF"/>
+                </a:solidFill>
+              </a14:hiddenFill>
+            </a:ext>
+          </a:extLst>
+        </p:spPr>
+      </p:pic>
+    </p:spTree>
+    <p:extLst>
+      <p:ext uri="{BB962C8B-B14F-4D97-AF65-F5344CB8AC3E}">
+        <p14:creationId xmlns:p14="http://schemas.microsoft.com/office/powerpoint/2010/main" val="1072223588"/>
+      </p:ext>
+    </p:extLst>
+  </p:cSld>
+  <p:clrMapOvr>
+    <a:masterClrMapping/>
+  </p:clrMapOvr>
+</p:sld>
+</file>
+
+<file path=ppt/slides/slide17.xml><?xml version="1.0" encoding="utf-8"?>
+<p:sld xmlns:a="http://schemas.openxmlformats.org/drawingml/2006/main" xmlns:r="http://schemas.openxmlformats.org/officeDocument/2006/relationships" xmlns:p="http://schemas.openxmlformats.org/presentationml/2006/main">
+  <p:cSld>
+    <p:spTree>
+      <p:nvGrpSpPr>
+        <p:cNvPr id="1" name=""/>
+        <p:cNvGrpSpPr/>
+        <p:nvPr/>
+      </p:nvGrpSpPr>
+      <p:grpSpPr>
+        <a:xfrm>
+          <a:off x="0" y="0"/>
+          <a:ext cx="0" cy="0"/>
+          <a:chOff x="0" y="0"/>
+          <a:chExt cx="0" cy="0"/>
+        </a:xfrm>
+      </p:grpSpPr>
+      <p:sp>
+        <p:nvSpPr>
+          <p:cNvPr id="2" name="Title 1">
+            <a:extLst>
+              <a:ext uri="{FF2B5EF4-FFF2-40B4-BE49-F238E27FC236}">
+                <a16:creationId xmlns:a16="http://schemas.microsoft.com/office/drawing/2014/main" id="{C434CD5E-C5F9-36E1-D902-FBC23F1EE80F}"/>
+              </a:ext>
+            </a:extLst>
+          </p:cNvPr>
+          <p:cNvSpPr>
+            <a:spLocks noGrp="1"/>
+          </p:cNvSpPr>
+          <p:nvPr>
+            <p:ph type="title"/>
+          </p:nvPr>
+        </p:nvSpPr>
+        <p:spPr/>
+        <p:txBody>
+          <a:bodyPr/>
+          <a:lstStyle/>
+          <a:p>
+            <a:r>
+              <a:rPr lang="en-US" dirty="0"/>
+              <a:t>Conditional Probability</a:t>
+            </a:r>
+          </a:p>
+        </p:txBody>
+      </p:sp>
+      <p:sp>
+        <p:nvSpPr>
+          <p:cNvPr id="3" name="Content Placeholder 2">
+            <a:extLst>
+              <a:ext uri="{FF2B5EF4-FFF2-40B4-BE49-F238E27FC236}">
+                <a16:creationId xmlns:a16="http://schemas.microsoft.com/office/drawing/2014/main" id="{F4C2CACC-9724-6AB9-0C2C-94E7AFD07733}"/>
+              </a:ext>
+            </a:extLst>
+          </p:cNvPr>
+          <p:cNvSpPr>
+            <a:spLocks noGrp="1"/>
+          </p:cNvSpPr>
+          <p:nvPr>
+            <p:ph idx="1"/>
+          </p:nvPr>
+        </p:nvSpPr>
+        <p:spPr>
+          <a:xfrm>
+            <a:off x="1451579" y="1853754"/>
+            <a:ext cx="9603275" cy="4199727"/>
+          </a:xfrm>
+        </p:spPr>
+        <p:txBody>
+          <a:bodyPr>
+            <a:normAutofit lnSpcReduction="10000"/>
+          </a:bodyPr>
+          <a:lstStyle/>
+          <a:p>
+            <a:r>
+              <a:rPr lang="en-US" dirty="0"/>
+              <a:t>Using probabilities for prediction relies on conditional probabilities. </a:t>
+            </a:r>
+          </a:p>
+          <a:p>
+            <a:pPr lvl="1"/>
+            <a:r>
+              <a:rPr lang="en-US" dirty="0"/>
+              <a:t>Given this fact, what is the probability. </a:t>
+            </a:r>
+          </a:p>
+          <a:p>
+            <a:pPr lvl="1"/>
+            <a:r>
+              <a:rPr lang="en-US" dirty="0"/>
+              <a:t>E.g. if you have high blood pressure, what is the likelihood of a stroke. </a:t>
+            </a:r>
+          </a:p>
+          <a:p>
+            <a:r>
+              <a:rPr lang="en-US" dirty="0"/>
+              <a:t>We can express conditional probabilities like this:</a:t>
+            </a:r>
+          </a:p>
+          <a:p>
+            <a:pPr lvl="1"/>
+            <a:r>
+              <a:rPr lang="en-US" dirty="0"/>
+              <a:t>P(A | B) – probability of A, given that B is true. </a:t>
+            </a:r>
+          </a:p>
+          <a:p>
+            <a:r>
+              <a:rPr lang="en-US" dirty="0"/>
+              <a:t>In datasets, this conditional probability could be calculated for any combo. E.g.</a:t>
+            </a:r>
+          </a:p>
+          <a:p>
+            <a:pPr lvl="1"/>
+            <a:r>
+              <a:rPr lang="en-US" dirty="0"/>
+              <a:t>P( stroke | high blood pressure)</a:t>
+            </a:r>
+          </a:p>
+          <a:p>
+            <a:pPr lvl="1"/>
+            <a:r>
+              <a:rPr lang="en-US" dirty="0"/>
+              <a:t>P( stroke | high BMI)</a:t>
+            </a:r>
+          </a:p>
+          <a:p>
+            <a:pPr lvl="1"/>
+            <a:r>
+              <a:rPr lang="en-US" dirty="0"/>
+              <a:t>P( stroke | high BMI and high blood pressure)</a:t>
+            </a:r>
+          </a:p>
+          <a:p>
+            <a:r>
+              <a:rPr lang="en-US" dirty="0"/>
+              <a:t>The A is our Y, what we want; Bs are our </a:t>
+            </a:r>
+            <a:r>
+              <a:rPr lang="en-US" dirty="0" err="1"/>
+              <a:t>Xs</a:t>
+            </a:r>
+            <a:r>
+              <a:rPr lang="en-US" dirty="0"/>
+              <a:t>, what we know (features). </a:t>
+            </a:r>
+          </a:p>
+        </p:txBody>
+      </p:sp>
+    </p:spTree>
+    <p:extLst>
+      <p:ext uri="{BB962C8B-B14F-4D97-AF65-F5344CB8AC3E}">
+        <p14:creationId xmlns:p14="http://schemas.microsoft.com/office/powerpoint/2010/main" val="2149056855"/>
+      </p:ext>
+    </p:extLst>
+  </p:cSld>
+  <p:clrMapOvr>
+    <a:masterClrMapping/>
+  </p:clrMapOvr>
+</p:sld>
+</file>
+
+<file path=ppt/slides/slide18.xml><?xml version="1.0" encoding="utf-8"?>
+<p:sld xmlns:a="http://schemas.openxmlformats.org/drawingml/2006/main" xmlns:r="http://schemas.openxmlformats.org/officeDocument/2006/relationships" xmlns:p="http://schemas.openxmlformats.org/presentationml/2006/main">
+  <p:cSld>
+    <p:spTree>
+      <p:nvGrpSpPr>
+        <p:cNvPr id="1" name=""/>
+        <p:cNvGrpSpPr/>
+        <p:nvPr/>
+      </p:nvGrpSpPr>
+      <p:grpSpPr>
+        <a:xfrm>
+          <a:off x="0" y="0"/>
+          <a:ext cx="0" cy="0"/>
+          <a:chOff x="0" y="0"/>
+          <a:chExt cx="0" cy="0"/>
+        </a:xfrm>
+      </p:grpSpPr>
+      <p:sp>
+        <p:nvSpPr>
+          <p:cNvPr id="2" name="Title 1">
+            <a:extLst>
+              <a:ext uri="{FF2B5EF4-FFF2-40B4-BE49-F238E27FC236}">
                 <a16:creationId xmlns:a16="http://schemas.microsoft.com/office/drawing/2014/main" id="{908E2F3D-7F2C-87A8-F7BD-87C1626B3CCF}"/>
               </a:ext>
             </a:extLst>
@@ -4015,8 +5427,8 @@
         </p:nvSpPr>
         <p:spPr>
           <a:xfrm>
-            <a:off x="1451579" y="2015732"/>
-            <a:ext cx="9603275" cy="3965968"/>
+            <a:off x="1451579" y="1853754"/>
+            <a:ext cx="9603275" cy="4127946"/>
           </a:xfrm>
         </p:spPr>
         <p:txBody>
@@ -4069,9 +5481,24 @@
             </a:r>
           </a:p>
           <a:p>
-            <a:r>
-              <a:rPr lang="en-US" dirty="0"/>
-              <a:t>We can label them prior and posterior. </a:t>
+            <a:pPr lvl="1"/>
+            <a:r>
+              <a:rPr lang="en-US" dirty="0"/>
+              <a:t>Will they live… if young, obese, family history, </a:t>
+            </a:r>
+            <a:r>
+              <a:rPr lang="en-US" dirty="0" err="1"/>
+              <a:t>etc</a:t>
+            </a:r>
+            <a:r>
+              <a:rPr lang="en-US" dirty="0"/>
+              <a:t>…</a:t>
+            </a:r>
+          </a:p>
+          <a:p>
+            <a:r>
+              <a:rPr lang="en-US" dirty="0"/>
+              <a:t>We can the probabilities as prior and posterior. </a:t>
             </a:r>
           </a:p>
         </p:txBody>
@@ -4136,7 +5563,7 @@
 </p:sld>
 </file>
 
-<file path=ppt/slides/slide12.xml><?xml version="1.0" encoding="utf-8"?>
+<file path=ppt/slides/slide19.xml><?xml version="1.0" encoding="utf-8"?>
 <p:sld xmlns:a="http://schemas.openxmlformats.org/drawingml/2006/main" xmlns:r="http://schemas.openxmlformats.org/officeDocument/2006/relationships" xmlns:p="http://schemas.openxmlformats.org/presentationml/2006/main">
   <p:cSld>
     <p:spTree>
@@ -4222,7 +5649,7 @@
 </p:sld>
 </file>
 
-<file path=ppt/slides/slide13.xml><?xml version="1.0" encoding="utf-8"?>
+<file path=ppt/slides/slide2.xml><?xml version="1.0" encoding="utf-8"?>
 <p:sld xmlns:a="http://schemas.openxmlformats.org/drawingml/2006/main" xmlns:r="http://schemas.openxmlformats.org/officeDocument/2006/relationships" xmlns:p="http://schemas.openxmlformats.org/presentationml/2006/main">
   <p:cSld>
     <p:spTree>
@@ -4244,6 +5671,1272 @@
           <p:cNvPr id="2" name="Title 1">
             <a:extLst>
               <a:ext uri="{FF2B5EF4-FFF2-40B4-BE49-F238E27FC236}">
+                <a16:creationId xmlns:a16="http://schemas.microsoft.com/office/drawing/2014/main" id="{0FFC9AEB-116D-42CD-AAFB-F9DFF9A14DB8}"/>
+              </a:ext>
+            </a:extLst>
+          </p:cNvPr>
+          <p:cNvSpPr>
+            <a:spLocks noGrp="1"/>
+          </p:cNvSpPr>
+          <p:nvPr>
+            <p:ph type="title"/>
+          </p:nvPr>
+        </p:nvSpPr>
+        <p:spPr/>
+        <p:txBody>
+          <a:bodyPr/>
+          <a:lstStyle/>
+          <a:p>
+            <a:r>
+              <a:rPr lang="en-US" dirty="0"/>
+              <a:t>Housekeeping</a:t>
+            </a:r>
+          </a:p>
+        </p:txBody>
+      </p:sp>
+      <p:sp>
+        <p:nvSpPr>
+          <p:cNvPr id="3" name="Content Placeholder 2">
+            <a:extLst>
+              <a:ext uri="{FF2B5EF4-FFF2-40B4-BE49-F238E27FC236}">
+                <a16:creationId xmlns:a16="http://schemas.microsoft.com/office/drawing/2014/main" id="{638B2240-35C9-D562-BADA-D7D93C21F02E}"/>
+              </a:ext>
+            </a:extLst>
+          </p:cNvPr>
+          <p:cNvSpPr>
+            <a:spLocks noGrp="1"/>
+          </p:cNvSpPr>
+          <p:nvPr>
+            <p:ph idx="1"/>
+          </p:nvPr>
+        </p:nvSpPr>
+        <p:spPr>
+          <a:xfrm>
+            <a:off x="1451579" y="1853754"/>
+            <a:ext cx="9603275" cy="4199727"/>
+          </a:xfrm>
+        </p:spPr>
+        <p:txBody>
+          <a:bodyPr/>
+          <a:lstStyle/>
+          <a:p>
+            <a:r>
+              <a:rPr lang="en-US" dirty="0"/>
+              <a:t>Probability, conditional probability, and (potentially) Bayes. </a:t>
+            </a:r>
+          </a:p>
+          <a:p>
+            <a:pPr lvl="1"/>
+            <a:r>
+              <a:rPr lang="en-US" dirty="0"/>
+              <a:t>Please be honest about what makes sense, we’ll see how far we can get. </a:t>
+            </a:r>
+          </a:p>
+          <a:p>
+            <a:pPr lvl="1"/>
+            <a:r>
+              <a:rPr lang="en-US" dirty="0"/>
+              <a:t>Largely example based, the core theory of probability is pretty simple. </a:t>
+            </a:r>
+          </a:p>
+          <a:p>
+            <a:r>
+              <a:rPr lang="en-US" dirty="0"/>
+              <a:t>For test things, conditional probability is fair game, after that is off. </a:t>
+            </a:r>
+          </a:p>
+          <a:p>
+            <a:r>
+              <a:rPr lang="en-US" dirty="0"/>
+              <a:t>We’ll finish the topic next Monday, the last class.</a:t>
+            </a:r>
+          </a:p>
+          <a:p>
+            <a:pPr lvl="1"/>
+            <a:r>
+              <a:rPr lang="en-US" dirty="0"/>
+              <a:t>We’ll cover the actual sklearn model then. </a:t>
+            </a:r>
+          </a:p>
+          <a:p>
+            <a:pPr lvl="1"/>
+            <a:r>
+              <a:rPr lang="en-US" dirty="0"/>
+              <a:t>We (probably) won’t get to deriving it, that’s worth a read through (w.b.32). </a:t>
+            </a:r>
+          </a:p>
+          <a:p>
+            <a:r>
+              <a:rPr lang="en-US" dirty="0"/>
+              <a:t>You can try Bayes for project stuff if you want. I’ll post that Wednesday. </a:t>
+            </a:r>
+          </a:p>
+          <a:p>
+            <a:pPr lvl="1"/>
+            <a:r>
+              <a:rPr lang="en-US" dirty="0"/>
+              <a:t>Might require a little data prep and/or documentation reading. </a:t>
+            </a:r>
+          </a:p>
+        </p:txBody>
+      </p:sp>
+    </p:spTree>
+    <p:extLst>
+      <p:ext uri="{BB962C8B-B14F-4D97-AF65-F5344CB8AC3E}">
+        <p14:creationId xmlns:p14="http://schemas.microsoft.com/office/powerpoint/2010/main" val="1560395533"/>
+      </p:ext>
+    </p:extLst>
+  </p:cSld>
+  <p:clrMapOvr>
+    <a:masterClrMapping/>
+  </p:clrMapOvr>
+</p:sld>
+</file>
+
+<file path=ppt/slides/slide20.xml><?xml version="1.0" encoding="utf-8"?>
+<p:sld xmlns:a="http://schemas.openxmlformats.org/drawingml/2006/main" xmlns:r="http://schemas.openxmlformats.org/officeDocument/2006/relationships" xmlns:p="http://schemas.openxmlformats.org/presentationml/2006/main">
+  <p:cSld>
+    <p:spTree>
+      <p:nvGrpSpPr>
+        <p:cNvPr id="1" name=""/>
+        <p:cNvGrpSpPr/>
+        <p:nvPr/>
+      </p:nvGrpSpPr>
+      <p:grpSpPr>
+        <a:xfrm>
+          <a:off x="0" y="0"/>
+          <a:ext cx="0" cy="0"/>
+          <a:chOff x="0" y="0"/>
+          <a:chExt cx="0" cy="0"/>
+        </a:xfrm>
+      </p:grpSpPr>
+      <p:sp>
+        <p:nvSpPr>
+          <p:cNvPr id="2" name="Title 1">
+            <a:extLst>
+              <a:ext uri="{FF2B5EF4-FFF2-40B4-BE49-F238E27FC236}">
+                <a16:creationId xmlns:a16="http://schemas.microsoft.com/office/drawing/2014/main" id="{EF919B0C-DAE0-39CD-F08A-8C1E8DD9877A}"/>
+              </a:ext>
+            </a:extLst>
+          </p:cNvPr>
+          <p:cNvSpPr>
+            <a:spLocks noGrp="1"/>
+          </p:cNvSpPr>
+          <p:nvPr>
+            <p:ph type="title"/>
+          </p:nvPr>
+        </p:nvSpPr>
+        <p:spPr/>
+        <p:txBody>
+          <a:bodyPr/>
+          <a:lstStyle/>
+          <a:p>
+            <a:r>
+              <a:rPr lang="en-US" dirty="0"/>
+              <a:t>Don’t Be lazy, We’re Getting </a:t>
+            </a:r>
+            <a:r>
+              <a:rPr lang="en-US" dirty="0" err="1"/>
+              <a:t>Bayesy</a:t>
+            </a:r>
+            <a:r>
+              <a:rPr lang="en-US" dirty="0"/>
+              <a:t>!</a:t>
+            </a:r>
+          </a:p>
+        </p:txBody>
+      </p:sp>
+      <p:sp>
+        <p:nvSpPr>
+          <p:cNvPr id="3" name="Content Placeholder 2">
+            <a:extLst>
+              <a:ext uri="{FF2B5EF4-FFF2-40B4-BE49-F238E27FC236}">
+                <a16:creationId xmlns:a16="http://schemas.microsoft.com/office/drawing/2014/main" id="{19BC3E02-E4F6-0DAF-084C-1C0051123FC8}"/>
+              </a:ext>
+            </a:extLst>
+          </p:cNvPr>
+          <p:cNvSpPr>
+            <a:spLocks noGrp="1"/>
+          </p:cNvSpPr>
+          <p:nvPr>
+            <p:ph idx="1"/>
+          </p:nvPr>
+        </p:nvSpPr>
+        <p:spPr/>
+        <p:txBody>
+          <a:bodyPr/>
+          <a:lstStyle/>
+          <a:p>
+            <a:endParaRPr lang="en-US"/>
+          </a:p>
+        </p:txBody>
+      </p:sp>
+      <p:pic>
+        <p:nvPicPr>
+          <p:cNvPr id="1026" name="Picture 2" descr="An Actual Introduction to Bayesian Statistics | by Oscar Nieves | Cantor's  Paradise">
+            <a:extLst>
+              <a:ext uri="{FF2B5EF4-FFF2-40B4-BE49-F238E27FC236}">
+                <a16:creationId xmlns:a16="http://schemas.microsoft.com/office/drawing/2014/main" id="{5C1659DB-CF36-6ECC-4EB4-3ADFE60BE31D}"/>
+              </a:ext>
+            </a:extLst>
+          </p:cNvPr>
+          <p:cNvPicPr>
+            <a:picLocks noChangeAspect="1" noChangeArrowheads="1"/>
+          </p:cNvPicPr>
+          <p:nvPr/>
+        </p:nvPicPr>
+        <p:blipFill>
+          <a:blip r:embed="rId2">
+            <a:extLst>
+              <a:ext uri="{28A0092B-C50C-407E-A947-70E740481C1C}">
+                <a14:useLocalDpi xmlns:a14="http://schemas.microsoft.com/office/drawing/2010/main" val="0"/>
+              </a:ext>
+            </a:extLst>
+          </a:blip>
+          <a:srcRect/>
+          <a:stretch>
+            <a:fillRect/>
+          </a:stretch>
+        </p:blipFill>
+        <p:spPr bwMode="auto">
+          <a:xfrm>
+            <a:off x="3021184" y="1853754"/>
+            <a:ext cx="6149631" cy="3958046"/>
+          </a:xfrm>
+          <a:prstGeom prst="rect">
+            <a:avLst/>
+          </a:prstGeom>
+          <a:noFill/>
+          <a:extLst>
+            <a:ext uri="{909E8E84-426E-40DD-AFC4-6F175D3DCCD1}">
+              <a14:hiddenFill xmlns:a14="http://schemas.microsoft.com/office/drawing/2010/main">
+                <a:solidFill>
+                  <a:srgbClr val="FFFFFF"/>
+                </a:solidFill>
+              </a14:hiddenFill>
+            </a:ext>
+          </a:extLst>
+        </p:spPr>
+      </p:pic>
+    </p:spTree>
+    <p:extLst>
+      <p:ext uri="{BB962C8B-B14F-4D97-AF65-F5344CB8AC3E}">
+        <p14:creationId xmlns:p14="http://schemas.microsoft.com/office/powerpoint/2010/main" val="345853294"/>
+      </p:ext>
+    </p:extLst>
+  </p:cSld>
+  <p:clrMapOvr>
+    <a:masterClrMapping/>
+  </p:clrMapOvr>
+</p:sld>
+</file>
+
+<file path=ppt/slides/slide21.xml><?xml version="1.0" encoding="utf-8"?>
+<p:sld xmlns:a="http://schemas.openxmlformats.org/drawingml/2006/main" xmlns:r="http://schemas.openxmlformats.org/officeDocument/2006/relationships" xmlns:p="http://schemas.openxmlformats.org/presentationml/2006/main">
+  <p:cSld>
+    <p:spTree>
+      <p:nvGrpSpPr>
+        <p:cNvPr id="1" name=""/>
+        <p:cNvGrpSpPr/>
+        <p:nvPr/>
+      </p:nvGrpSpPr>
+      <p:grpSpPr>
+        <a:xfrm>
+          <a:off x="0" y="0"/>
+          <a:ext cx="0" cy="0"/>
+          <a:chOff x="0" y="0"/>
+          <a:chExt cx="0" cy="0"/>
+        </a:xfrm>
+      </p:grpSpPr>
+      <p:sp>
+        <p:nvSpPr>
+          <p:cNvPr id="2" name="Title 1">
+            <a:extLst>
+              <a:ext uri="{FF2B5EF4-FFF2-40B4-BE49-F238E27FC236}">
+                <a16:creationId xmlns:a16="http://schemas.microsoft.com/office/drawing/2014/main" id="{DE25A467-095F-183E-2796-BB5EBB38ECA8}"/>
+              </a:ext>
+            </a:extLst>
+          </p:cNvPr>
+          <p:cNvSpPr>
+            <a:spLocks noGrp="1"/>
+          </p:cNvSpPr>
+          <p:nvPr>
+            <p:ph type="title"/>
+          </p:nvPr>
+        </p:nvSpPr>
+        <p:spPr/>
+        <p:txBody>
+          <a:bodyPr/>
+          <a:lstStyle/>
+          <a:p>
+            <a:r>
+              <a:rPr lang="en-US" dirty="0"/>
+              <a:t>Bayes and Conditions</a:t>
+            </a:r>
+          </a:p>
+        </p:txBody>
+      </p:sp>
+      <p:sp>
+        <p:nvSpPr>
+          <p:cNvPr id="3" name="Content Placeholder 2">
+            <a:extLst>
+              <a:ext uri="{FF2B5EF4-FFF2-40B4-BE49-F238E27FC236}">
+                <a16:creationId xmlns:a16="http://schemas.microsoft.com/office/drawing/2014/main" id="{D67F5A71-5454-32F3-F7A9-8812B5F14F47}"/>
+              </a:ext>
+            </a:extLst>
+          </p:cNvPr>
+          <p:cNvSpPr>
+            <a:spLocks noGrp="1"/>
+          </p:cNvSpPr>
+          <p:nvPr>
+            <p:ph idx="1"/>
+          </p:nvPr>
+        </p:nvSpPr>
+        <p:spPr>
+          <a:xfrm>
+            <a:off x="1451579" y="1853754"/>
+            <a:ext cx="9603275" cy="4199727"/>
+          </a:xfrm>
+        </p:spPr>
+        <p:txBody>
+          <a:bodyPr/>
+          <a:lstStyle/>
+          <a:p>
+            <a:r>
+              <a:rPr lang="en-US" dirty="0"/>
+              <a:t>Bayesian statistics is based on conditional probability. </a:t>
+            </a:r>
+          </a:p>
+          <a:p>
+            <a:pPr lvl="1"/>
+            <a:r>
+              <a:rPr lang="en-US" dirty="0"/>
+              <a:t>If this thing happens, then how likely is this other thing? </a:t>
+            </a:r>
+          </a:p>
+          <a:p>
+            <a:pPr lvl="1"/>
+            <a:r>
+              <a:rPr lang="en-US" dirty="0"/>
+              <a:t>P(A) – how likely (percentage wise) is A to happen. </a:t>
+            </a:r>
+          </a:p>
+          <a:p>
+            <a:pPr lvl="1"/>
+            <a:r>
+              <a:rPr lang="en-US" dirty="0"/>
+              <a:t>P( A | B) – how likely is A, given that B has happened. </a:t>
+            </a:r>
+          </a:p>
+          <a:p>
+            <a:r>
+              <a:rPr lang="en-US" dirty="0"/>
+              <a:t>Our datasets (with categorical columns) can provide this with some counting. </a:t>
+            </a:r>
+          </a:p>
+          <a:p>
+            <a:pPr lvl="1"/>
+            <a:r>
+              <a:rPr lang="en-US" dirty="0"/>
+              <a:t>The probability of something, like a target, being True is the # of times it happens / total. </a:t>
+            </a:r>
+          </a:p>
+          <a:p>
+            <a:pPr lvl="1"/>
+            <a:r>
+              <a:rPr lang="en-US" dirty="0"/>
+              <a:t>E.g. the original prior probability of getting skin cancer is # of skin cancer / total people. </a:t>
+            </a:r>
+          </a:p>
+          <a:p>
+            <a:r>
+              <a:rPr lang="en-US" dirty="0"/>
+              <a:t>We can use each feature to add ‘quality’ to this prediction, more info:</a:t>
+            </a:r>
+          </a:p>
+          <a:p>
+            <a:pPr lvl="1"/>
+            <a:r>
+              <a:rPr lang="en-US" dirty="0"/>
+              <a:t>If we add “family history of cancer” to the original prior probability, our prediction gets better.</a:t>
+            </a:r>
+          </a:p>
+          <a:p>
+            <a:pPr lvl="1"/>
+            <a:r>
+              <a:rPr lang="en-US" dirty="0"/>
+              <a:t>After the update, this posterior probability includes info on family history…</a:t>
+            </a:r>
+          </a:p>
+        </p:txBody>
+      </p:sp>
+    </p:spTree>
+    <p:extLst>
+      <p:ext uri="{BB962C8B-B14F-4D97-AF65-F5344CB8AC3E}">
+        <p14:creationId xmlns:p14="http://schemas.microsoft.com/office/powerpoint/2010/main" val="2115713594"/>
+      </p:ext>
+    </p:extLst>
+  </p:cSld>
+  <p:clrMapOvr>
+    <a:masterClrMapping/>
+  </p:clrMapOvr>
+</p:sld>
+</file>
+
+<file path=ppt/slides/slide22.xml><?xml version="1.0" encoding="utf-8"?>
+<p:sld xmlns:a="http://schemas.openxmlformats.org/drawingml/2006/main" xmlns:r="http://schemas.openxmlformats.org/officeDocument/2006/relationships" xmlns:p="http://schemas.openxmlformats.org/presentationml/2006/main">
+  <p:cSld>
+    <p:spTree>
+      <p:nvGrpSpPr>
+        <p:cNvPr id="1" name=""/>
+        <p:cNvGrpSpPr/>
+        <p:nvPr/>
+      </p:nvGrpSpPr>
+      <p:grpSpPr>
+        <a:xfrm>
+          <a:off x="0" y="0"/>
+          <a:ext cx="0" cy="0"/>
+          <a:chOff x="0" y="0"/>
+          <a:chExt cx="0" cy="0"/>
+        </a:xfrm>
+      </p:grpSpPr>
+      <p:sp>
+        <p:nvSpPr>
+          <p:cNvPr id="2" name="Title 1">
+            <a:extLst>
+              <a:ext uri="{FF2B5EF4-FFF2-40B4-BE49-F238E27FC236}">
+                <a16:creationId xmlns:a16="http://schemas.microsoft.com/office/drawing/2014/main" id="{5F71659B-2542-5BFA-B817-DDAB72BF8B55}"/>
+              </a:ext>
+            </a:extLst>
+          </p:cNvPr>
+          <p:cNvSpPr>
+            <a:spLocks noGrp="1"/>
+          </p:cNvSpPr>
+          <p:nvPr>
+            <p:ph type="title"/>
+          </p:nvPr>
+        </p:nvSpPr>
+        <p:spPr/>
+        <p:txBody>
+          <a:bodyPr/>
+          <a:lstStyle/>
+          <a:p>
+            <a:r>
+              <a:rPr lang="en-US" dirty="0"/>
+              <a:t>Bayesian Updates</a:t>
+            </a:r>
+          </a:p>
+        </p:txBody>
+      </p:sp>
+      <p:sp>
+        <p:nvSpPr>
+          <p:cNvPr id="3" name="Content Placeholder 2">
+            <a:extLst>
+              <a:ext uri="{FF2B5EF4-FFF2-40B4-BE49-F238E27FC236}">
+                <a16:creationId xmlns:a16="http://schemas.microsoft.com/office/drawing/2014/main" id="{631DFE29-CB12-27E8-9000-F9B8034444FA}"/>
+              </a:ext>
+            </a:extLst>
+          </p:cNvPr>
+          <p:cNvSpPr>
+            <a:spLocks noGrp="1"/>
+          </p:cNvSpPr>
+          <p:nvPr>
+            <p:ph idx="1"/>
+          </p:nvPr>
+        </p:nvSpPr>
+        <p:spPr>
+          <a:xfrm>
+            <a:off x="1451579" y="1853754"/>
+            <a:ext cx="9603275" cy="4199728"/>
+          </a:xfrm>
+        </p:spPr>
+        <p:txBody>
+          <a:bodyPr/>
+          <a:lstStyle/>
+          <a:p>
+            <a:r>
+              <a:rPr lang="en-US" dirty="0"/>
+              <a:t>With a multi-feature dataset, we can make a predictive-</a:t>
+            </a:r>
+            <a:r>
+              <a:rPr lang="en-US" dirty="0" err="1"/>
+              <a:t>ish</a:t>
+            </a:r>
+            <a:r>
+              <a:rPr lang="en-US" dirty="0"/>
+              <a:t> process to predict target.</a:t>
+            </a:r>
+          </a:p>
+          <a:p>
+            <a:pPr lvl="1"/>
+            <a:r>
+              <a:rPr lang="en-US" dirty="0"/>
+              <a:t>Initial prediction is raw probability, each feature adjusts this a little. </a:t>
+            </a:r>
+          </a:p>
+          <a:p>
+            <a:r>
+              <a:rPr lang="en-US" dirty="0"/>
+              <a:t>The target is golf – are we going to golf in these conditions? </a:t>
+            </a:r>
+          </a:p>
+          <a:p>
+            <a:pPr lvl="1"/>
+            <a:r>
+              <a:rPr lang="en-US" dirty="0"/>
+              <a:t>Start with the prior probability – likelihood of playing golf overall. </a:t>
+            </a:r>
+          </a:p>
+          <a:p>
+            <a:pPr lvl="1"/>
+            <a:r>
+              <a:rPr lang="en-US" dirty="0"/>
+              <a:t>”Learn” one feature at a time, which ”updates” our prediction. </a:t>
+            </a:r>
+          </a:p>
+          <a:p>
+            <a:pPr lvl="2"/>
+            <a:r>
+              <a:rPr lang="en-US" dirty="0"/>
+              <a:t>If it is sunny, how does that impact it – in play/no play scenarios, how likely is sunny?</a:t>
+            </a:r>
+          </a:p>
+          <a:p>
+            <a:pPr lvl="2"/>
+            <a:r>
+              <a:rPr lang="en-US" dirty="0"/>
+              <a:t>This likelihood gives the model more info on probability, based on this feature. </a:t>
+            </a:r>
+          </a:p>
+          <a:p>
+            <a:pPr lvl="1"/>
+            <a:r>
+              <a:rPr lang="en-US" dirty="0"/>
+              <a:t>Prior probability and new information combine to posterior probability. </a:t>
+            </a:r>
+          </a:p>
+          <a:p>
+            <a:pPr lvl="1"/>
+            <a:r>
+              <a:rPr lang="en-US" dirty="0"/>
+              <a:t>Each feature updates our understanding, or adjusts our prediction to be better. </a:t>
+            </a:r>
+          </a:p>
+          <a:p>
+            <a:r>
+              <a:rPr lang="en-US" dirty="0"/>
+              <a:t>Once we’ve included all features, our prediction is as smart as it’ll get. </a:t>
+            </a:r>
+          </a:p>
+        </p:txBody>
+      </p:sp>
+    </p:spTree>
+    <p:extLst>
+      <p:ext uri="{BB962C8B-B14F-4D97-AF65-F5344CB8AC3E}">
+        <p14:creationId xmlns:p14="http://schemas.microsoft.com/office/powerpoint/2010/main" val="4168502373"/>
+      </p:ext>
+    </p:extLst>
+  </p:cSld>
+  <p:clrMapOvr>
+    <a:masterClrMapping/>
+  </p:clrMapOvr>
+</p:sld>
+</file>
+
+<file path=ppt/slides/slide23.xml><?xml version="1.0" encoding="utf-8"?>
+<p:sld xmlns:a="http://schemas.openxmlformats.org/drawingml/2006/main" xmlns:r="http://schemas.openxmlformats.org/officeDocument/2006/relationships" xmlns:p="http://schemas.openxmlformats.org/presentationml/2006/main">
+  <p:cSld>
+    <p:spTree>
+      <p:nvGrpSpPr>
+        <p:cNvPr id="1" name=""/>
+        <p:cNvGrpSpPr/>
+        <p:nvPr/>
+      </p:nvGrpSpPr>
+      <p:grpSpPr>
+        <a:xfrm>
+          <a:off x="0" y="0"/>
+          <a:ext cx="0" cy="0"/>
+          <a:chOff x="0" y="0"/>
+          <a:chExt cx="0" cy="0"/>
+        </a:xfrm>
+      </p:grpSpPr>
+      <p:sp>
+        <p:nvSpPr>
+          <p:cNvPr id="2" name="Title 1">
+            <a:extLst>
+              <a:ext uri="{FF2B5EF4-FFF2-40B4-BE49-F238E27FC236}">
+                <a16:creationId xmlns:a16="http://schemas.microsoft.com/office/drawing/2014/main" id="{EFD6B5AD-47FE-6E4E-8D77-FD4D357451E0}"/>
+              </a:ext>
+            </a:extLst>
+          </p:cNvPr>
+          <p:cNvSpPr>
+            <a:spLocks noGrp="1"/>
+          </p:cNvSpPr>
+          <p:nvPr>
+            <p:ph type="title"/>
+          </p:nvPr>
+        </p:nvSpPr>
+        <p:spPr/>
+        <p:txBody>
+          <a:bodyPr/>
+          <a:lstStyle/>
+          <a:p>
+            <a:r>
+              <a:rPr lang="en-US" dirty="0"/>
+              <a:t>In Numbers</a:t>
+            </a:r>
+          </a:p>
+        </p:txBody>
+      </p:sp>
+      <p:sp>
+        <p:nvSpPr>
+          <p:cNvPr id="3" name="Content Placeholder 2">
+            <a:extLst>
+              <a:ext uri="{FF2B5EF4-FFF2-40B4-BE49-F238E27FC236}">
+                <a16:creationId xmlns:a16="http://schemas.microsoft.com/office/drawing/2014/main" id="{9C2F8150-3A31-4526-79CE-E3CDA6B8DF72}"/>
+              </a:ext>
+            </a:extLst>
+          </p:cNvPr>
+          <p:cNvSpPr>
+            <a:spLocks noGrp="1"/>
+          </p:cNvSpPr>
+          <p:nvPr>
+            <p:ph idx="1"/>
+          </p:nvPr>
+        </p:nvSpPr>
+        <p:spPr>
+          <a:xfrm>
+            <a:off x="461554" y="1959430"/>
+            <a:ext cx="4911636" cy="4094052"/>
+          </a:xfrm>
+        </p:spPr>
+        <p:txBody>
+          <a:bodyPr/>
+          <a:lstStyle/>
+          <a:p>
+            <a:r>
+              <a:rPr lang="en-US" dirty="0"/>
+              <a:t>The combined prob is the probability both are true. </a:t>
+            </a:r>
+          </a:p>
+          <a:p>
+            <a:pPr lvl="1"/>
+            <a:r>
+              <a:rPr lang="en-US" dirty="0"/>
+              <a:t>Golf/not and sunny. </a:t>
+            </a:r>
+          </a:p>
+          <a:p>
+            <a:r>
+              <a:rPr lang="en-US" dirty="0"/>
+              <a:t>More features just repeat steps. </a:t>
+            </a:r>
+          </a:p>
+          <a:p>
+            <a:r>
+              <a:rPr lang="en-US" dirty="0"/>
+              <a:t>Learning:</a:t>
+            </a:r>
+          </a:p>
+          <a:p>
+            <a:pPr lvl="1"/>
+            <a:r>
+              <a:rPr lang="en-US" dirty="0"/>
+              <a:t>Start with baseline model prediction. </a:t>
+            </a:r>
+          </a:p>
+          <a:p>
+            <a:pPr lvl="1"/>
+            <a:r>
+              <a:rPr lang="en-US" dirty="0"/>
+              <a:t>Feature adds new information. </a:t>
+            </a:r>
+          </a:p>
+          <a:p>
+            <a:pPr lvl="1"/>
+            <a:r>
+              <a:rPr lang="en-US" dirty="0"/>
+              <a:t>This info changes prediction. </a:t>
+            </a:r>
+          </a:p>
+          <a:p>
+            <a:pPr lvl="1"/>
+            <a:r>
+              <a:rPr lang="en-US" dirty="0"/>
+              <a:t>This prediction is now equiv. to baseline.</a:t>
+            </a:r>
+          </a:p>
+        </p:txBody>
+      </p:sp>
+      <p:pic>
+        <p:nvPicPr>
+          <p:cNvPr id="10" name="Picture 9" descr="A screenshot of a computer&#10;&#10;AI-generated content may be incorrect.">
+            <a:extLst>
+              <a:ext uri="{FF2B5EF4-FFF2-40B4-BE49-F238E27FC236}">
+                <a16:creationId xmlns:a16="http://schemas.microsoft.com/office/drawing/2014/main" id="{15BEDF64-D37D-DEB3-8B09-40FEBFFC7761}"/>
+              </a:ext>
+            </a:extLst>
+          </p:cNvPr>
+          <p:cNvPicPr>
+            <a:picLocks noChangeAspect="1"/>
+          </p:cNvPicPr>
+          <p:nvPr/>
+        </p:nvPicPr>
+        <p:blipFill>
+          <a:blip r:embed="rId2"/>
+          <a:stretch>
+            <a:fillRect/>
+          </a:stretch>
+        </p:blipFill>
+        <p:spPr>
+          <a:xfrm>
+            <a:off x="4419600" y="3111801"/>
+            <a:ext cx="7772400" cy="2354544"/>
+          </a:xfrm>
+          <a:prstGeom prst="rect">
+            <a:avLst/>
+          </a:prstGeom>
+        </p:spPr>
+      </p:pic>
+    </p:spTree>
+    <p:extLst>
+      <p:ext uri="{BB962C8B-B14F-4D97-AF65-F5344CB8AC3E}">
+        <p14:creationId xmlns:p14="http://schemas.microsoft.com/office/powerpoint/2010/main" val="320266099"/>
+      </p:ext>
+    </p:extLst>
+  </p:cSld>
+  <p:clrMapOvr>
+    <a:masterClrMapping/>
+  </p:clrMapOvr>
+</p:sld>
+</file>
+
+<file path=ppt/slides/slide24.xml><?xml version="1.0" encoding="utf-8"?>
+<p:sld xmlns:a="http://schemas.openxmlformats.org/drawingml/2006/main" xmlns:r="http://schemas.openxmlformats.org/officeDocument/2006/relationships" xmlns:p="http://schemas.openxmlformats.org/presentationml/2006/main">
+  <p:cSld>
+    <p:spTree>
+      <p:nvGrpSpPr>
+        <p:cNvPr id="1" name=""/>
+        <p:cNvGrpSpPr/>
+        <p:nvPr/>
+      </p:nvGrpSpPr>
+      <p:grpSpPr>
+        <a:xfrm>
+          <a:off x="0" y="0"/>
+          <a:ext cx="0" cy="0"/>
+          <a:chOff x="0" y="0"/>
+          <a:chExt cx="0" cy="0"/>
+        </a:xfrm>
+      </p:grpSpPr>
+      <p:sp>
+        <p:nvSpPr>
+          <p:cNvPr id="2" name="Title 1">
+            <a:extLst>
+              <a:ext uri="{FF2B5EF4-FFF2-40B4-BE49-F238E27FC236}">
+                <a16:creationId xmlns:a16="http://schemas.microsoft.com/office/drawing/2014/main" id="{0E4E87CC-D5FE-78AB-9978-D30F60513A3B}"/>
+              </a:ext>
+            </a:extLst>
+          </p:cNvPr>
+          <p:cNvSpPr>
+            <a:spLocks noGrp="1"/>
+          </p:cNvSpPr>
+          <p:nvPr>
+            <p:ph type="title"/>
+          </p:nvPr>
+        </p:nvSpPr>
+        <p:spPr/>
+        <p:txBody>
+          <a:bodyPr/>
+          <a:lstStyle/>
+          <a:p>
+            <a:r>
+              <a:rPr lang="en-US" dirty="0"/>
+              <a:t>Normalization</a:t>
+            </a:r>
+          </a:p>
+        </p:txBody>
+      </p:sp>
+      <p:sp>
+        <p:nvSpPr>
+          <p:cNvPr id="3" name="Content Placeholder 2">
+            <a:extLst>
+              <a:ext uri="{FF2B5EF4-FFF2-40B4-BE49-F238E27FC236}">
+                <a16:creationId xmlns:a16="http://schemas.microsoft.com/office/drawing/2014/main" id="{543DA43E-FF49-E05C-E762-198F6A5113F6}"/>
+              </a:ext>
+            </a:extLst>
+          </p:cNvPr>
+          <p:cNvSpPr>
+            <a:spLocks noGrp="1"/>
+          </p:cNvSpPr>
+          <p:nvPr>
+            <p:ph idx="1"/>
+          </p:nvPr>
+        </p:nvSpPr>
+        <p:spPr>
+          <a:xfrm>
+            <a:off x="1451579" y="1853754"/>
+            <a:ext cx="9603275" cy="4199727"/>
+          </a:xfrm>
+        </p:spPr>
+        <p:txBody>
+          <a:bodyPr>
+            <a:normAutofit lnSpcReduction="10000"/>
+          </a:bodyPr>
+          <a:lstStyle/>
+          <a:p>
+            <a:r>
+              <a:rPr lang="en-US" dirty="0"/>
+              <a:t>Normalization has come up twice recently:</a:t>
+            </a:r>
+          </a:p>
+          <a:p>
+            <a:pPr lvl="1"/>
+            <a:r>
+              <a:rPr lang="en-US" dirty="0"/>
+              <a:t>Scaling variables to between (usually) 0 and 1. </a:t>
+            </a:r>
+          </a:p>
+          <a:p>
+            <a:pPr lvl="1"/>
+            <a:r>
+              <a:rPr lang="en-US" dirty="0"/>
+              <a:t>Changing these probabilities (to 0 to 100 scale). </a:t>
+            </a:r>
+          </a:p>
+          <a:p>
+            <a:r>
+              <a:rPr lang="en-US" dirty="0"/>
+              <a:t>The concept is the same, values are on non-standard scale. </a:t>
+            </a:r>
+          </a:p>
+          <a:p>
+            <a:r>
+              <a:rPr lang="en-US" dirty="0"/>
+              <a:t>Normalized probabilities are out of 100 – happens or not. </a:t>
+            </a:r>
+          </a:p>
+          <a:p>
+            <a:r>
+              <a:rPr lang="en-US" dirty="0"/>
+              <a:t>Unnormalized probabilities are out of “things that are the same” – a subset. </a:t>
+            </a:r>
+          </a:p>
+          <a:p>
+            <a:pPr lvl="1"/>
+            <a:r>
+              <a:rPr lang="en-US" dirty="0"/>
+              <a:t>Here they are the probability of play/not and sunny – 5 out of 14 records. </a:t>
+            </a:r>
+          </a:p>
+          <a:p>
+            <a:pPr lvl="1"/>
+            <a:r>
+              <a:rPr lang="en-US" dirty="0"/>
+              <a:t>There are more records outside this (overcast, rainy) that are the other 9. </a:t>
+            </a:r>
+          </a:p>
+          <a:p>
+            <a:pPr lvl="1"/>
+            <a:r>
+              <a:rPr lang="en-US" dirty="0"/>
+              <a:t>3/14 are play sunny, 2/14 are no play sunny, the percents out of all days are the values in the </a:t>
+            </a:r>
+            <a:r>
+              <a:rPr lang="en-US" dirty="0" err="1"/>
+              <a:t>unnorm</a:t>
+            </a:r>
+            <a:r>
+              <a:rPr lang="en-US" dirty="0"/>
+              <a:t> column. The values after normalized are per 100 – (e.g. 3/14, then div by 5/14). </a:t>
+            </a:r>
+          </a:p>
+          <a:p>
+            <a:pPr lvl="1"/>
+            <a:endParaRPr lang="en-US" dirty="0"/>
+          </a:p>
+          <a:p>
+            <a:pPr lvl="1"/>
+            <a:endParaRPr lang="en-US" dirty="0"/>
+          </a:p>
+        </p:txBody>
+      </p:sp>
+      <p:pic>
+        <p:nvPicPr>
+          <p:cNvPr id="4" name="Picture 3" descr="A screenshot of a computer&#10;&#10;AI-generated content may be incorrect.">
+            <a:extLst>
+              <a:ext uri="{FF2B5EF4-FFF2-40B4-BE49-F238E27FC236}">
+                <a16:creationId xmlns:a16="http://schemas.microsoft.com/office/drawing/2014/main" id="{6D3B29E2-61A0-371B-6149-D5666FE32B7B}"/>
+              </a:ext>
+            </a:extLst>
+          </p:cNvPr>
+          <p:cNvPicPr>
+            <a:picLocks noChangeAspect="1"/>
+          </p:cNvPicPr>
+          <p:nvPr/>
+        </p:nvPicPr>
+        <p:blipFill>
+          <a:blip r:embed="rId2"/>
+          <a:srcRect l="39496"/>
+          <a:stretch>
+            <a:fillRect/>
+          </a:stretch>
+        </p:blipFill>
+        <p:spPr>
+          <a:xfrm>
+            <a:off x="7489371" y="516647"/>
+            <a:ext cx="4702629" cy="2354544"/>
+          </a:xfrm>
+          <a:prstGeom prst="rect">
+            <a:avLst/>
+          </a:prstGeom>
+        </p:spPr>
+      </p:pic>
+    </p:spTree>
+    <p:extLst>
+      <p:ext uri="{BB962C8B-B14F-4D97-AF65-F5344CB8AC3E}">
+        <p14:creationId xmlns:p14="http://schemas.microsoft.com/office/powerpoint/2010/main" val="3288823750"/>
+      </p:ext>
+    </p:extLst>
+  </p:cSld>
+  <p:clrMapOvr>
+    <a:masterClrMapping/>
+  </p:clrMapOvr>
+</p:sld>
+</file>
+
+<file path=ppt/slides/slide25.xml><?xml version="1.0" encoding="utf-8"?>
+<p:sld xmlns:a="http://schemas.openxmlformats.org/drawingml/2006/main" xmlns:r="http://schemas.openxmlformats.org/officeDocument/2006/relationships" xmlns:p="http://schemas.openxmlformats.org/presentationml/2006/main">
+  <p:cSld>
+    <p:spTree>
+      <p:nvGrpSpPr>
+        <p:cNvPr id="1" name=""/>
+        <p:cNvGrpSpPr/>
+        <p:nvPr/>
+      </p:nvGrpSpPr>
+      <p:grpSpPr>
+        <a:xfrm>
+          <a:off x="0" y="0"/>
+          <a:ext cx="0" cy="0"/>
+          <a:chOff x="0" y="0"/>
+          <a:chExt cx="0" cy="0"/>
+        </a:xfrm>
+      </p:grpSpPr>
+      <p:sp>
+        <p:nvSpPr>
+          <p:cNvPr id="2" name="Title 1">
+            <a:extLst>
+              <a:ext uri="{FF2B5EF4-FFF2-40B4-BE49-F238E27FC236}">
+                <a16:creationId xmlns:a16="http://schemas.microsoft.com/office/drawing/2014/main" id="{D130CEBE-D3D0-EF80-1622-89AFFD76FC7F}"/>
+              </a:ext>
+            </a:extLst>
+          </p:cNvPr>
+          <p:cNvSpPr>
+            <a:spLocks noGrp="1"/>
+          </p:cNvSpPr>
+          <p:nvPr>
+            <p:ph type="title"/>
+          </p:nvPr>
+        </p:nvSpPr>
+        <p:spPr/>
+        <p:txBody>
+          <a:bodyPr/>
+          <a:lstStyle/>
+          <a:p>
+            <a:r>
+              <a:rPr lang="en-US" dirty="0"/>
+              <a:t>Updates and Us</a:t>
+            </a:r>
+          </a:p>
+        </p:txBody>
+      </p:sp>
+      <p:sp>
+        <p:nvSpPr>
+          <p:cNvPr id="3" name="Content Placeholder 2">
+            <a:extLst>
+              <a:ext uri="{FF2B5EF4-FFF2-40B4-BE49-F238E27FC236}">
+                <a16:creationId xmlns:a16="http://schemas.microsoft.com/office/drawing/2014/main" id="{99019BB1-09EE-077D-1EC0-2986B6C1F997}"/>
+              </a:ext>
+            </a:extLst>
+          </p:cNvPr>
+          <p:cNvSpPr>
+            <a:spLocks noGrp="1"/>
+          </p:cNvSpPr>
+          <p:nvPr>
+            <p:ph idx="1"/>
+          </p:nvPr>
+        </p:nvSpPr>
+        <p:spPr>
+          <a:xfrm>
+            <a:off x="1451579" y="1853754"/>
+            <a:ext cx="9603275" cy="4199727"/>
+          </a:xfrm>
+        </p:spPr>
+        <p:txBody>
+          <a:bodyPr/>
+          <a:lstStyle/>
+          <a:p>
+            <a:r>
+              <a:rPr lang="en-US" dirty="0"/>
+              <a:t>This idea can be built into a normal machine learning algorithm. </a:t>
+            </a:r>
+          </a:p>
+          <a:p>
+            <a:pPr lvl="1"/>
+            <a:r>
+              <a:rPr lang="en-US" dirty="0"/>
+              <a:t>Predict probability, just like logistic regression. </a:t>
+            </a:r>
+          </a:p>
+          <a:p>
+            <a:pPr lvl="1"/>
+            <a:r>
+              <a:rPr lang="en-US" dirty="0"/>
+              <a:t>Take in features (just categorical for now) and combine them for model. </a:t>
+            </a:r>
+          </a:p>
+          <a:p>
+            <a:r>
+              <a:rPr lang="en-US" dirty="0"/>
+              <a:t>Bayes, logistic regression, and any other classification model are equivalent in purpose. </a:t>
+            </a:r>
+          </a:p>
+          <a:p>
+            <a:pPr lvl="1"/>
+            <a:r>
+              <a:rPr lang="en-US" dirty="0"/>
+              <a:t>The way they build the model (inputs-&gt;outputs) can be totally different. </a:t>
+            </a:r>
+          </a:p>
+          <a:p>
+            <a:pPr lvl="1"/>
+            <a:r>
+              <a:rPr lang="en-US" dirty="0"/>
+              <a:t>The math and logic behind this are very different, but it does the same thing. </a:t>
+            </a:r>
+          </a:p>
+          <a:p>
+            <a:pPr lvl="1"/>
+            <a:r>
+              <a:rPr lang="en-US" dirty="0"/>
+              <a:t>Model types have strengths and weaknesses – fit to data, types of problems they excel at, size of data needed to train, training or testing speed,  </a:t>
+            </a:r>
+            <a:r>
+              <a:rPr lang="en-US" dirty="0" err="1"/>
+              <a:t>etc</a:t>
+            </a:r>
+            <a:r>
+              <a:rPr lang="en-US" dirty="0"/>
+              <a:t>…</a:t>
+            </a:r>
+          </a:p>
+          <a:p>
+            <a:endParaRPr lang="en-US" dirty="0"/>
+          </a:p>
+        </p:txBody>
+      </p:sp>
+    </p:spTree>
+    <p:extLst>
+      <p:ext uri="{BB962C8B-B14F-4D97-AF65-F5344CB8AC3E}">
+        <p14:creationId xmlns:p14="http://schemas.microsoft.com/office/powerpoint/2010/main" val="3140255254"/>
+      </p:ext>
+    </p:extLst>
+  </p:cSld>
+  <p:clrMapOvr>
+    <a:masterClrMapping/>
+  </p:clrMapOvr>
+</p:sld>
+</file>
+
+<file path=ppt/slides/slide26.xml><?xml version="1.0" encoding="utf-8"?>
+<p:sld xmlns:a="http://schemas.openxmlformats.org/drawingml/2006/main" xmlns:r="http://schemas.openxmlformats.org/officeDocument/2006/relationships" xmlns:p="http://schemas.openxmlformats.org/presentationml/2006/main">
+  <p:cSld>
+    <p:spTree>
+      <p:nvGrpSpPr>
+        <p:cNvPr id="1" name=""/>
+        <p:cNvGrpSpPr/>
+        <p:nvPr/>
+      </p:nvGrpSpPr>
+      <p:grpSpPr>
+        <a:xfrm>
+          <a:off x="0" y="0"/>
+          <a:ext cx="0" cy="0"/>
+          <a:chOff x="0" y="0"/>
+          <a:chExt cx="0" cy="0"/>
+        </a:xfrm>
+      </p:grpSpPr>
+      <p:sp>
+        <p:nvSpPr>
+          <p:cNvPr id="2" name="Title 1">
+            <a:extLst>
+              <a:ext uri="{FF2B5EF4-FFF2-40B4-BE49-F238E27FC236}">
+                <a16:creationId xmlns:a16="http://schemas.microsoft.com/office/drawing/2014/main" id="{8DDABE85-CB88-B550-5B01-BA14A718F198}"/>
+              </a:ext>
+            </a:extLst>
+          </p:cNvPr>
+          <p:cNvSpPr>
+            <a:spLocks noGrp="1"/>
+          </p:cNvSpPr>
+          <p:nvPr>
+            <p:ph type="title"/>
+          </p:nvPr>
+        </p:nvSpPr>
+        <p:spPr/>
+        <p:txBody>
+          <a:bodyPr/>
+          <a:lstStyle/>
+          <a:p>
+            <a:r>
+              <a:rPr lang="en-US" dirty="0"/>
+              <a:t>A Real-</a:t>
+            </a:r>
+            <a:r>
+              <a:rPr lang="en-US" dirty="0" err="1"/>
+              <a:t>ish</a:t>
+            </a:r>
+            <a:r>
+              <a:rPr lang="en-US" dirty="0"/>
+              <a:t> Example</a:t>
+            </a:r>
+          </a:p>
+        </p:txBody>
+      </p:sp>
+      <p:sp>
+        <p:nvSpPr>
+          <p:cNvPr id="3" name="Content Placeholder 2">
+            <a:extLst>
+              <a:ext uri="{FF2B5EF4-FFF2-40B4-BE49-F238E27FC236}">
+                <a16:creationId xmlns:a16="http://schemas.microsoft.com/office/drawing/2014/main" id="{1B5B3117-1CD7-1AB2-0A57-1BBE91C65B9B}"/>
+              </a:ext>
+            </a:extLst>
+          </p:cNvPr>
+          <p:cNvSpPr>
+            <a:spLocks noGrp="1"/>
+          </p:cNvSpPr>
+          <p:nvPr>
+            <p:ph idx="1"/>
+          </p:nvPr>
+        </p:nvSpPr>
+        <p:spPr>
+          <a:xfrm>
+            <a:off x="1451579" y="1853754"/>
+            <a:ext cx="9603275" cy="4268372"/>
+          </a:xfrm>
+        </p:spPr>
+        <p:txBody>
+          <a:bodyPr/>
+          <a:lstStyle/>
+          <a:p>
+            <a:r>
+              <a:rPr lang="en-US" dirty="0"/>
+              <a:t>We are predicting if students will pass an exam. </a:t>
+            </a:r>
+          </a:p>
+          <a:p>
+            <a:pPr lvl="1"/>
+            <a:r>
+              <a:rPr lang="en-US" dirty="0"/>
+              <a:t>Original prior probability – what is the overall pass rate?</a:t>
+            </a:r>
+          </a:p>
+          <a:p>
+            <a:r>
+              <a:rPr lang="en-US" dirty="0"/>
+              <a:t>Bayes-y updates with features. </a:t>
+            </a:r>
+          </a:p>
+          <a:p>
+            <a:pPr lvl="1"/>
+            <a:r>
+              <a:rPr lang="en-US" dirty="0"/>
+              <a:t>Did they study. </a:t>
+            </a:r>
+          </a:p>
+          <a:p>
+            <a:pPr lvl="1"/>
+            <a:r>
+              <a:rPr lang="en-US" dirty="0"/>
+              <a:t>Did they attend class. </a:t>
+            </a:r>
+          </a:p>
+          <a:p>
+            <a:pPr lvl="1"/>
+            <a:r>
+              <a:rPr lang="en-US" dirty="0"/>
+              <a:t>Did they do the review exercise. </a:t>
+            </a:r>
+          </a:p>
+          <a:p>
+            <a:r>
+              <a:rPr lang="en-US" dirty="0"/>
+              <a:t>Each of these adds new info, and updates our predicted probability of passing. </a:t>
+            </a:r>
+          </a:p>
+          <a:p>
+            <a:pPr lvl="1"/>
+            <a:r>
+              <a:rPr lang="en-US" dirty="0"/>
+              <a:t>Add info on studying – for people who pass/not, did they study?</a:t>
+            </a:r>
+          </a:p>
+          <a:p>
+            <a:pPr lvl="1"/>
+            <a:r>
+              <a:rPr lang="en-US" dirty="0"/>
+              <a:t>This likelihood then modifies the prior probability, generating the posterior (</a:t>
+            </a:r>
+            <a:r>
+              <a:rPr lang="en-US" dirty="0" err="1"/>
+              <a:t>unnorm</a:t>
+            </a:r>
+            <a:r>
+              <a:rPr lang="en-US" dirty="0"/>
+              <a:t>). </a:t>
+            </a:r>
+          </a:p>
+          <a:p>
+            <a:pPr lvl="1"/>
+            <a:r>
+              <a:rPr lang="en-US" dirty="0"/>
+              <a:t>We now have the probability of passing, including impact of studying. Repeat…</a:t>
+            </a:r>
+          </a:p>
+        </p:txBody>
+      </p:sp>
+    </p:spTree>
+    <p:extLst>
+      <p:ext uri="{BB962C8B-B14F-4D97-AF65-F5344CB8AC3E}">
+        <p14:creationId xmlns:p14="http://schemas.microsoft.com/office/powerpoint/2010/main" val="2959877981"/>
+      </p:ext>
+    </p:extLst>
+  </p:cSld>
+  <p:clrMapOvr>
+    <a:masterClrMapping/>
+  </p:clrMapOvr>
+</p:sld>
+</file>
+
+<file path=ppt/slides/slide27.xml><?xml version="1.0" encoding="utf-8"?>
+<p:sld xmlns:a="http://schemas.openxmlformats.org/drawingml/2006/main" xmlns:r="http://schemas.openxmlformats.org/officeDocument/2006/relationships" xmlns:p="http://schemas.openxmlformats.org/presentationml/2006/main">
+  <p:cSld>
+    <p:spTree>
+      <p:nvGrpSpPr>
+        <p:cNvPr id="1" name=""/>
+        <p:cNvGrpSpPr/>
+        <p:nvPr/>
+      </p:nvGrpSpPr>
+      <p:grpSpPr>
+        <a:xfrm>
+          <a:off x="0" y="0"/>
+          <a:ext cx="0" cy="0"/>
+          <a:chOff x="0" y="0"/>
+          <a:chExt cx="0" cy="0"/>
+        </a:xfrm>
+      </p:grpSpPr>
+      <p:sp>
+        <p:nvSpPr>
+          <p:cNvPr id="2" name="Title 1">
+            <a:extLst>
+              <a:ext uri="{FF2B5EF4-FFF2-40B4-BE49-F238E27FC236}">
                 <a16:creationId xmlns:a16="http://schemas.microsoft.com/office/drawing/2014/main" id="{58443F18-8AA3-FE4E-8B12-38C59A9EBF35}"/>
               </a:ext>
             </a:extLst>
@@ -4285,19 +6978,15 @@
         </p:nvSpPr>
         <p:spPr>
           <a:xfrm>
-            <a:off x="1451579" y="2015732"/>
-            <a:ext cx="9603275" cy="1664973"/>
+            <a:off x="1451579" y="1853753"/>
+            <a:ext cx="9603275" cy="1685373"/>
           </a:xfrm>
         </p:spPr>
         <p:txBody>
-          <a:bodyPr/>
-          <a:lstStyle/>
-          <a:p>
-            <a:r>
-              <a:rPr lang="en-US" dirty="0"/>
-              <a:t>Recall Bayes’ Theorem on conditional probability. </a:t>
-            </a:r>
-          </a:p>
+          <a:bodyPr>
+            <a:normAutofit/>
+          </a:bodyPr>
+          <a:lstStyle/>
           <a:p>
             <a:r>
               <a:rPr lang="en-US" dirty="0"/>
@@ -4308,11 +6997,22 @@
             <a:pPr lvl="1"/>
             <a:r>
               <a:rPr lang="en-US" dirty="0"/>
-              <a:t>Think – Bayes’ tables from stats. </a:t>
-            </a:r>
-          </a:p>
-          <a:p>
-            <a:endParaRPr lang="en-US" dirty="0"/>
+              <a:t>The hypothesis is what we want to know. </a:t>
+            </a:r>
+          </a:p>
+          <a:p>
+            <a:pPr lvl="1"/>
+            <a:r>
+              <a:rPr lang="en-US" dirty="0"/>
+              <a:t>The evidence is the feature set. </a:t>
+            </a:r>
+          </a:p>
+          <a:p>
+            <a:pPr lvl="1"/>
+            <a:r>
+              <a:rPr lang="en-US" dirty="0"/>
+              <a:t>As we incorporate features, the prediction gets modified from where it started. </a:t>
+            </a:r>
           </a:p>
         </p:txBody>
       </p:sp>
@@ -4343,8 +7043,8 @@
         </p:blipFill>
         <p:spPr bwMode="auto">
           <a:xfrm>
-            <a:off x="0" y="3680705"/>
-            <a:ext cx="12192000" cy="3164942"/>
+            <a:off x="1412594" y="3539127"/>
+            <a:ext cx="9685803" cy="2514354"/>
           </a:xfrm>
           <a:prstGeom prst="rect">
             <a:avLst/>
@@ -4374,7 +7074,7 @@
 </p:sld>
 </file>
 
-<file path=ppt/slides/slide14.xml><?xml version="1.0" encoding="utf-8"?>
+<file path=ppt/slides/slide28.xml><?xml version="1.0" encoding="utf-8"?>
 <p:sld xmlns:a="http://schemas.openxmlformats.org/drawingml/2006/main" xmlns:r="http://schemas.openxmlformats.org/officeDocument/2006/relationships" xmlns:p="http://schemas.openxmlformats.org/presentationml/2006/main">
   <p:cSld>
     <p:bg>
@@ -4468,13 +7168,13 @@
         </p:nvSpPr>
         <p:spPr>
           <a:xfrm>
-            <a:off x="222423" y="2015734"/>
-            <a:ext cx="4497858" cy="4137931"/>
+            <a:off x="21837" y="1853752"/>
+            <a:ext cx="4698444" cy="4299913"/>
           </a:xfrm>
         </p:spPr>
         <p:txBody>
           <a:bodyPr>
-            <a:normAutofit/>
+            <a:normAutofit lnSpcReduction="10000"/>
           </a:bodyPr>
           <a:lstStyle/>
           <a:p>
@@ -4500,7 +7200,31 @@
           <a:p>
             <a:r>
               <a:rPr lang="en-US" dirty="0"/>
-              <a:t>Classifier is a “Big Bayes’ Theorem” where each feature is another term. </a:t>
+              <a:t>Classifier is a “Big Bayes’ Theorem” where each feature is another term.</a:t>
+            </a:r>
+          </a:p>
+          <a:p>
+            <a:pPr lvl="1"/>
+            <a:r>
+              <a:rPr lang="en-US" dirty="0"/>
+              <a:t>Y is the target – what we predict. </a:t>
+            </a:r>
+          </a:p>
+          <a:p>
+            <a:pPr lvl="1"/>
+            <a:r>
+              <a:rPr lang="en-US" dirty="0" err="1"/>
+              <a:t>Xs</a:t>
+            </a:r>
+            <a:r>
+              <a:rPr lang="en-US" dirty="0"/>
+              <a:t> are (categorical) feature set.  </a:t>
+            </a:r>
+          </a:p>
+          <a:p>
+            <a:r>
+              <a:rPr lang="en-US" dirty="0"/>
+              <a:t>Pedantic note, it’s one step in reality, just easier to imagine one feature at a time. </a:t>
             </a:r>
           </a:p>
         </p:txBody>
@@ -4563,7 +7287,250 @@
 </p:sld>
 </file>
 
-<file path=ppt/slides/slide15.xml><?xml version="1.0" encoding="utf-8"?>
+<file path=ppt/slides/slide29.xml><?xml version="1.0" encoding="utf-8"?>
+<p:sld xmlns:a="http://schemas.openxmlformats.org/drawingml/2006/main" xmlns:r="http://schemas.openxmlformats.org/officeDocument/2006/relationships" xmlns:p="http://schemas.openxmlformats.org/presentationml/2006/main">
+  <p:cSld>
+    <p:spTree>
+      <p:nvGrpSpPr>
+        <p:cNvPr id="1" name=""/>
+        <p:cNvGrpSpPr/>
+        <p:nvPr/>
+      </p:nvGrpSpPr>
+      <p:grpSpPr>
+        <a:xfrm>
+          <a:off x="0" y="0"/>
+          <a:ext cx="0" cy="0"/>
+          <a:chOff x="0" y="0"/>
+          <a:chExt cx="0" cy="0"/>
+        </a:xfrm>
+      </p:grpSpPr>
+      <p:sp>
+        <p:nvSpPr>
+          <p:cNvPr id="2" name="Title 1">
+            <a:extLst>
+              <a:ext uri="{FF2B5EF4-FFF2-40B4-BE49-F238E27FC236}">
+                <a16:creationId xmlns:a16="http://schemas.microsoft.com/office/drawing/2014/main" id="{F53FB1BC-6B60-5183-108E-489C8C9259E4}"/>
+              </a:ext>
+            </a:extLst>
+          </p:cNvPr>
+          <p:cNvSpPr>
+            <a:spLocks noGrp="1"/>
+          </p:cNvSpPr>
+          <p:nvPr>
+            <p:ph type="title"/>
+          </p:nvPr>
+        </p:nvSpPr>
+        <p:spPr/>
+        <p:txBody>
+          <a:bodyPr/>
+          <a:lstStyle/>
+          <a:p>
+            <a:r>
+              <a:rPr lang="en-US" dirty="0"/>
+              <a:t>Not so Naive After All…</a:t>
+            </a:r>
+          </a:p>
+        </p:txBody>
+      </p:sp>
+      <p:sp>
+        <p:nvSpPr>
+          <p:cNvPr id="3" name="Content Placeholder 2">
+            <a:extLst>
+              <a:ext uri="{FF2B5EF4-FFF2-40B4-BE49-F238E27FC236}">
+                <a16:creationId xmlns:a16="http://schemas.microsoft.com/office/drawing/2014/main" id="{D44C4019-77D8-E602-D846-9C1345D8B9B1}"/>
+              </a:ext>
+            </a:extLst>
+          </p:cNvPr>
+          <p:cNvSpPr>
+            <a:spLocks noGrp="1"/>
+          </p:cNvSpPr>
+          <p:nvPr>
+            <p:ph idx="1"/>
+          </p:nvPr>
+        </p:nvSpPr>
+        <p:spPr>
+          <a:xfrm>
+            <a:off x="1451579" y="1853754"/>
+            <a:ext cx="9603275" cy="4199727"/>
+          </a:xfrm>
+        </p:spPr>
+        <p:txBody>
+          <a:bodyPr/>
+          <a:lstStyle/>
+          <a:p>
+            <a:r>
+              <a:rPr lang="en-US" dirty="0"/>
+              <a:t>Models all want to predict Y given several </a:t>
+            </a:r>
+            <a:r>
+              <a:rPr lang="en-US" dirty="0" err="1"/>
+              <a:t>Xs</a:t>
+            </a:r>
+            <a:r>
+              <a:rPr lang="en-US" dirty="0"/>
+              <a:t>. </a:t>
+            </a:r>
+          </a:p>
+          <a:p>
+            <a:r>
+              <a:rPr lang="en-US" dirty="0"/>
+              <a:t>Model starts with baseline – no X in prediction. </a:t>
+            </a:r>
+          </a:p>
+          <a:p>
+            <a:r>
+              <a:rPr lang="en-US" dirty="0"/>
+              <a:t>Each X ’adds’ its impact. </a:t>
+            </a:r>
+          </a:p>
+          <a:p>
+            <a:pPr lvl="1"/>
+            <a:r>
+              <a:rPr lang="en-US" dirty="0"/>
+              <a:t>The ‘flipped’ probability – given Y, how likely is X. </a:t>
+            </a:r>
+          </a:p>
+          <a:p>
+            <a:r>
+              <a:rPr lang="en-US" dirty="0"/>
+              <a:t>For example:</a:t>
+            </a:r>
+          </a:p>
+          <a:p>
+            <a:pPr lvl="1"/>
+            <a:r>
+              <a:rPr lang="en-US" dirty="0"/>
+              <a:t>Predicting if we golf based on rain, </a:t>
+            </a:r>
+            <a:r>
+              <a:rPr lang="en-US" dirty="0" err="1"/>
+              <a:t>clould</a:t>
+            </a:r>
+            <a:r>
+              <a:rPr lang="en-US" dirty="0"/>
+              <a:t>, and wind. </a:t>
+            </a:r>
+          </a:p>
+          <a:p>
+            <a:pPr lvl="1"/>
+            <a:r>
+              <a:rPr lang="en-US" dirty="0"/>
+              <a:t>Baseline is likelihood of golfing at all. </a:t>
+            </a:r>
+          </a:p>
+          <a:p>
+            <a:pPr lvl="1"/>
+            <a:r>
+              <a:rPr lang="en-US" dirty="0"/>
+              <a:t>‘Add’ impact of rain – if golfing, likelihood of rain; if not, likelihood of rain. </a:t>
+            </a:r>
+          </a:p>
+          <a:p>
+            <a:pPr lvl="1"/>
+            <a:r>
+              <a:rPr lang="en-US" dirty="0"/>
+              <a:t>‘Add’ impact of cloud – if golfing, likelihood of cloud’ if not, likelihood of cloud. </a:t>
+            </a:r>
+          </a:p>
+        </p:txBody>
+      </p:sp>
+    </p:spTree>
+    <p:extLst>
+      <p:ext uri="{BB962C8B-B14F-4D97-AF65-F5344CB8AC3E}">
+        <p14:creationId xmlns:p14="http://schemas.microsoft.com/office/powerpoint/2010/main" val="3787838879"/>
+      </p:ext>
+    </p:extLst>
+  </p:cSld>
+  <p:clrMapOvr>
+    <a:masterClrMapping/>
+  </p:clrMapOvr>
+</p:sld>
+</file>
+
+<file path=ppt/slides/slide3.xml><?xml version="1.0" encoding="utf-8"?>
+<p:sld xmlns:a="http://schemas.openxmlformats.org/drawingml/2006/main" xmlns:r="http://schemas.openxmlformats.org/officeDocument/2006/relationships" xmlns:p="http://schemas.openxmlformats.org/presentationml/2006/main">
+  <p:cSld>
+    <p:spTree>
+      <p:nvGrpSpPr>
+        <p:cNvPr id="1" name=""/>
+        <p:cNvGrpSpPr/>
+        <p:nvPr/>
+      </p:nvGrpSpPr>
+      <p:grpSpPr>
+        <a:xfrm>
+          <a:off x="0" y="0"/>
+          <a:ext cx="0" cy="0"/>
+          <a:chOff x="0" y="0"/>
+          <a:chExt cx="0" cy="0"/>
+        </a:xfrm>
+      </p:grpSpPr>
+      <p:sp>
+        <p:nvSpPr>
+          <p:cNvPr id="2" name="Title 1">
+            <a:extLst>
+              <a:ext uri="{FF2B5EF4-FFF2-40B4-BE49-F238E27FC236}">
+                <a16:creationId xmlns:a16="http://schemas.microsoft.com/office/drawing/2014/main" id="{19C3C971-F15A-47C2-94D1-A1CD93B56247}"/>
+              </a:ext>
+            </a:extLst>
+          </p:cNvPr>
+          <p:cNvSpPr>
+            <a:spLocks noGrp="1"/>
+          </p:cNvSpPr>
+          <p:nvPr>
+            <p:ph type="title"/>
+          </p:nvPr>
+        </p:nvSpPr>
+        <p:spPr/>
+        <p:txBody>
+          <a:bodyPr/>
+          <a:lstStyle/>
+          <a:p>
+            <a:r>
+              <a:rPr lang="en-US" dirty="0"/>
+              <a:t>Housekeeping </a:t>
+            </a:r>
+          </a:p>
+        </p:txBody>
+      </p:sp>
+      <p:sp>
+        <p:nvSpPr>
+          <p:cNvPr id="3" name="Content Placeholder 2">
+            <a:extLst>
+              <a:ext uri="{FF2B5EF4-FFF2-40B4-BE49-F238E27FC236}">
+                <a16:creationId xmlns:a16="http://schemas.microsoft.com/office/drawing/2014/main" id="{1001E804-904C-6D1B-C1E1-E39D1B0260CD}"/>
+              </a:ext>
+            </a:extLst>
+          </p:cNvPr>
+          <p:cNvSpPr>
+            <a:spLocks noGrp="1"/>
+          </p:cNvSpPr>
+          <p:nvPr>
+            <p:ph idx="1"/>
+          </p:nvPr>
+        </p:nvSpPr>
+        <p:spPr/>
+        <p:txBody>
+          <a:bodyPr/>
+          <a:lstStyle/>
+          <a:p>
+            <a:endParaRPr lang="en-US" dirty="0"/>
+          </a:p>
+        </p:txBody>
+      </p:sp>
+    </p:spTree>
+    <p:extLst>
+      <p:ext uri="{BB962C8B-B14F-4D97-AF65-F5344CB8AC3E}">
+        <p14:creationId xmlns:p14="http://schemas.microsoft.com/office/powerpoint/2010/main" val="987811459"/>
+      </p:ext>
+    </p:extLst>
+  </p:cSld>
+  <p:clrMapOvr>
+    <a:masterClrMapping/>
+  </p:clrMapOvr>
+</p:sld>
+</file>
+
+<file path=ppt/slides/slide30.xml><?xml version="1.0" encoding="utf-8"?>
 <p:sld xmlns:a="http://schemas.openxmlformats.org/drawingml/2006/main" xmlns:r="http://schemas.openxmlformats.org/officeDocument/2006/relationships" xmlns:p="http://schemas.openxmlformats.org/presentationml/2006/main">
   <p:cSld>
     <p:spTree>
@@ -4712,7 +7679,7 @@
 </p:sld>
 </file>
 
-<file path=ppt/slides/slide16.xml><?xml version="1.0" encoding="utf-8"?>
+<file path=ppt/slides/slide31.xml><?xml version="1.0" encoding="utf-8"?>
 <p:sld xmlns:a="http://schemas.openxmlformats.org/drawingml/2006/main" xmlns:r="http://schemas.openxmlformats.org/officeDocument/2006/relationships" xmlns:p="http://schemas.openxmlformats.org/presentationml/2006/main">
   <p:cSld>
     <p:spTree>
@@ -4944,7 +7911,7 @@
 </p:sld>
 </file>
 
-<file path=ppt/slides/slide17.xml><?xml version="1.0" encoding="utf-8"?>
+<file path=ppt/slides/slide32.xml><?xml version="1.0" encoding="utf-8"?>
 <p:sld xmlns:a="http://schemas.openxmlformats.org/drawingml/2006/main" xmlns:r="http://schemas.openxmlformats.org/officeDocument/2006/relationships" xmlns:p="http://schemas.openxmlformats.org/presentationml/2006/main">
   <p:cSld>
     <p:spTree>
@@ -5178,7 +8145,7 @@
 </p:sld>
 </file>
 
-<file path=ppt/slides/slide18.xml><?xml version="1.0" encoding="utf-8"?>
+<file path=ppt/slides/slide33.xml><?xml version="1.0" encoding="utf-8"?>
 <p:sld xmlns:a="http://schemas.openxmlformats.org/drawingml/2006/main" xmlns:r="http://schemas.openxmlformats.org/officeDocument/2006/relationships" xmlns:p="http://schemas.openxmlformats.org/presentationml/2006/main">
   <p:cSld>
     <p:spTree>
@@ -5241,8 +8208,8 @@
         </p:nvSpPr>
         <p:spPr>
           <a:xfrm>
-            <a:off x="1451579" y="2015732"/>
-            <a:ext cx="9603275" cy="4126651"/>
+            <a:off x="1451579" y="1853754"/>
+            <a:ext cx="9603275" cy="4288630"/>
           </a:xfrm>
         </p:spPr>
         <p:txBody>
@@ -5258,7 +8225,7 @@
             <a:pPr lvl="1"/>
             <a:r>
               <a:rPr lang="en-US" dirty="0"/>
-              <a:t>As we did with the Bayesian tables in stats. </a:t>
+              <a:t>As we did with the Bayesian tables – it’d be like 99%+ banana here. </a:t>
             </a:r>
           </a:p>
           <a:p>
@@ -5305,7 +8272,14 @@
             <a:pPr lvl="1"/>
             <a:r>
               <a:rPr lang="en-US" dirty="0"/>
-              <a:t>Probability estimates aren’t reliable, even if classifier is accurate. </a:t>
+              <a:t>Probability estimates aren’t reliable*, even if classifier is accurate. </a:t>
+            </a:r>
+          </a:p>
+          <a:p>
+            <a:pPr lvl="2"/>
+            <a:r>
+              <a:rPr lang="en-US" dirty="0"/>
+              <a:t>The raw percentages from calculations shouldn’t be relied on. (Independence and completeness). </a:t>
             </a:r>
           </a:p>
         </p:txBody>
@@ -5323,7 +8297,438 @@
 </p:sld>
 </file>
 
-<file path=ppt/slides/slide19.xml><?xml version="1.0" encoding="utf-8"?>
+<file path=ppt/slides/slide34.xml><?xml version="1.0" encoding="utf-8"?>
+<p:sld xmlns:a="http://schemas.openxmlformats.org/drawingml/2006/main" xmlns:r="http://schemas.openxmlformats.org/officeDocument/2006/relationships" xmlns:p="http://schemas.openxmlformats.org/presentationml/2006/main" show="0">
+  <p:cSld>
+    <p:spTree>
+      <p:nvGrpSpPr>
+        <p:cNvPr id="1" name=""/>
+        <p:cNvGrpSpPr/>
+        <p:nvPr/>
+      </p:nvGrpSpPr>
+      <p:grpSpPr>
+        <a:xfrm>
+          <a:off x="0" y="0"/>
+          <a:ext cx="0" cy="0"/>
+          <a:chOff x="0" y="0"/>
+          <a:chExt cx="0" cy="0"/>
+        </a:xfrm>
+      </p:grpSpPr>
+      <p:sp>
+        <p:nvSpPr>
+          <p:cNvPr id="2" name="Title 1">
+            <a:extLst>
+              <a:ext uri="{FF2B5EF4-FFF2-40B4-BE49-F238E27FC236}">
+                <a16:creationId xmlns:a16="http://schemas.microsoft.com/office/drawing/2014/main" id="{0594A360-1759-643C-64C0-FC355CD2DF81}"/>
+              </a:ext>
+            </a:extLst>
+          </p:cNvPr>
+          <p:cNvSpPr>
+            <a:spLocks noGrp="1"/>
+          </p:cNvSpPr>
+          <p:nvPr>
+            <p:ph type="title"/>
+          </p:nvPr>
+        </p:nvSpPr>
+        <p:spPr/>
+        <p:txBody>
+          <a:bodyPr/>
+          <a:lstStyle/>
+          <a:p>
+            <a:r>
+              <a:rPr lang="en-US" dirty="0"/>
+              <a:t>Interpretability</a:t>
+            </a:r>
+          </a:p>
+        </p:txBody>
+      </p:sp>
+      <p:sp>
+        <p:nvSpPr>
+          <p:cNvPr id="3" name="Content Placeholder 2">
+            <a:extLst>
+              <a:ext uri="{FF2B5EF4-FFF2-40B4-BE49-F238E27FC236}">
+                <a16:creationId xmlns:a16="http://schemas.microsoft.com/office/drawing/2014/main" id="{8E75A48A-C4EA-9CA2-71BD-0A1C002A7971}"/>
+              </a:ext>
+            </a:extLst>
+          </p:cNvPr>
+          <p:cNvSpPr>
+            <a:spLocks noGrp="1"/>
+          </p:cNvSpPr>
+          <p:nvPr>
+            <p:ph idx="1"/>
+          </p:nvPr>
+        </p:nvSpPr>
+        <p:spPr/>
+        <p:txBody>
+          <a:bodyPr/>
+          <a:lstStyle/>
+          <a:p>
+            <a:r>
+              <a:rPr lang="en-US" dirty="0"/>
+              <a:t>One metric, outside of accuracy, that a model may be evaluated on is interpretability. </a:t>
+            </a:r>
+          </a:p>
+          <a:p>
+            <a:pPr lvl="1"/>
+            <a:r>
+              <a:rPr lang="en-US" dirty="0"/>
+              <a:t>Can we understand how the model made a decision. </a:t>
+            </a:r>
+          </a:p>
+          <a:p>
+            <a:r>
+              <a:rPr lang="en-US" dirty="0"/>
+              <a:t>We’ve seen parts that go both </a:t>
+            </a:r>
+          </a:p>
+        </p:txBody>
+      </p:sp>
+    </p:spTree>
+    <p:extLst>
+      <p:ext uri="{BB962C8B-B14F-4D97-AF65-F5344CB8AC3E}">
+        <p14:creationId xmlns:p14="http://schemas.microsoft.com/office/powerpoint/2010/main" val="483521231"/>
+      </p:ext>
+    </p:extLst>
+  </p:cSld>
+  <p:clrMapOvr>
+    <a:masterClrMapping/>
+  </p:clrMapOvr>
+</p:sld>
+</file>
+
+<file path=ppt/slides/slide35.xml><?xml version="1.0" encoding="utf-8"?>
+<p:sld xmlns:a="http://schemas.openxmlformats.org/drawingml/2006/main" xmlns:r="http://schemas.openxmlformats.org/officeDocument/2006/relationships" xmlns:p="http://schemas.openxmlformats.org/presentationml/2006/main">
+  <p:cSld>
+    <p:spTree>
+      <p:nvGrpSpPr>
+        <p:cNvPr id="1" name=""/>
+        <p:cNvGrpSpPr/>
+        <p:nvPr/>
+      </p:nvGrpSpPr>
+      <p:grpSpPr>
+        <a:xfrm>
+          <a:off x="0" y="0"/>
+          <a:ext cx="0" cy="0"/>
+          <a:chOff x="0" y="0"/>
+          <a:chExt cx="0" cy="0"/>
+        </a:xfrm>
+      </p:grpSpPr>
+      <p:sp>
+        <p:nvSpPr>
+          <p:cNvPr id="2" name="Title 1">
+            <a:extLst>
+              <a:ext uri="{FF2B5EF4-FFF2-40B4-BE49-F238E27FC236}">
+                <a16:creationId xmlns:a16="http://schemas.microsoft.com/office/drawing/2014/main" id="{780AA587-6B7B-4684-677B-EF71500D0639}"/>
+              </a:ext>
+            </a:extLst>
+          </p:cNvPr>
+          <p:cNvSpPr>
+            <a:spLocks noGrp="1"/>
+          </p:cNvSpPr>
+          <p:nvPr>
+            <p:ph type="title"/>
+          </p:nvPr>
+        </p:nvSpPr>
+        <p:spPr/>
+        <p:txBody>
+          <a:bodyPr/>
+          <a:lstStyle/>
+          <a:p>
+            <a:r>
+              <a:rPr lang="en-US" dirty="0"/>
+              <a:t>Non-Linear Relationships</a:t>
+            </a:r>
+          </a:p>
+        </p:txBody>
+      </p:sp>
+      <p:sp>
+        <p:nvSpPr>
+          <p:cNvPr id="3" name="Content Placeholder 2">
+            <a:extLst>
+              <a:ext uri="{FF2B5EF4-FFF2-40B4-BE49-F238E27FC236}">
+                <a16:creationId xmlns:a16="http://schemas.microsoft.com/office/drawing/2014/main" id="{EC7FF0EB-AAA0-3DDF-F4BB-8C77B3DE0B8A}"/>
+              </a:ext>
+            </a:extLst>
+          </p:cNvPr>
+          <p:cNvSpPr>
+            <a:spLocks noGrp="1"/>
+          </p:cNvSpPr>
+          <p:nvPr>
+            <p:ph idx="1"/>
+          </p:nvPr>
+        </p:nvSpPr>
+        <p:spPr>
+          <a:xfrm>
+            <a:off x="1451579" y="1948940"/>
+            <a:ext cx="9603275" cy="4104541"/>
+          </a:xfrm>
+        </p:spPr>
+        <p:txBody>
+          <a:bodyPr/>
+          <a:lstStyle/>
+          <a:p>
+            <a:r>
+              <a:rPr lang="en-US" dirty="0"/>
+              <a:t>One cool thing about Bayes is that it isn’t linear. </a:t>
+            </a:r>
+          </a:p>
+          <a:p>
+            <a:pPr lvl="1"/>
+            <a:r>
+              <a:rPr lang="en-US" dirty="0"/>
+              <a:t>There’s no y=</a:t>
+            </a:r>
+            <a:r>
+              <a:rPr lang="en-US" dirty="0" err="1"/>
+              <a:t>mx+b</a:t>
+            </a:r>
+            <a:r>
+              <a:rPr lang="en-US" dirty="0"/>
+              <a:t> type equation anywhere. </a:t>
+            </a:r>
+          </a:p>
+          <a:p>
+            <a:r>
+              <a:rPr lang="en-US" dirty="0"/>
+              <a:t>The decisions it makes are the same as a logistic regression, but the method is different. </a:t>
+            </a:r>
+          </a:p>
+          <a:p>
+            <a:pPr lvl="1"/>
+            <a:r>
+              <a:rPr lang="en-US" dirty="0"/>
+              <a:t>Logistic regression requires some linear decision boundary to separate A/B. </a:t>
+            </a:r>
+          </a:p>
+          <a:p>
+            <a:pPr lvl="1"/>
+            <a:r>
+              <a:rPr lang="en-US" dirty="0"/>
+              <a:t>Bayes doesn’t – things can be classified without a linear relationship. </a:t>
+            </a:r>
+          </a:p>
+          <a:p>
+            <a:pPr lvl="1"/>
+            <a:r>
+              <a:rPr lang="en-US" dirty="0"/>
+              <a:t>Different types of models can handle different types of relationships in data. </a:t>
+            </a:r>
+          </a:p>
+          <a:p>
+            <a:r>
+              <a:rPr lang="en-US" dirty="0"/>
+              <a:t>If there is a linear correlation, regression may excel, if not Bayes (or others) may excel…</a:t>
+            </a:r>
+          </a:p>
+          <a:p>
+            <a:pPr lvl="1"/>
+            <a:r>
+              <a:rPr lang="en-US" dirty="0"/>
+              <a:t>Real scenarios may have non-linear relationships. </a:t>
+            </a:r>
+          </a:p>
+          <a:p>
+            <a:pPr lvl="1"/>
+            <a:r>
+              <a:rPr lang="en-US" dirty="0"/>
+              <a:t>Is there a linear relationship between dining options and cancer occurrences – maybe? </a:t>
+            </a:r>
+          </a:p>
+        </p:txBody>
+      </p:sp>
+    </p:spTree>
+    <p:extLst>
+      <p:ext uri="{BB962C8B-B14F-4D97-AF65-F5344CB8AC3E}">
+        <p14:creationId xmlns:p14="http://schemas.microsoft.com/office/powerpoint/2010/main" val="2500669158"/>
+      </p:ext>
+    </p:extLst>
+  </p:cSld>
+  <p:clrMapOvr>
+    <a:masterClrMapping/>
+  </p:clrMapOvr>
+</p:sld>
+</file>
+
+<file path=ppt/slides/slide36.xml><?xml version="1.0" encoding="utf-8"?>
+<p:sld xmlns:a="http://schemas.openxmlformats.org/drawingml/2006/main" xmlns:r="http://schemas.openxmlformats.org/officeDocument/2006/relationships" xmlns:p="http://schemas.openxmlformats.org/presentationml/2006/main">
+  <p:cSld>
+    <p:spTree>
+      <p:nvGrpSpPr>
+        <p:cNvPr id="1" name=""/>
+        <p:cNvGrpSpPr/>
+        <p:nvPr/>
+      </p:nvGrpSpPr>
+      <p:grpSpPr>
+        <a:xfrm>
+          <a:off x="0" y="0"/>
+          <a:ext cx="0" cy="0"/>
+          <a:chOff x="0" y="0"/>
+          <a:chExt cx="0" cy="0"/>
+        </a:xfrm>
+      </p:grpSpPr>
+      <p:sp>
+        <p:nvSpPr>
+          <p:cNvPr id="2" name="Title 1">
+            <a:extLst>
+              <a:ext uri="{FF2B5EF4-FFF2-40B4-BE49-F238E27FC236}">
+                <a16:creationId xmlns:a16="http://schemas.microsoft.com/office/drawing/2014/main" id="{866A9EA6-F507-0EAA-3C89-0EC3D6673340}"/>
+              </a:ext>
+            </a:extLst>
+          </p:cNvPr>
+          <p:cNvSpPr>
+            <a:spLocks noGrp="1"/>
+          </p:cNvSpPr>
+          <p:nvPr>
+            <p:ph type="title"/>
+          </p:nvPr>
+        </p:nvSpPr>
+        <p:spPr/>
+        <p:txBody>
+          <a:bodyPr/>
+          <a:lstStyle/>
+          <a:p>
+            <a:r>
+              <a:rPr lang="en-US" dirty="0"/>
+              <a:t>Non-linearity</a:t>
+            </a:r>
+          </a:p>
+        </p:txBody>
+      </p:sp>
+      <p:sp>
+        <p:nvSpPr>
+          <p:cNvPr id="3" name="Content Placeholder 2">
+            <a:extLst>
+              <a:ext uri="{FF2B5EF4-FFF2-40B4-BE49-F238E27FC236}">
+                <a16:creationId xmlns:a16="http://schemas.microsoft.com/office/drawing/2014/main" id="{ED36C2D9-D2C9-1785-1992-2C61761F8E5F}"/>
+              </a:ext>
+            </a:extLst>
+          </p:cNvPr>
+          <p:cNvSpPr>
+            <a:spLocks noGrp="1"/>
+          </p:cNvSpPr>
+          <p:nvPr>
+            <p:ph idx="1"/>
+          </p:nvPr>
+        </p:nvSpPr>
+        <p:spPr>
+          <a:xfrm>
+            <a:off x="6483305" y="2330365"/>
+            <a:ext cx="5264046" cy="2673882"/>
+          </a:xfrm>
+        </p:spPr>
+        <p:txBody>
+          <a:bodyPr/>
+          <a:lstStyle/>
+          <a:p>
+            <a:r>
+              <a:rPr lang="en-US" dirty="0"/>
+              <a:t>Capturing non-linear relationships is great. </a:t>
+            </a:r>
+          </a:p>
+          <a:p>
+            <a:r>
+              <a:rPr lang="en-US" dirty="0"/>
+              <a:t>Lots of data may not have a linear relationship.</a:t>
+            </a:r>
+          </a:p>
+          <a:p>
+            <a:pPr lvl="1"/>
+            <a:r>
+              <a:rPr lang="en-US" dirty="0"/>
+              <a:t>Especially true in ‘unstructured’ problems. </a:t>
+            </a:r>
+          </a:p>
+          <a:p>
+            <a:pPr lvl="1"/>
+            <a:r>
+              <a:rPr lang="en-US" dirty="0"/>
+              <a:t>Unstructured data is non-tabular. Images, </a:t>
+            </a:r>
+            <a:r>
+              <a:rPr lang="en-US" dirty="0" err="1"/>
+              <a:t>etc</a:t>
+            </a:r>
+            <a:r>
+              <a:rPr lang="en-US" dirty="0"/>
+              <a:t>…</a:t>
+            </a:r>
+          </a:p>
+          <a:p>
+            <a:pPr lvl="1"/>
+            <a:r>
+              <a:rPr lang="en-US" dirty="0"/>
+              <a:t>Linear models can’t adapt to the relationship.</a:t>
+            </a:r>
+          </a:p>
+          <a:p>
+            <a:endParaRPr lang="en-US" dirty="0"/>
+          </a:p>
+          <a:p>
+            <a:endParaRPr lang="en-US" dirty="0"/>
+          </a:p>
+        </p:txBody>
+      </p:sp>
+      <p:pic>
+        <p:nvPicPr>
+          <p:cNvPr id="2050" name="Picture 2" descr="Naive Bayes and Text Classification | Sebastian Raschka, PhD">
+            <a:extLst>
+              <a:ext uri="{FF2B5EF4-FFF2-40B4-BE49-F238E27FC236}">
+                <a16:creationId xmlns:a16="http://schemas.microsoft.com/office/drawing/2014/main" id="{37A2E253-8495-39AF-3A71-34038CEF36D8}"/>
+              </a:ext>
+            </a:extLst>
+          </p:cNvPr>
+          <p:cNvPicPr>
+            <a:picLocks noChangeAspect="1" noChangeArrowheads="1"/>
+          </p:cNvPicPr>
+          <p:nvPr/>
+        </p:nvPicPr>
+        <p:blipFill>
+          <a:blip r:embed="rId2">
+            <a:extLst>
+              <a:ext uri="{28A0092B-C50C-407E-A947-70E740481C1C}">
+                <a14:useLocalDpi xmlns:a14="http://schemas.microsoft.com/office/drawing/2010/main" val="0"/>
+              </a:ext>
+            </a:extLst>
+          </a:blip>
+          <a:srcRect/>
+          <a:stretch>
+            <a:fillRect/>
+          </a:stretch>
+        </p:blipFill>
+        <p:spPr bwMode="auto">
+          <a:xfrm>
+            <a:off x="100199" y="2330365"/>
+            <a:ext cx="6383106" cy="2673882"/>
+          </a:xfrm>
+          <a:prstGeom prst="rect">
+            <a:avLst/>
+          </a:prstGeom>
+          <a:noFill/>
+          <a:extLst>
+            <a:ext uri="{909E8E84-426E-40DD-AFC4-6F175D3DCCD1}">
+              <a14:hiddenFill xmlns:a14="http://schemas.microsoft.com/office/drawing/2010/main">
+                <a:solidFill>
+                  <a:srgbClr val="FFFFFF"/>
+                </a:solidFill>
+              </a14:hiddenFill>
+            </a:ext>
+          </a:extLst>
+        </p:spPr>
+      </p:pic>
+    </p:spTree>
+    <p:extLst>
+      <p:ext uri="{BB962C8B-B14F-4D97-AF65-F5344CB8AC3E}">
+        <p14:creationId xmlns:p14="http://schemas.microsoft.com/office/powerpoint/2010/main" val="4186780640"/>
+      </p:ext>
+    </p:extLst>
+  </p:cSld>
+  <p:clrMapOvr>
+    <a:masterClrMapping/>
+  </p:clrMapOvr>
+</p:sld>
+</file>
+
+<file path=ppt/slides/slide37.xml><?xml version="1.0" encoding="utf-8"?>
 <p:sld xmlns:a="http://schemas.openxmlformats.org/drawingml/2006/main" xmlns:r="http://schemas.openxmlformats.org/officeDocument/2006/relationships" xmlns:p="http://schemas.openxmlformats.org/presentationml/2006/main">
   <p:cSld>
     <p:bg>
@@ -5417,8 +8822,8 @@
         </p:nvSpPr>
         <p:spPr>
           <a:xfrm>
-            <a:off x="679623" y="2015734"/>
-            <a:ext cx="4934512" cy="4137931"/>
+            <a:off x="278674" y="1915886"/>
+            <a:ext cx="5995549" cy="4206241"/>
           </a:xfrm>
         </p:spPr>
         <p:txBody>
@@ -5455,8 +8860,8 @@
               </a:lnSpc>
             </a:pPr>
             <a:r>
-              <a:rPr lang="en-US" dirty="0"/>
-              <a:t>This introduces a divide by 0, which is impossible. </a:t>
+              <a:rPr lang="en-US" b="1" dirty="0"/>
+              <a:t>Introduces a divide by 0, which is impossible. </a:t>
             </a:r>
           </a:p>
           <a:p>
@@ -5490,6 +8895,50 @@
             <a:r>
               <a:rPr lang="en-US" dirty="0"/>
               <a:t>Built into any implementation, usually as a parameter. </a:t>
+            </a:r>
+          </a:p>
+          <a:p>
+            <a:pPr lvl="1">
+              <a:lnSpc>
+                <a:spcPct val="110000"/>
+              </a:lnSpc>
+            </a:pPr>
+            <a:r>
+              <a:rPr lang="en-US" dirty="0"/>
+              <a:t>Common as you’ll get an error if things are missing.</a:t>
+            </a:r>
+          </a:p>
+          <a:p>
+            <a:pPr>
+              <a:lnSpc>
+                <a:spcPct val="110000"/>
+              </a:lnSpc>
+            </a:pPr>
+            <a:r>
+              <a:rPr lang="en-US" dirty="0"/>
+              <a:t>The larger the data is, the less this matters. </a:t>
+            </a:r>
+          </a:p>
+          <a:p>
+            <a:pPr lvl="1">
+              <a:lnSpc>
+                <a:spcPct val="110000"/>
+              </a:lnSpc>
+            </a:pPr>
+            <a:r>
+              <a:rPr lang="en-US" dirty="0"/>
+              <a:t>Big data = fewer missing values from train. </a:t>
+            </a:r>
+          </a:p>
+          <a:p>
+            <a:pPr lvl="1">
+              <a:lnSpc>
+                <a:spcPct val="110000"/>
+              </a:lnSpc>
+            </a:pPr>
+            <a:r>
+              <a:rPr lang="en-US" dirty="0"/>
+              <a:t>Big data = this change is numerically irrelevant. </a:t>
             </a:r>
           </a:p>
         </p:txBody>
@@ -5553,120 +9002,7 @@
 </p:sld>
 </file>
 
-<file path=ppt/slides/slide2.xml><?xml version="1.0" encoding="utf-8"?>
-<p:sld xmlns:a="http://schemas.openxmlformats.org/drawingml/2006/main" xmlns:r="http://schemas.openxmlformats.org/officeDocument/2006/relationships" xmlns:p="http://schemas.openxmlformats.org/presentationml/2006/main">
-  <p:cSld>
-    <p:spTree>
-      <p:nvGrpSpPr>
-        <p:cNvPr id="1" name=""/>
-        <p:cNvGrpSpPr/>
-        <p:nvPr/>
-      </p:nvGrpSpPr>
-      <p:grpSpPr>
-        <a:xfrm>
-          <a:off x="0" y="0"/>
-          <a:ext cx="0" cy="0"/>
-          <a:chOff x="0" y="0"/>
-          <a:chExt cx="0" cy="0"/>
-        </a:xfrm>
-      </p:grpSpPr>
-      <p:sp>
-        <p:nvSpPr>
-          <p:cNvPr id="2" name="Title 1">
-            <a:extLst>
-              <a:ext uri="{FF2B5EF4-FFF2-40B4-BE49-F238E27FC236}">
-                <a16:creationId xmlns:a16="http://schemas.microsoft.com/office/drawing/2014/main" id="{C31883E5-2524-759A-34CB-AF79F119D41C}"/>
-              </a:ext>
-            </a:extLst>
-          </p:cNvPr>
-          <p:cNvSpPr>
-            <a:spLocks noGrp="1"/>
-          </p:cNvSpPr>
-          <p:nvPr>
-            <p:ph type="title"/>
-          </p:nvPr>
-        </p:nvSpPr>
-        <p:spPr/>
-        <p:txBody>
-          <a:bodyPr/>
-          <a:lstStyle/>
-          <a:p>
-            <a:r>
-              <a:rPr lang="en-US" dirty="0"/>
-              <a:t>Why Are densities so Weird? </a:t>
-            </a:r>
-          </a:p>
-        </p:txBody>
-      </p:sp>
-      <p:sp>
-        <p:nvSpPr>
-          <p:cNvPr id="3" name="Content Placeholder 2">
-            <a:extLst>
-              <a:ext uri="{FF2B5EF4-FFF2-40B4-BE49-F238E27FC236}">
-                <a16:creationId xmlns:a16="http://schemas.microsoft.com/office/drawing/2014/main" id="{3532D88E-CBA3-BD41-400C-306B011019C3}"/>
-              </a:ext>
-            </a:extLst>
-          </p:cNvPr>
-          <p:cNvSpPr>
-            <a:spLocks noGrp="1"/>
-          </p:cNvSpPr>
-          <p:nvPr>
-            <p:ph idx="1"/>
-          </p:nvPr>
-        </p:nvSpPr>
-        <p:spPr/>
-        <p:txBody>
-          <a:bodyPr/>
-          <a:lstStyle/>
-          <a:p>
-            <a:endParaRPr lang="en-US"/>
-          </a:p>
-        </p:txBody>
-      </p:sp>
-      <p:pic>
-        <p:nvPicPr>
-          <p:cNvPr id="6" name="Picture 5">
-            <a:extLst>
-              <a:ext uri="{FF2B5EF4-FFF2-40B4-BE49-F238E27FC236}">
-                <a16:creationId xmlns:a16="http://schemas.microsoft.com/office/drawing/2014/main" id="{AADD1F11-10A9-2178-1300-92D45A6C24B1}"/>
-              </a:ext>
-            </a:extLst>
-          </p:cNvPr>
-          <p:cNvPicPr>
-            <a:picLocks noChangeAspect="1"/>
-          </p:cNvPicPr>
-          <p:nvPr/>
-        </p:nvPicPr>
-        <p:blipFill>
-          <a:blip r:embed="rId2"/>
-          <a:stretch>
-            <a:fillRect/>
-          </a:stretch>
-        </p:blipFill>
-        <p:spPr>
-          <a:xfrm>
-            <a:off x="2034540" y="1853754"/>
-            <a:ext cx="7772400" cy="4798169"/>
-          </a:xfrm>
-          <a:prstGeom prst="rect">
-            <a:avLst/>
-          </a:prstGeom>
-        </p:spPr>
-      </p:pic>
-    </p:spTree>
-    <p:extLst>
-      <p:ext uri="{BB962C8B-B14F-4D97-AF65-F5344CB8AC3E}">
-        <p14:creationId xmlns:p14="http://schemas.microsoft.com/office/powerpoint/2010/main" val="1106345949"/>
-      </p:ext>
-    </p:extLst>
-  </p:cSld>
-  <p:clrMapOvr>
-    <a:masterClrMapping/>
-  </p:clrMapOvr>
-</p:sld>
-</file>
-
-<file path=ppt/slides/slide20.xml><?xml version="1.0" encoding="utf-8"?>
+<file path=ppt/slides/slide38.xml><?xml version="1.0" encoding="utf-8"?>
 <p:sld xmlns:a="http://schemas.openxmlformats.org/drawingml/2006/main" xmlns:r="http://schemas.openxmlformats.org/officeDocument/2006/relationships" xmlns:p="http://schemas.openxmlformats.org/presentationml/2006/main">
   <p:cSld>
     <p:bg>
@@ -5760,8 +9096,8 @@
         </p:nvSpPr>
         <p:spPr>
           <a:xfrm>
-            <a:off x="481915" y="2015734"/>
-            <a:ext cx="5132220" cy="4037747"/>
+            <a:off x="165463" y="1853754"/>
+            <a:ext cx="5844348" cy="4199727"/>
           </a:xfrm>
         </p:spPr>
         <p:txBody>
@@ -5811,6 +9147,28 @@
             <a:r>
               <a:rPr lang="en-US" dirty="0"/>
               <a:t>These probabilities replace the probabilities in Bayes and everything else works in the same way. </a:t>
+            </a:r>
+          </a:p>
+          <a:p>
+            <a:pPr>
+              <a:lnSpc>
+                <a:spcPct val="110000"/>
+              </a:lnSpc>
+            </a:pPr>
+            <a:r>
+              <a:rPr lang="en-US" dirty="0"/>
+              <a:t>This is one example of wanting normalized data for features based on model assumptions. </a:t>
+            </a:r>
+          </a:p>
+          <a:p>
+            <a:pPr>
+              <a:lnSpc>
+                <a:spcPct val="110000"/>
+              </a:lnSpc>
+            </a:pPr>
+            <a:r>
+              <a:rPr lang="en-US" dirty="0"/>
+              <a:t>Note: the details are handled by sklearn. </a:t>
             </a:r>
           </a:p>
         </p:txBody>
@@ -5874,7 +9232,7 @@
 </p:sld>
 </file>
 
-<file path=ppt/slides/slide21.xml><?xml version="1.0" encoding="utf-8"?>
+<file path=ppt/slides/slide39.xml><?xml version="1.0" encoding="utf-8"?>
 <p:sld xmlns:a="http://schemas.openxmlformats.org/drawingml/2006/main" xmlns:r="http://schemas.openxmlformats.org/officeDocument/2006/relationships" xmlns:p="http://schemas.openxmlformats.org/presentationml/2006/main">
   <p:cSld>
     <p:spTree>
@@ -5896,7 +9254,7 @@
           <p:cNvPr id="2" name="Title 1">
             <a:extLst>
               <a:ext uri="{FF2B5EF4-FFF2-40B4-BE49-F238E27FC236}">
-                <a16:creationId xmlns:a16="http://schemas.microsoft.com/office/drawing/2014/main" id="{0AD813C7-2AD5-8445-A578-9756556E98FC}"/>
+                <a16:creationId xmlns:a16="http://schemas.microsoft.com/office/drawing/2014/main" id="{14D8C9D8-9487-2297-14C9-A847E7D5831F}"/>
               </a:ext>
             </a:extLst>
           </p:cNvPr>
@@ -5914,7 +9272,7 @@
           <a:p>
             <a:r>
               <a:rPr lang="en-US" dirty="0"/>
-              <a:t>Naïve Bayes Conclusion</a:t>
+              <a:t>Bayes and Sklearn Implementation</a:t>
             </a:r>
           </a:p>
         </p:txBody>
@@ -5924,7 +9282,7 @@
           <p:cNvPr id="3" name="Content Placeholder 2">
             <a:extLst>
               <a:ext uri="{FF2B5EF4-FFF2-40B4-BE49-F238E27FC236}">
-                <a16:creationId xmlns:a16="http://schemas.microsoft.com/office/drawing/2014/main" id="{AB982E42-0273-FB4E-B3D8-2E3564257E94}"/>
+                <a16:creationId xmlns:a16="http://schemas.microsoft.com/office/drawing/2014/main" id="{C4A5C909-14D4-FC92-D91B-32B5388C2458}"/>
               </a:ext>
             </a:extLst>
           </p:cNvPr>
@@ -5935,305 +9293,107 @@
             <p:ph idx="1"/>
           </p:nvPr>
         </p:nvSpPr>
-        <p:spPr/>
-        <p:txBody>
-          <a:bodyPr/>
-          <a:lstStyle/>
-          <a:p>
-            <a:r>
-              <a:rPr lang="en-US" dirty="0"/>
-              <a:t>Bayes is one of the more simple classifiers that we can create. </a:t>
-            </a:r>
-          </a:p>
-          <a:p>
-            <a:r>
-              <a:rPr lang="en-US" dirty="0"/>
-              <a:t>Bayes regression exists, but is not super common. </a:t>
-            </a:r>
-          </a:p>
-          <a:p>
-            <a:endParaRPr lang="en-US" dirty="0"/>
-          </a:p>
-          <a:p>
-            <a:r>
-              <a:rPr lang="en-US" dirty="0"/>
-              <a:t>Bayes is often used in things like spam detection, the speed helps here. </a:t>
-            </a:r>
-          </a:p>
-          <a:p>
-            <a:r>
-              <a:rPr lang="en-US" dirty="0"/>
-              <a:t>When Bayes works well for a dataset, it can be very good, but if it doesn’t there is limited ability to tune it to </a:t>
-            </a:r>
-            <a:r>
-              <a:rPr lang="en-US"/>
-              <a:t>be better. </a:t>
-            </a:r>
-            <a:endParaRPr lang="en-US" dirty="0"/>
+        <p:spPr>
+          <a:xfrm>
+            <a:off x="1451579" y="1853754"/>
+            <a:ext cx="9603275" cy="4277080"/>
+          </a:xfrm>
+        </p:spPr>
+        <p:txBody>
+          <a:bodyPr>
+            <a:normAutofit fontScale="92500" lnSpcReduction="10000"/>
+          </a:bodyPr>
+          <a:lstStyle/>
+          <a:p>
+            <a:r>
+              <a:rPr lang="en-US" i="1" dirty="0"/>
+              <a:t>Using</a:t>
+            </a:r>
+            <a:r>
+              <a:rPr lang="en-US" dirty="0"/>
+              <a:t> bayes models is normally pretty simple, everything is just sklearn standard. </a:t>
+            </a:r>
+          </a:p>
+          <a:p>
+            <a:r>
+              <a:rPr lang="en-US" dirty="0"/>
+              <a:t>There are a couple of specific (potential) things to be aware of:</a:t>
+            </a:r>
+          </a:p>
+          <a:p>
+            <a:pPr lvl="1"/>
+            <a:r>
+              <a:rPr lang="en-US" dirty="0"/>
+              <a:t>Bayes theoretically </a:t>
+            </a:r>
+            <a:r>
+              <a:rPr lang="en-US" b="1" dirty="0"/>
+              <a:t>doesn’t</a:t>
+            </a:r>
+            <a:r>
+              <a:rPr lang="en-US" dirty="0"/>
+              <a:t> require encoding of variables, implementations may. </a:t>
+            </a:r>
+          </a:p>
+          <a:p>
+            <a:pPr lvl="2"/>
+            <a:r>
+              <a:rPr lang="en-US" dirty="0"/>
+              <a:t>From docs: “It is further assumed that all categories of each feature are represented by the numbers 0, …, n - 1, where n refers to the total number of categories for the given feature. This can, for instance, be achieved with the help of </a:t>
+            </a:r>
+            <a:r>
+              <a:rPr lang="en-US" dirty="0" err="1"/>
+              <a:t>OrdinalEncoder</a:t>
+            </a:r>
+            <a:r>
+              <a:rPr lang="en-US" dirty="0"/>
+              <a:t>.”</a:t>
+            </a:r>
+          </a:p>
+          <a:p>
+            <a:pPr lvl="1"/>
+            <a:r>
+              <a:rPr lang="en-US" b="1" dirty="0"/>
+              <a:t>Bayes requires categorical features</a:t>
+            </a:r>
+            <a:r>
+              <a:rPr lang="en-US" dirty="0"/>
+              <a:t>, implementations may do something to automatically handle numeric features or may have some different variant. </a:t>
+            </a:r>
+          </a:p>
+          <a:p>
+            <a:pPr lvl="2"/>
+            <a:r>
+              <a:rPr lang="en-US" dirty="0"/>
+              <a:t>In sklearn there are several Bayes varieties for different applications – Gaussian for numerical. </a:t>
+            </a:r>
+          </a:p>
+          <a:p>
+            <a:r>
+              <a:rPr lang="en-US" dirty="0"/>
+              <a:t>Overall, this can be true in several places:</a:t>
+            </a:r>
+          </a:p>
+          <a:p>
+            <a:pPr lvl="1"/>
+            <a:r>
+              <a:rPr lang="en-US" dirty="0"/>
+              <a:t>ML libraries have a pretty standard way to use algorithms, for ease of use. </a:t>
+            </a:r>
+          </a:p>
+          <a:p>
+            <a:pPr lvl="1"/>
+            <a:r>
+              <a:rPr lang="en-US" dirty="0"/>
+              <a:t>The exact requirements of the theoretical algorithm change to match. </a:t>
+            </a:r>
           </a:p>
         </p:txBody>
       </p:sp>
     </p:spTree>
     <p:extLst>
       <p:ext uri="{BB962C8B-B14F-4D97-AF65-F5344CB8AC3E}">
-        <p14:creationId xmlns:p14="http://schemas.microsoft.com/office/powerpoint/2010/main" val="3093447189"/>
-      </p:ext>
-    </p:extLst>
-  </p:cSld>
-  <p:clrMapOvr>
-    <a:masterClrMapping/>
-  </p:clrMapOvr>
-</p:sld>
-</file>
-
-<file path=ppt/slides/slide3.xml><?xml version="1.0" encoding="utf-8"?>
-<p:sld xmlns:a="http://schemas.openxmlformats.org/drawingml/2006/main" xmlns:r="http://schemas.openxmlformats.org/officeDocument/2006/relationships" xmlns:p="http://schemas.openxmlformats.org/presentationml/2006/main">
-  <p:cSld>
-    <p:spTree>
-      <p:nvGrpSpPr>
-        <p:cNvPr id="1" name=""/>
-        <p:cNvGrpSpPr/>
-        <p:nvPr/>
-      </p:nvGrpSpPr>
-      <p:grpSpPr>
-        <a:xfrm>
-          <a:off x="0" y="0"/>
-          <a:ext cx="0" cy="0"/>
-          <a:chOff x="0" y="0"/>
-          <a:chExt cx="0" cy="0"/>
-        </a:xfrm>
-      </p:grpSpPr>
-      <p:sp>
-        <p:nvSpPr>
-          <p:cNvPr id="2" name="Title 1">
-            <a:extLst>
-              <a:ext uri="{FF2B5EF4-FFF2-40B4-BE49-F238E27FC236}">
-                <a16:creationId xmlns:a16="http://schemas.microsoft.com/office/drawing/2014/main" id="{02A7EEAC-B5F8-286E-45A6-8A0E3866A796}"/>
-              </a:ext>
-            </a:extLst>
-          </p:cNvPr>
-          <p:cNvSpPr>
-            <a:spLocks noGrp="1"/>
-          </p:cNvSpPr>
-          <p:nvPr>
-            <p:ph type="title"/>
-          </p:nvPr>
-        </p:nvSpPr>
-        <p:spPr/>
-        <p:txBody>
-          <a:bodyPr/>
-          <a:lstStyle/>
-          <a:p>
-            <a:r>
-              <a:rPr lang="en-US" dirty="0"/>
-              <a:t>What’s the Density… Really…?</a:t>
-            </a:r>
-          </a:p>
-        </p:txBody>
-      </p:sp>
-      <p:sp>
-        <p:nvSpPr>
-          <p:cNvPr id="3" name="Content Placeholder 2">
-            <a:extLst>
-              <a:ext uri="{FF2B5EF4-FFF2-40B4-BE49-F238E27FC236}">
-                <a16:creationId xmlns:a16="http://schemas.microsoft.com/office/drawing/2014/main" id="{1E013EB2-9902-4D0F-B459-E6FF4D1F5778}"/>
-              </a:ext>
-            </a:extLst>
-          </p:cNvPr>
-          <p:cNvSpPr>
-            <a:spLocks noGrp="1"/>
-          </p:cNvSpPr>
-          <p:nvPr>
-            <p:ph idx="1"/>
-          </p:nvPr>
-        </p:nvSpPr>
-        <p:spPr>
-          <a:xfrm>
-            <a:off x="5996940" y="1927860"/>
-            <a:ext cx="6195060" cy="4190326"/>
-          </a:xfrm>
-        </p:spPr>
-        <p:txBody>
-          <a:bodyPr/>
-          <a:lstStyle/>
-          <a:p>
-            <a:r>
-              <a:rPr lang="en-US" dirty="0"/>
-              <a:t>Density means the total area under curve is 1. </a:t>
-            </a:r>
-          </a:p>
-          <a:p>
-            <a:pPr lvl="1"/>
-            <a:r>
-              <a:rPr lang="en-US" dirty="0"/>
-              <a:t>If we have a continuous dataset, this works, but…</a:t>
-            </a:r>
-          </a:p>
-          <a:p>
-            <a:r>
-              <a:rPr lang="en-US" dirty="0"/>
-              <a:t>The area is the integral, not </a:t>
-            </a:r>
-            <a:r>
-              <a:rPr lang="en-US"/>
-              <a:t>a count. </a:t>
-            </a:r>
-            <a:endParaRPr lang="en-US" dirty="0"/>
-          </a:p>
-          <a:p>
-            <a:pPr lvl="1"/>
-            <a:r>
-              <a:rPr lang="en-US" dirty="0"/>
-              <a:t>Works over an area, not a point (like a bin w/ discreet).</a:t>
-            </a:r>
-          </a:p>
-          <a:p>
-            <a:pPr lvl="1"/>
-            <a:r>
-              <a:rPr lang="en-US" dirty="0"/>
-              <a:t>Sparse discreet data can make this weird. </a:t>
-            </a:r>
-          </a:p>
-          <a:p>
-            <a:pPr lvl="1"/>
-            <a:r>
-              <a:rPr lang="en-US" dirty="0"/>
-              <a:t>We don’t get a ‘rectangle’ we get stalagmites. </a:t>
-            </a:r>
-          </a:p>
-          <a:p>
-            <a:r>
-              <a:rPr lang="en-US" dirty="0"/>
-              <a:t>With discreet data there’s estimating going on. </a:t>
-            </a:r>
-          </a:p>
-          <a:p>
-            <a:pPr lvl="1"/>
-            <a:r>
-              <a:rPr lang="en-US" dirty="0"/>
-              <a:t>There is a smoothing parameter that can help.  </a:t>
-            </a:r>
-          </a:p>
-          <a:p>
-            <a:r>
-              <a:rPr lang="en-US" dirty="0"/>
-              <a:t>Fundamentally a mismatch data/visual tool. </a:t>
-            </a:r>
-          </a:p>
-        </p:txBody>
-      </p:sp>
-      <p:pic>
-        <p:nvPicPr>
-          <p:cNvPr id="4" name="Picture 3">
-            <a:extLst>
-              <a:ext uri="{FF2B5EF4-FFF2-40B4-BE49-F238E27FC236}">
-                <a16:creationId xmlns:a16="http://schemas.microsoft.com/office/drawing/2014/main" id="{31686271-D1FA-EAD9-4BA2-151754E5111B}"/>
-              </a:ext>
-            </a:extLst>
-          </p:cNvPr>
-          <p:cNvPicPr>
-            <a:picLocks noChangeAspect="1"/>
-          </p:cNvPicPr>
-          <p:nvPr/>
-        </p:nvPicPr>
-        <p:blipFill>
-          <a:blip r:embed="rId2"/>
-          <a:srcRect r="19608"/>
-          <a:stretch>
-            <a:fillRect/>
-          </a:stretch>
-        </p:blipFill>
-        <p:spPr>
-          <a:xfrm>
-            <a:off x="0" y="1927860"/>
-            <a:ext cx="6040066" cy="2148503"/>
-          </a:xfrm>
-          <a:prstGeom prst="rect">
-            <a:avLst/>
-          </a:prstGeom>
-        </p:spPr>
-      </p:pic>
-      <p:pic>
-        <p:nvPicPr>
-          <p:cNvPr id="4098" name="Picture 2" descr="Area under the Curve Formula">
-            <a:extLst>
-              <a:ext uri="{FF2B5EF4-FFF2-40B4-BE49-F238E27FC236}">
-                <a16:creationId xmlns:a16="http://schemas.microsoft.com/office/drawing/2014/main" id="{629798F0-9DFB-2B16-53B9-08F7AA504CF0}"/>
-              </a:ext>
-            </a:extLst>
-          </p:cNvPr>
-          <p:cNvPicPr>
-            <a:picLocks noChangeAspect="1" noChangeArrowheads="1"/>
-          </p:cNvPicPr>
-          <p:nvPr/>
-        </p:nvPicPr>
-        <p:blipFill>
-          <a:blip r:embed="rId3">
-            <a:extLst>
-              <a:ext uri="{28A0092B-C50C-407E-A947-70E740481C1C}">
-                <a14:useLocalDpi xmlns:a14="http://schemas.microsoft.com/office/drawing/2010/main" val="0"/>
-              </a:ext>
-            </a:extLst>
-          </a:blip>
-          <a:srcRect/>
-          <a:stretch>
-            <a:fillRect/>
-          </a:stretch>
-        </p:blipFill>
-        <p:spPr bwMode="auto">
-          <a:xfrm>
-            <a:off x="137160" y="4086186"/>
-            <a:ext cx="3524250" cy="2032000"/>
-          </a:xfrm>
-          <a:prstGeom prst="rect">
-            <a:avLst/>
-          </a:prstGeom>
-          <a:noFill/>
-          <a:extLst>
-            <a:ext uri="{909E8E84-426E-40DD-AFC4-6F175D3DCCD1}">
-              <a14:hiddenFill xmlns:a14="http://schemas.microsoft.com/office/drawing/2010/main">
-                <a:solidFill>
-                  <a:srgbClr val="FFFFFF"/>
-                </a:solidFill>
-              </a14:hiddenFill>
-            </a:ext>
-          </a:extLst>
-        </p:spPr>
-      </p:pic>
-      <p:pic>
-        <p:nvPicPr>
-          <p:cNvPr id="5" name="Picture 4">
-            <a:extLst>
-              <a:ext uri="{FF2B5EF4-FFF2-40B4-BE49-F238E27FC236}">
-                <a16:creationId xmlns:a16="http://schemas.microsoft.com/office/drawing/2014/main" id="{76DEACD2-979A-A564-465A-679079D0EAF9}"/>
-              </a:ext>
-            </a:extLst>
-          </p:cNvPr>
-          <p:cNvPicPr>
-            <a:picLocks noChangeAspect="1"/>
-          </p:cNvPicPr>
-          <p:nvPr/>
-        </p:nvPicPr>
-        <p:blipFill>
-          <a:blip r:embed="rId4"/>
-          <a:stretch>
-            <a:fillRect/>
-          </a:stretch>
-        </p:blipFill>
-        <p:spPr>
-          <a:xfrm>
-            <a:off x="3661410" y="4076362"/>
-            <a:ext cx="2378656" cy="2325797"/>
-          </a:xfrm>
-          <a:prstGeom prst="rect">
-            <a:avLst/>
-          </a:prstGeom>
-        </p:spPr>
-      </p:pic>
-    </p:spTree>
-    <p:extLst>
-      <p:ext uri="{BB962C8B-B14F-4D97-AF65-F5344CB8AC3E}">
-        <p14:creationId xmlns:p14="http://schemas.microsoft.com/office/powerpoint/2010/main" val="1118521392"/>
+        <p14:creationId xmlns:p14="http://schemas.microsoft.com/office/powerpoint/2010/main" val="2850732022"/>
       </p:ext>
     </p:extLst>
   </p:cSld>
@@ -6265,7 +9425,7 @@
           <p:cNvPr id="2" name="Title 1">
             <a:extLst>
               <a:ext uri="{FF2B5EF4-FFF2-40B4-BE49-F238E27FC236}">
-                <a16:creationId xmlns:a16="http://schemas.microsoft.com/office/drawing/2014/main" id="{61D2589B-47C1-266A-40AF-130E85189A6B}"/>
+                <a16:creationId xmlns:a16="http://schemas.microsoft.com/office/drawing/2014/main" id="{55666A1F-781F-8496-2FD7-3717E90AB8FE}"/>
               </a:ext>
             </a:extLst>
           </p:cNvPr>
@@ -6274,12 +9434,40 @@
           </p:cNvSpPr>
           <p:nvPr>
             <p:ph type="title"/>
+          </p:nvPr>
+        </p:nvSpPr>
+        <p:spPr/>
+        <p:txBody>
+          <a:bodyPr/>
+          <a:lstStyle/>
+          <a:p>
+            <a:r>
+              <a:rPr lang="en-US" dirty="0"/>
+              <a:t>Assignment</a:t>
+            </a:r>
+          </a:p>
+        </p:txBody>
+      </p:sp>
+      <p:sp>
+        <p:nvSpPr>
+          <p:cNvPr id="3" name="Content Placeholder 2">
+            <a:extLst>
+              <a:ext uri="{FF2B5EF4-FFF2-40B4-BE49-F238E27FC236}">
+                <a16:creationId xmlns:a16="http://schemas.microsoft.com/office/drawing/2014/main" id="{4486A5CB-317D-41F7-BDE0-DC1A1C9DA26E}"/>
+              </a:ext>
+            </a:extLst>
+          </p:cNvPr>
+          <p:cNvSpPr>
+            <a:spLocks noGrp="1"/>
+          </p:cNvSpPr>
+          <p:nvPr>
+            <p:ph idx="1"/>
           </p:nvPr>
         </p:nvSpPr>
         <p:spPr>
           <a:xfrm>
-            <a:off x="1451579" y="804519"/>
-            <a:ext cx="2968021" cy="1049235"/>
+            <a:off x="1451579" y="2015732"/>
+            <a:ext cx="9603275" cy="4037749"/>
           </a:xfrm>
         </p:spPr>
         <p:txBody>
@@ -6288,102 +9476,63 @@
           <a:p>
             <a:r>
               <a:rPr lang="en-US" dirty="0"/>
-              <a:t>Discreetness</a:t>
-            </a:r>
-          </a:p>
-        </p:txBody>
-      </p:sp>
-      <p:sp>
-        <p:nvSpPr>
-          <p:cNvPr id="3" name="Content Placeholder 2">
-            <a:extLst>
-              <a:ext uri="{FF2B5EF4-FFF2-40B4-BE49-F238E27FC236}">
-                <a16:creationId xmlns:a16="http://schemas.microsoft.com/office/drawing/2014/main" id="{A6B19449-E5C9-6B55-A0C0-F2C0EA6A2D57}"/>
-              </a:ext>
-            </a:extLst>
-          </p:cNvPr>
-          <p:cNvSpPr>
-            <a:spLocks noGrp="1"/>
-          </p:cNvSpPr>
-          <p:nvPr>
-            <p:ph idx="1"/>
-          </p:nvPr>
-        </p:nvSpPr>
-        <p:spPr>
-          <a:xfrm>
-            <a:off x="0" y="1853754"/>
-            <a:ext cx="6132884" cy="4199727"/>
-          </a:xfrm>
-        </p:spPr>
-        <p:txBody>
-          <a:bodyPr>
-            <a:normAutofit lnSpcReduction="10000"/>
-          </a:bodyPr>
-          <a:lstStyle/>
-          <a:p>
-            <a:r>
-              <a:rPr lang="en-US" dirty="0"/>
-              <a:t>With discreet data, those y values can be odd. </a:t>
-            </a:r>
-          </a:p>
-          <a:p>
-            <a:pPr lvl="1"/>
-            <a:r>
-              <a:rPr lang="en-US" dirty="0"/>
-              <a:t>’Area’ is not the most meaningful concept. </a:t>
-            </a:r>
-          </a:p>
-          <a:p>
-            <a:pPr lvl="1"/>
-            <a:r>
-              <a:rPr lang="en-US" dirty="0"/>
-              <a:t>Discreet data is ‘meant’ for a histogram. </a:t>
-            </a:r>
-          </a:p>
-          <a:p>
-            <a:r>
-              <a:rPr lang="en-US" dirty="0"/>
-              <a:t>Change to ‘probability’ to get something more readable. </a:t>
-            </a:r>
-          </a:p>
-          <a:p>
-            <a:pPr lvl="1"/>
-            <a:r>
-              <a:rPr lang="en-US" dirty="0"/>
-              <a:t>Height of bars sums to 1. </a:t>
-            </a:r>
-          </a:p>
-          <a:p>
-            <a:r>
-              <a:rPr lang="en-US" dirty="0"/>
-              <a:t>In practice this isn’t really an issue often.</a:t>
-            </a:r>
-          </a:p>
-          <a:p>
-            <a:pPr lvl="1"/>
-            <a:r>
-              <a:rPr lang="en-US" dirty="0"/>
-              <a:t>Only if you need to read Y value from KDE. </a:t>
-            </a:r>
-          </a:p>
-          <a:p>
-            <a:pPr lvl="1"/>
-            <a:r>
-              <a:rPr lang="en-US" dirty="0"/>
-              <a:t>Pattern, comparisons, etc.. Still work fine. </a:t>
-            </a:r>
-          </a:p>
-          <a:p>
-            <a:pPr lvl="1"/>
-            <a:r>
-              <a:rPr lang="en-US" b="1" dirty="0"/>
-              <a:t>Bigger and smoother data lessens impact. </a:t>
-            </a:r>
-          </a:p>
-          <a:p>
-            <a:r>
-              <a:rPr lang="en-US" dirty="0"/>
-              <a:t>Seaborn has a “visualizing distributions” page. </a:t>
+              <a:t>Overall, looked pretty good. Small notes only:</a:t>
+            </a:r>
+          </a:p>
+          <a:p>
+            <a:pPr lvl="1"/>
+            <a:r>
+              <a:rPr lang="en-US" dirty="0"/>
+              <a:t>I’m not sure a normal distribution for vote totals is best?</a:t>
+            </a:r>
+          </a:p>
+          <a:p>
+            <a:pPr lvl="2"/>
+            <a:r>
+              <a:rPr lang="en-US" dirty="0"/>
+              <a:t>Small sample, asserting vote totals are normal is an assertion (that may be correct). </a:t>
+            </a:r>
+          </a:p>
+          <a:p>
+            <a:pPr lvl="1"/>
+            <a:r>
+              <a:rPr lang="en-US" dirty="0"/>
+              <a:t>Can’t estimate purple/yellow independently – they sum to 1. </a:t>
+            </a:r>
+          </a:p>
+          <a:p>
+            <a:pPr lvl="2"/>
+            <a:r>
+              <a:rPr lang="en-US" dirty="0"/>
+              <a:t>Could get both at 52% in one simulation round. </a:t>
+            </a:r>
+          </a:p>
+          <a:p>
+            <a:pPr lvl="1"/>
+            <a:r>
+              <a:rPr lang="en-US" dirty="0"/>
+              <a:t>If you do something like </a:t>
+            </a:r>
+            <a:r>
+              <a:rPr lang="en-US" dirty="0" err="1"/>
+              <a:t>multicolinierity</a:t>
+            </a:r>
+            <a:r>
+              <a:rPr lang="en-US" dirty="0"/>
+              <a:t>, test the model after. </a:t>
+            </a:r>
+          </a:p>
+          <a:p>
+            <a:pPr lvl="1"/>
+            <a:r>
+              <a:rPr lang="en-US" dirty="0"/>
+              <a:t>Consider grids of images if you have many. (Is the fig, ax stuff familiar?) </a:t>
+            </a:r>
+          </a:p>
+          <a:p>
+            <a:r>
+              <a:rPr lang="en-US" dirty="0"/>
+              <a:t>I’ll finish the test stuff on Wednesday. </a:t>
             </a:r>
           </a:p>
         </p:txBody>
@@ -6393,7 +9542,7 @@
           <p:cNvPr id="4" name="Picture 3">
             <a:extLst>
               <a:ext uri="{FF2B5EF4-FFF2-40B4-BE49-F238E27FC236}">
-                <a16:creationId xmlns:a16="http://schemas.microsoft.com/office/drawing/2014/main" id="{B651E070-22D1-F4BF-7166-7DC567863255}"/>
+                <a16:creationId xmlns:a16="http://schemas.microsoft.com/office/drawing/2014/main" id="{09E68606-BAA9-57A1-08DA-24F4DED89D0F}"/>
               </a:ext>
             </a:extLst>
           </p:cNvPr>
@@ -6410,8 +9559,8 @@
         </p:blipFill>
         <p:spPr>
           <a:xfrm>
-            <a:off x="6132884" y="717579"/>
-            <a:ext cx="6059116" cy="4738341"/>
+            <a:off x="6243918" y="97267"/>
+            <a:ext cx="5948082" cy="1918465"/>
           </a:xfrm>
           <a:prstGeom prst="rect">
             <a:avLst/>
@@ -6421,7 +9570,633 @@
     </p:spTree>
     <p:extLst>
       <p:ext uri="{BB962C8B-B14F-4D97-AF65-F5344CB8AC3E}">
-        <p14:creationId xmlns:p14="http://schemas.microsoft.com/office/powerpoint/2010/main" val="2479989442"/>
+        <p14:creationId xmlns:p14="http://schemas.microsoft.com/office/powerpoint/2010/main" val="2694829649"/>
+      </p:ext>
+    </p:extLst>
+  </p:cSld>
+  <p:clrMapOvr>
+    <a:masterClrMapping/>
+  </p:clrMapOvr>
+</p:sld>
+</file>
+
+<file path=ppt/slides/slide40.xml><?xml version="1.0" encoding="utf-8"?>
+<p:sld xmlns:a="http://schemas.openxmlformats.org/drawingml/2006/main" xmlns:r="http://schemas.openxmlformats.org/officeDocument/2006/relationships" xmlns:p="http://schemas.openxmlformats.org/presentationml/2006/main">
+  <p:cSld>
+    <p:spTree>
+      <p:nvGrpSpPr>
+        <p:cNvPr id="1" name=""/>
+        <p:cNvGrpSpPr/>
+        <p:nvPr/>
+      </p:nvGrpSpPr>
+      <p:grpSpPr>
+        <a:xfrm>
+          <a:off x="0" y="0"/>
+          <a:ext cx="0" cy="0"/>
+          <a:chOff x="0" y="0"/>
+          <a:chExt cx="0" cy="0"/>
+        </a:xfrm>
+      </p:grpSpPr>
+      <p:sp>
+        <p:nvSpPr>
+          <p:cNvPr id="2" name="Title 1">
+            <a:extLst>
+              <a:ext uri="{FF2B5EF4-FFF2-40B4-BE49-F238E27FC236}">
+                <a16:creationId xmlns:a16="http://schemas.microsoft.com/office/drawing/2014/main" id="{6CC17B9A-26F0-8DE2-CC61-F8AF3EA571D9}"/>
+              </a:ext>
+            </a:extLst>
+          </p:cNvPr>
+          <p:cNvSpPr>
+            <a:spLocks noGrp="1"/>
+          </p:cNvSpPr>
+          <p:nvPr>
+            <p:ph type="title"/>
+          </p:nvPr>
+        </p:nvSpPr>
+        <p:spPr/>
+        <p:txBody>
+          <a:bodyPr/>
+          <a:lstStyle/>
+          <a:p>
+            <a:r>
+              <a:rPr lang="en-US" dirty="0"/>
+              <a:t>Real Life Bayes</a:t>
+            </a:r>
+          </a:p>
+        </p:txBody>
+      </p:sp>
+      <p:sp>
+        <p:nvSpPr>
+          <p:cNvPr id="3" name="Content Placeholder 2">
+            <a:extLst>
+              <a:ext uri="{FF2B5EF4-FFF2-40B4-BE49-F238E27FC236}">
+                <a16:creationId xmlns:a16="http://schemas.microsoft.com/office/drawing/2014/main" id="{6EF5DD75-66BE-9946-9CBF-EFF64298032A}"/>
+              </a:ext>
+            </a:extLst>
+          </p:cNvPr>
+          <p:cNvSpPr>
+            <a:spLocks noGrp="1"/>
+          </p:cNvSpPr>
+          <p:nvPr>
+            <p:ph idx="1"/>
+          </p:nvPr>
+        </p:nvSpPr>
+        <p:spPr>
+          <a:xfrm>
+            <a:off x="1451579" y="1853755"/>
+            <a:ext cx="9603275" cy="4199726"/>
+          </a:xfrm>
+        </p:spPr>
+        <p:txBody>
+          <a:bodyPr/>
+          <a:lstStyle/>
+          <a:p>
+            <a:r>
+              <a:rPr lang="en-US" dirty="0"/>
+              <a:t>Bayes models are used in several real-life places. </a:t>
+            </a:r>
+          </a:p>
+          <a:p>
+            <a:pPr lvl="1"/>
+            <a:r>
+              <a:rPr lang="en-US" dirty="0"/>
+              <a:t>Spam detection. </a:t>
+            </a:r>
+          </a:p>
+          <a:p>
+            <a:pPr lvl="1"/>
+            <a:r>
+              <a:rPr lang="en-US" dirty="0"/>
+              <a:t>Markov chain type of things. You don’t need details, but these are probabilistic things that depend only on previous states. </a:t>
+            </a:r>
+          </a:p>
+          <a:p>
+            <a:pPr lvl="1"/>
+            <a:r>
+              <a:rPr lang="en-US" dirty="0"/>
+              <a:t>Other probabilistic “state-needing” things. E.g. modelling one customer’s behavior, finance.</a:t>
+            </a:r>
+          </a:p>
+          <a:p>
+            <a:pPr lvl="1"/>
+            <a:r>
+              <a:rPr lang="en-US" dirty="0"/>
+              <a:t>Optimization – when doing other ML stuff, Bayes can help narrow down option choices.  </a:t>
+            </a:r>
+          </a:p>
+          <a:p>
+            <a:r>
+              <a:rPr lang="en-US" dirty="0"/>
+              <a:t>Bayes has tended to perform well on unstructured (non-tabular) problems (like spam). </a:t>
+            </a:r>
+          </a:p>
+          <a:p>
+            <a:pPr lvl="1"/>
+            <a:r>
+              <a:rPr lang="en-US" dirty="0"/>
+              <a:t>Bayes used to be best, but newer (</a:t>
+            </a:r>
+            <a:r>
+              <a:rPr lang="en-US" dirty="0" err="1"/>
+              <a:t>xgb</a:t>
+            </a:r>
+            <a:r>
+              <a:rPr lang="en-US" dirty="0"/>
+              <a:t>, neural networks) models can be good/better. </a:t>
+            </a:r>
+          </a:p>
+          <a:p>
+            <a:pPr lvl="1"/>
+            <a:r>
+              <a:rPr lang="en-US" dirty="0"/>
+              <a:t>For something like spam, fast processing of Bayes can really matter. (Est 130 billion </a:t>
+            </a:r>
+            <a:r>
+              <a:rPr lang="en-US" dirty="0" err="1"/>
+              <a:t>gmails</a:t>
+            </a:r>
+            <a:r>
+              <a:rPr lang="en-US" dirty="0"/>
+              <a:t>/day)</a:t>
+            </a:r>
+          </a:p>
+          <a:p>
+            <a:pPr lvl="1"/>
+            <a:r>
+              <a:rPr lang="en-US" dirty="0"/>
+              <a:t>The relationship of words in text and spam status probably isn’t linear…</a:t>
+            </a:r>
+          </a:p>
+        </p:txBody>
+      </p:sp>
+    </p:spTree>
+    <p:extLst>
+      <p:ext uri="{BB962C8B-B14F-4D97-AF65-F5344CB8AC3E}">
+        <p14:creationId xmlns:p14="http://schemas.microsoft.com/office/powerpoint/2010/main" val="2979603588"/>
+      </p:ext>
+    </p:extLst>
+  </p:cSld>
+  <p:clrMapOvr>
+    <a:masterClrMapping/>
+  </p:clrMapOvr>
+</p:sld>
+</file>
+
+<file path=ppt/slides/slide41.xml><?xml version="1.0" encoding="utf-8"?>
+<p:sld xmlns:a="http://schemas.openxmlformats.org/drawingml/2006/main" xmlns:r="http://schemas.openxmlformats.org/officeDocument/2006/relationships" xmlns:p="http://schemas.openxmlformats.org/presentationml/2006/main">
+  <p:cSld>
+    <p:spTree>
+      <p:nvGrpSpPr>
+        <p:cNvPr id="1" name=""/>
+        <p:cNvGrpSpPr/>
+        <p:nvPr/>
+      </p:nvGrpSpPr>
+      <p:grpSpPr>
+        <a:xfrm>
+          <a:off x="0" y="0"/>
+          <a:ext cx="0" cy="0"/>
+          <a:chOff x="0" y="0"/>
+          <a:chExt cx="0" cy="0"/>
+        </a:xfrm>
+      </p:grpSpPr>
+      <p:sp>
+        <p:nvSpPr>
+          <p:cNvPr id="2" name="Title 1">
+            <a:extLst>
+              <a:ext uri="{FF2B5EF4-FFF2-40B4-BE49-F238E27FC236}">
+                <a16:creationId xmlns:a16="http://schemas.microsoft.com/office/drawing/2014/main" id="{0AD813C7-2AD5-8445-A578-9756556E98FC}"/>
+              </a:ext>
+            </a:extLst>
+          </p:cNvPr>
+          <p:cNvSpPr>
+            <a:spLocks noGrp="1"/>
+          </p:cNvSpPr>
+          <p:nvPr>
+            <p:ph type="title"/>
+          </p:nvPr>
+        </p:nvSpPr>
+        <p:spPr/>
+        <p:txBody>
+          <a:bodyPr/>
+          <a:lstStyle/>
+          <a:p>
+            <a:r>
+              <a:rPr lang="en-US" dirty="0"/>
+              <a:t>Naïve Bayes Conclusion</a:t>
+            </a:r>
+          </a:p>
+        </p:txBody>
+      </p:sp>
+      <p:sp>
+        <p:nvSpPr>
+          <p:cNvPr id="3" name="Content Placeholder 2">
+            <a:extLst>
+              <a:ext uri="{FF2B5EF4-FFF2-40B4-BE49-F238E27FC236}">
+                <a16:creationId xmlns:a16="http://schemas.microsoft.com/office/drawing/2014/main" id="{AB982E42-0273-FB4E-B3D8-2E3564257E94}"/>
+              </a:ext>
+            </a:extLst>
+          </p:cNvPr>
+          <p:cNvSpPr>
+            <a:spLocks noGrp="1"/>
+          </p:cNvSpPr>
+          <p:nvPr>
+            <p:ph idx="1"/>
+          </p:nvPr>
+        </p:nvSpPr>
+        <p:spPr>
+          <a:xfrm>
+            <a:off x="1451579" y="1853754"/>
+            <a:ext cx="9603275" cy="4303206"/>
+          </a:xfrm>
+        </p:spPr>
+        <p:txBody>
+          <a:bodyPr>
+            <a:normAutofit fontScale="85000" lnSpcReduction="10000"/>
+          </a:bodyPr>
+          <a:lstStyle/>
+          <a:p>
+            <a:r>
+              <a:rPr lang="en-US" dirty="0"/>
+              <a:t>Bayes is one of the simpler classifiers that we can create. </a:t>
+            </a:r>
+          </a:p>
+          <a:p>
+            <a:pPr lvl="1"/>
+            <a:r>
+              <a:rPr lang="en-US" dirty="0"/>
+              <a:t>Bayes regression exists, but is not super common so we don’t worry about it. </a:t>
+            </a:r>
+          </a:p>
+          <a:p>
+            <a:r>
+              <a:rPr lang="en-US" dirty="0"/>
+              <a:t>Bayesian models have different logic than regression – no linear dependance, no residual. </a:t>
+            </a:r>
+          </a:p>
+          <a:p>
+            <a:pPr lvl="1"/>
+            <a:r>
+              <a:rPr lang="en-US" dirty="0"/>
+              <a:t>There is still a model (inputs-&gt;output), but how it works is totally different. </a:t>
+            </a:r>
+          </a:p>
+          <a:p>
+            <a:r>
+              <a:rPr lang="en-US" dirty="0"/>
+              <a:t>Strengths:</a:t>
+            </a:r>
+          </a:p>
+          <a:p>
+            <a:pPr lvl="1"/>
+            <a:r>
+              <a:rPr lang="en-US" dirty="0"/>
+              <a:t>It is fast, both making predictions and in training – probability calcs are quick. </a:t>
+            </a:r>
+          </a:p>
+          <a:p>
+            <a:pPr lvl="1"/>
+            <a:r>
+              <a:rPr lang="en-US" dirty="0"/>
+              <a:t>Often performs well on “unstructured” things, like email spam detection (more in NLP part). </a:t>
+            </a:r>
+          </a:p>
+          <a:p>
+            <a:r>
+              <a:rPr lang="en-US" dirty="0"/>
+              <a:t>Weaknesses:</a:t>
+            </a:r>
+          </a:p>
+          <a:p>
+            <a:pPr lvl="1"/>
+            <a:r>
+              <a:rPr lang="en-US" dirty="0"/>
+              <a:t>Handling mixed data (num and cat) can be very annoying. </a:t>
+            </a:r>
+          </a:p>
+          <a:p>
+            <a:pPr lvl="1"/>
+            <a:r>
+              <a:rPr lang="en-US" dirty="0"/>
+              <a:t>Independence of features isn’t perfect in most real-life scenarios*. </a:t>
+            </a:r>
+          </a:p>
+          <a:p>
+            <a:pPr lvl="1"/>
+            <a:r>
+              <a:rPr lang="en-US" dirty="0"/>
+              <a:t>Limited ability to make model better through tuning (next semester). </a:t>
+            </a:r>
+          </a:p>
+          <a:p>
+            <a:r>
+              <a:rPr lang="en-US" dirty="0"/>
+              <a:t>Bayes is good at specific tasks, but other models beat it in general. </a:t>
+            </a:r>
+          </a:p>
+        </p:txBody>
+      </p:sp>
+    </p:spTree>
+    <p:extLst>
+      <p:ext uri="{BB962C8B-B14F-4D97-AF65-F5344CB8AC3E}">
+        <p14:creationId xmlns:p14="http://schemas.microsoft.com/office/powerpoint/2010/main" val="3093447189"/>
+      </p:ext>
+    </p:extLst>
+  </p:cSld>
+  <p:clrMapOvr>
+    <a:masterClrMapping/>
+  </p:clrMapOvr>
+</p:sld>
+</file>
+
+<file path=ppt/slides/slide42.xml><?xml version="1.0" encoding="utf-8"?>
+<p:sld xmlns:a="http://schemas.openxmlformats.org/drawingml/2006/main" xmlns:r="http://schemas.openxmlformats.org/officeDocument/2006/relationships" xmlns:p="http://schemas.openxmlformats.org/presentationml/2006/main">
+  <p:cSld>
+    <p:spTree>
+      <p:nvGrpSpPr>
+        <p:cNvPr id="1" name=""/>
+        <p:cNvGrpSpPr/>
+        <p:nvPr/>
+      </p:nvGrpSpPr>
+      <p:grpSpPr>
+        <a:xfrm>
+          <a:off x="0" y="0"/>
+          <a:ext cx="0" cy="0"/>
+          <a:chOff x="0" y="0"/>
+          <a:chExt cx="0" cy="0"/>
+        </a:xfrm>
+      </p:grpSpPr>
+      <p:sp>
+        <p:nvSpPr>
+          <p:cNvPr id="2" name="Title 1">
+            <a:extLst>
+              <a:ext uri="{FF2B5EF4-FFF2-40B4-BE49-F238E27FC236}">
+                <a16:creationId xmlns:a16="http://schemas.microsoft.com/office/drawing/2014/main" id="{1B344066-0542-F810-8C3E-2334F8C40458}"/>
+              </a:ext>
+            </a:extLst>
+          </p:cNvPr>
+          <p:cNvSpPr>
+            <a:spLocks noGrp="1"/>
+          </p:cNvSpPr>
+          <p:nvPr>
+            <p:ph type="title"/>
+          </p:nvPr>
+        </p:nvSpPr>
+        <p:spPr/>
+        <p:txBody>
+          <a:bodyPr/>
+          <a:lstStyle/>
+          <a:p>
+            <a:r>
+              <a:rPr lang="en-US" dirty="0"/>
+              <a:t>Build-A-Bayes</a:t>
+            </a:r>
+          </a:p>
+        </p:txBody>
+      </p:sp>
+      <p:sp>
+        <p:nvSpPr>
+          <p:cNvPr id="3" name="Content Placeholder 2">
+            <a:extLst>
+              <a:ext uri="{FF2B5EF4-FFF2-40B4-BE49-F238E27FC236}">
+                <a16:creationId xmlns:a16="http://schemas.microsoft.com/office/drawing/2014/main" id="{87E3821B-3F71-E693-8F9F-1253EB48983E}"/>
+              </a:ext>
+            </a:extLst>
+          </p:cNvPr>
+          <p:cNvSpPr>
+            <a:spLocks noGrp="1"/>
+          </p:cNvSpPr>
+          <p:nvPr>
+            <p:ph idx="1"/>
+          </p:nvPr>
+        </p:nvSpPr>
+        <p:spPr/>
+        <p:txBody>
+          <a:bodyPr/>
+          <a:lstStyle/>
+          <a:p>
+            <a:r>
+              <a:rPr lang="en-US" dirty="0"/>
+              <a:t>In workbook 032 we have an example of a Bayes model, made by hand. </a:t>
+            </a:r>
+          </a:p>
+          <a:p>
+            <a:r>
+              <a:rPr lang="en-US" dirty="0"/>
+              <a:t>We don’t need to do this by hand, but can we read through and follow…</a:t>
+            </a:r>
+          </a:p>
+          <a:p>
+            <a:r>
+              <a:rPr lang="en-US" dirty="0"/>
+              <a:t>This is generally a decent self-check. </a:t>
+            </a:r>
+          </a:p>
+          <a:p>
+            <a:pPr lvl="1"/>
+            <a:r>
+              <a:rPr lang="en-US" dirty="0"/>
+              <a:t>We know what the model does – calculate probs, likelihoods, combine them, </a:t>
+            </a:r>
+            <a:r>
+              <a:rPr lang="en-US" dirty="0" err="1"/>
+              <a:t>etc</a:t>
+            </a:r>
+            <a:r>
+              <a:rPr lang="en-US" dirty="0"/>
+              <a:t>…</a:t>
+            </a:r>
+          </a:p>
+          <a:p>
+            <a:pPr lvl="1"/>
+            <a:r>
+              <a:rPr lang="en-US" dirty="0"/>
+              <a:t>We can use a simple example and track it through the algorithm. </a:t>
+            </a:r>
+          </a:p>
+        </p:txBody>
+      </p:sp>
+    </p:spTree>
+    <p:extLst>
+      <p:ext uri="{BB962C8B-B14F-4D97-AF65-F5344CB8AC3E}">
+        <p14:creationId xmlns:p14="http://schemas.microsoft.com/office/powerpoint/2010/main" val="2375008139"/>
+      </p:ext>
+    </p:extLst>
+  </p:cSld>
+  <p:clrMapOvr>
+    <a:masterClrMapping/>
+  </p:clrMapOvr>
+</p:sld>
+</file>
+
+<file path=ppt/slides/slide43.xml><?xml version="1.0" encoding="utf-8"?>
+<p:sld xmlns:a="http://schemas.openxmlformats.org/drawingml/2006/main" xmlns:r="http://schemas.openxmlformats.org/officeDocument/2006/relationships" xmlns:p="http://schemas.openxmlformats.org/presentationml/2006/main">
+  <p:cSld>
+    <p:spTree>
+      <p:nvGrpSpPr>
+        <p:cNvPr id="1" name=""/>
+        <p:cNvGrpSpPr/>
+        <p:nvPr/>
+      </p:nvGrpSpPr>
+      <p:grpSpPr>
+        <a:xfrm>
+          <a:off x="0" y="0"/>
+          <a:ext cx="0" cy="0"/>
+          <a:chOff x="0" y="0"/>
+          <a:chExt cx="0" cy="0"/>
+        </a:xfrm>
+      </p:grpSpPr>
+      <p:sp>
+        <p:nvSpPr>
+          <p:cNvPr id="2" name="Title 1">
+            <a:extLst>
+              <a:ext uri="{FF2B5EF4-FFF2-40B4-BE49-F238E27FC236}">
+                <a16:creationId xmlns:a16="http://schemas.microsoft.com/office/drawing/2014/main" id="{C0EE6A90-CF72-AE42-9444-D85AFF64323D}"/>
+              </a:ext>
+            </a:extLst>
+          </p:cNvPr>
+          <p:cNvSpPr>
+            <a:spLocks noGrp="1"/>
+          </p:cNvSpPr>
+          <p:nvPr>
+            <p:ph type="title"/>
+          </p:nvPr>
+        </p:nvSpPr>
+        <p:spPr/>
+        <p:txBody>
+          <a:bodyPr/>
+          <a:lstStyle/>
+          <a:p>
+            <a:r>
+              <a:rPr lang="en-US" dirty="0"/>
+              <a:t>For the Future…</a:t>
+            </a:r>
+          </a:p>
+        </p:txBody>
+      </p:sp>
+      <p:sp>
+        <p:nvSpPr>
+          <p:cNvPr id="3" name="Content Placeholder 2">
+            <a:extLst>
+              <a:ext uri="{FF2B5EF4-FFF2-40B4-BE49-F238E27FC236}">
+                <a16:creationId xmlns:a16="http://schemas.microsoft.com/office/drawing/2014/main" id="{402EC263-2439-2E32-F015-F3A0303EA9B7}"/>
+              </a:ext>
+            </a:extLst>
+          </p:cNvPr>
+          <p:cNvSpPr>
+            <a:spLocks noGrp="1"/>
+          </p:cNvSpPr>
+          <p:nvPr>
+            <p:ph idx="1"/>
+          </p:nvPr>
+        </p:nvSpPr>
+        <p:spPr>
+          <a:xfrm>
+            <a:off x="1451579" y="1853755"/>
+            <a:ext cx="9603275" cy="4199726"/>
+          </a:xfrm>
+        </p:spPr>
+        <p:txBody>
+          <a:bodyPr>
+            <a:normAutofit lnSpcReduction="10000"/>
+          </a:bodyPr>
+          <a:lstStyle/>
+          <a:p>
+            <a:r>
+              <a:rPr lang="en-US" dirty="0"/>
+              <a:t>In January we’ll start roughly where we left of here. </a:t>
+            </a:r>
+          </a:p>
+          <a:p>
+            <a:pPr lvl="1"/>
+            <a:r>
+              <a:rPr lang="en-US" dirty="0"/>
+              <a:t>Use a different model type, evaluate models better, more data prep (pipeline). </a:t>
+            </a:r>
+          </a:p>
+          <a:p>
+            <a:r>
+              <a:rPr lang="en-US" dirty="0"/>
+              <a:t>Things that are really important:</a:t>
+            </a:r>
+          </a:p>
+          <a:p>
+            <a:pPr lvl="1"/>
+            <a:r>
+              <a:rPr lang="en-US" dirty="0"/>
+              <a:t>Code – similar to what we’re doing now, but we’ll have more functions/classes/complexity. </a:t>
+            </a:r>
+          </a:p>
+          <a:p>
+            <a:pPr lvl="1"/>
+            <a:r>
+              <a:rPr lang="en-US" dirty="0"/>
+              <a:t>Data – manipulating 2D data in assorted ways. </a:t>
+            </a:r>
+          </a:p>
+          <a:p>
+            <a:pPr lvl="1"/>
+            <a:r>
+              <a:rPr lang="en-US" dirty="0"/>
+              <a:t>Sklearn – most things use the sklearn libraries, get used to code and docs. </a:t>
+            </a:r>
+          </a:p>
+          <a:p>
+            <a:pPr lvl="1"/>
+            <a:r>
+              <a:rPr lang="en-US" dirty="0"/>
+              <a:t>Basic stats (understand idea and relate to data) – distribution, </a:t>
+            </a:r>
+            <a:r>
+              <a:rPr lang="en-US" b="1" dirty="0"/>
+              <a:t>variance, correlation</a:t>
+            </a:r>
+            <a:r>
+              <a:rPr lang="en-US" dirty="0"/>
+              <a:t>, </a:t>
+            </a:r>
+            <a:r>
+              <a:rPr lang="en-US" dirty="0" err="1"/>
+              <a:t>etc</a:t>
+            </a:r>
+            <a:r>
+              <a:rPr lang="en-US" dirty="0"/>
+              <a:t>…</a:t>
+            </a:r>
+          </a:p>
+          <a:p>
+            <a:pPr lvl="1"/>
+            <a:r>
+              <a:rPr lang="en-US" dirty="0"/>
+              <a:t>Idea of gradient descent, weights/parameters being modified, iterative solutions. </a:t>
+            </a:r>
+          </a:p>
+          <a:p>
+            <a:pPr lvl="1"/>
+            <a:r>
+              <a:rPr lang="en-US" dirty="0"/>
+              <a:t>Errors – theory and usage, for classification and numeric values. </a:t>
+            </a:r>
+          </a:p>
+          <a:p>
+            <a:pPr lvl="1"/>
+            <a:r>
+              <a:rPr lang="en-US" dirty="0"/>
+              <a:t>Probability, odds, conditional probability. </a:t>
+            </a:r>
+          </a:p>
+          <a:p>
+            <a:pPr lvl="1"/>
+            <a:r>
+              <a:rPr lang="en-US" dirty="0"/>
+              <a:t>Inference/generalization – we have some data, how can we estimate more/all. </a:t>
+            </a:r>
+          </a:p>
+        </p:txBody>
+      </p:sp>
+    </p:spTree>
+    <p:extLst>
+      <p:ext uri="{BB962C8B-B14F-4D97-AF65-F5344CB8AC3E}">
+        <p14:creationId xmlns:p14="http://schemas.microsoft.com/office/powerpoint/2010/main" val="3086893738"/>
       </p:ext>
     </p:extLst>
   </p:cSld>
@@ -6453,7 +10228,7 @@
           <p:cNvPr id="2" name="Title 1">
             <a:extLst>
               <a:ext uri="{FF2B5EF4-FFF2-40B4-BE49-F238E27FC236}">
-                <a16:creationId xmlns:a16="http://schemas.microsoft.com/office/drawing/2014/main" id="{BBC16C9E-B79D-AB5E-8508-79F50D9B320E}"/>
+                <a16:creationId xmlns:a16="http://schemas.microsoft.com/office/drawing/2014/main" id="{1F655A7C-BF3C-8F48-1993-82F820A4DC83}"/>
               </a:ext>
             </a:extLst>
           </p:cNvPr>
@@ -6464,20 +10239,12 @@
             <p:ph type="title"/>
           </p:nvPr>
         </p:nvSpPr>
-        <p:spPr>
-          <a:xfrm>
-            <a:off x="1451579" y="804519"/>
-            <a:ext cx="6252241" cy="1049235"/>
-          </a:xfrm>
-        </p:spPr>
-        <p:txBody>
-          <a:bodyPr/>
-          <a:lstStyle/>
-          <a:p>
-            <a:r>
-              <a:rPr lang="en-US" dirty="0"/>
-              <a:t>Review - Gradient Descent and Logistic Regression</a:t>
-            </a:r>
+        <p:spPr/>
+        <p:txBody>
+          <a:bodyPr/>
+          <a:lstStyle/>
+          <a:p>
+            <a:endParaRPr lang="en-US"/>
           </a:p>
         </p:txBody>
       </p:sp>
@@ -6486,7 +10253,7 @@
           <p:cNvPr id="3" name="Content Placeholder 2">
             <a:extLst>
               <a:ext uri="{FF2B5EF4-FFF2-40B4-BE49-F238E27FC236}">
-                <a16:creationId xmlns:a16="http://schemas.microsoft.com/office/drawing/2014/main" id="{51E3EC63-4186-A738-8B18-E965F1B9E3E7}"/>
+                <a16:creationId xmlns:a16="http://schemas.microsoft.com/office/drawing/2014/main" id="{7C23BD2D-DBC2-5404-B319-FAE928CA454D}"/>
               </a:ext>
             </a:extLst>
           </p:cNvPr>
@@ -6497,191 +10264,19 @@
             <p:ph idx="1"/>
           </p:nvPr>
         </p:nvSpPr>
-        <p:spPr>
-          <a:xfrm>
-            <a:off x="327660" y="2015732"/>
-            <a:ext cx="10727195" cy="3981208"/>
-          </a:xfrm>
-        </p:spPr>
-        <p:txBody>
-          <a:bodyPr/>
-          <a:lstStyle/>
-          <a:p>
-            <a:r>
-              <a:rPr lang="en-US" dirty="0"/>
-              <a:t>Last week we looked at classification using logistic regression. </a:t>
-            </a:r>
-          </a:p>
-          <a:p>
-            <a:pPr lvl="1"/>
-            <a:r>
-              <a:rPr lang="en-US" dirty="0"/>
-              <a:t>Instead of predicting a value we predict T/F, a class membership. </a:t>
-            </a:r>
-          </a:p>
-          <a:p>
-            <a:r>
-              <a:rPr lang="en-US" dirty="0"/>
-              <a:t>Still a linear calculation, but the details differ – need to predict probability not value. </a:t>
-            </a:r>
-          </a:p>
-          <a:p>
-            <a:pPr lvl="1"/>
-            <a:r>
-              <a:rPr lang="en-US" dirty="0"/>
-              <a:t>Uses a regression to the logit to get (something convertible to) probabilities. </a:t>
-            </a:r>
-          </a:p>
-          <a:p>
-            <a:pPr lvl="1"/>
-            <a:r>
-              <a:rPr lang="en-US" dirty="0"/>
-              <a:t>Sigmoid calculation converts any logit to a probability. </a:t>
-            </a:r>
-          </a:p>
-          <a:p>
-            <a:r>
-              <a:rPr lang="en-US" dirty="0"/>
-              <a:t>The slope and intercepts can’t be calculated directly here like with LLS. </a:t>
-            </a:r>
-          </a:p>
-          <a:p>
-            <a:pPr lvl="1"/>
-            <a:r>
-              <a:rPr lang="en-US" dirty="0"/>
-              <a:t>Need an alternative way to find best </a:t>
-            </a:r>
-            <a:r>
-              <a:rPr lang="en-US" dirty="0" err="1"/>
-              <a:t>coef</a:t>
-            </a:r>
-            <a:r>
-              <a:rPr lang="en-US" dirty="0"/>
-              <a:t> – gradient descent. </a:t>
-            </a:r>
-          </a:p>
-          <a:p>
-            <a:pPr lvl="1"/>
-            <a:r>
-              <a:rPr lang="en-US" dirty="0"/>
-              <a:t>Guess some coefficients, calculate cost, adjust </a:t>
-            </a:r>
-            <a:r>
-              <a:rPr lang="en-US" dirty="0" err="1"/>
-              <a:t>coef</a:t>
-            </a:r>
-            <a:r>
-              <a:rPr lang="en-US" dirty="0"/>
-              <a:t> (using gradient), repeat until done. </a:t>
-            </a:r>
-          </a:p>
-          <a:p>
-            <a:pPr lvl="1"/>
-            <a:r>
-              <a:rPr lang="en-US" dirty="0"/>
-              <a:t>This process is very common, coefficients can rarely be directly calculated. </a:t>
-            </a:r>
-          </a:p>
-        </p:txBody>
-      </p:sp>
-      <p:pic>
-        <p:nvPicPr>
-          <p:cNvPr id="3074" name="Picture 2" descr="A Beginners Guide to Gradient Descent Algorithm for Data Scientists!">
-            <a:extLst>
-              <a:ext uri="{FF2B5EF4-FFF2-40B4-BE49-F238E27FC236}">
-                <a16:creationId xmlns:a16="http://schemas.microsoft.com/office/drawing/2014/main" id="{D781402D-BF2D-6CDB-E1B2-1503F49C18B0}"/>
-              </a:ext>
-            </a:extLst>
-          </p:cNvPr>
-          <p:cNvPicPr>
-            <a:picLocks noChangeAspect="1" noChangeArrowheads="1"/>
-          </p:cNvPicPr>
-          <p:nvPr/>
-        </p:nvPicPr>
-        <p:blipFill>
-          <a:blip r:embed="rId2">
-            <a:extLst>
-              <a:ext uri="{28A0092B-C50C-407E-A947-70E740481C1C}">
-                <a14:useLocalDpi xmlns:a14="http://schemas.microsoft.com/office/drawing/2010/main" val="0"/>
-              </a:ext>
-            </a:extLst>
-          </a:blip>
-          <a:srcRect/>
-          <a:stretch>
-            <a:fillRect/>
-          </a:stretch>
-        </p:blipFill>
-        <p:spPr bwMode="auto">
-          <a:xfrm>
-            <a:off x="7746351" y="132098"/>
-            <a:ext cx="4445649" cy="2771121"/>
-          </a:xfrm>
-          <a:prstGeom prst="rect">
-            <a:avLst/>
-          </a:prstGeom>
-          <a:noFill/>
-          <a:extLst>
-            <a:ext uri="{909E8E84-426E-40DD-AFC4-6F175D3DCCD1}">
-              <a14:hiddenFill xmlns:a14="http://schemas.microsoft.com/office/drawing/2010/main">
-                <a:solidFill>
-                  <a:srgbClr val="FFFFFF"/>
-                </a:solidFill>
-              </a14:hiddenFill>
-            </a:ext>
-          </a:extLst>
-        </p:spPr>
-      </p:pic>
-      <p:pic>
-        <p:nvPicPr>
-          <p:cNvPr id="3076" name="Picture 4" descr="Logistic Regression">
-            <a:extLst>
-              <a:ext uri="{FF2B5EF4-FFF2-40B4-BE49-F238E27FC236}">
-                <a16:creationId xmlns:a16="http://schemas.microsoft.com/office/drawing/2014/main" id="{2AA27453-B847-AD5C-4877-5ED568E5E049}"/>
-              </a:ext>
-            </a:extLst>
-          </p:cNvPr>
-          <p:cNvPicPr>
-            <a:picLocks noChangeAspect="1" noChangeArrowheads="1"/>
-          </p:cNvPicPr>
-          <p:nvPr/>
-        </p:nvPicPr>
-        <p:blipFill>
-          <a:blip r:embed="rId3">
-            <a:extLst>
-              <a:ext uri="{28A0092B-C50C-407E-A947-70E740481C1C}">
-                <a14:useLocalDpi xmlns:a14="http://schemas.microsoft.com/office/drawing/2010/main" val="0"/>
-              </a:ext>
-            </a:extLst>
-          </a:blip>
-          <a:srcRect/>
-          <a:stretch>
-            <a:fillRect/>
-          </a:stretch>
-        </p:blipFill>
-        <p:spPr bwMode="auto">
-          <a:xfrm>
-            <a:off x="9311640" y="3063239"/>
-            <a:ext cx="2880361" cy="3040381"/>
-          </a:xfrm>
-          <a:prstGeom prst="rect">
-            <a:avLst/>
-          </a:prstGeom>
-          <a:noFill/>
-          <a:extLst>
-            <a:ext uri="{909E8E84-426E-40DD-AFC4-6F175D3DCCD1}">
-              <a14:hiddenFill xmlns:a14="http://schemas.microsoft.com/office/drawing/2010/main">
-                <a:solidFill>
-                  <a:srgbClr val="FFFFFF"/>
-                </a:solidFill>
-              </a14:hiddenFill>
-            </a:ext>
-          </a:extLst>
-        </p:spPr>
-      </p:pic>
+        <p:spPr/>
+        <p:txBody>
+          <a:bodyPr/>
+          <a:lstStyle/>
+          <a:p>
+            <a:endParaRPr lang="en-US"/>
+          </a:p>
+        </p:txBody>
+      </p:sp>
     </p:spTree>
     <p:extLst>
       <p:ext uri="{BB962C8B-B14F-4D97-AF65-F5344CB8AC3E}">
-        <p14:creationId xmlns:p14="http://schemas.microsoft.com/office/powerpoint/2010/main" val="1557148674"/>
+        <p14:creationId xmlns:p14="http://schemas.microsoft.com/office/powerpoint/2010/main" val="3913882891"/>
       </p:ext>
     </p:extLst>
   </p:cSld>
@@ -6713,7 +10308,7 @@
           <p:cNvPr id="2" name="Title 1">
             <a:extLst>
               <a:ext uri="{FF2B5EF4-FFF2-40B4-BE49-F238E27FC236}">
-                <a16:creationId xmlns:a16="http://schemas.microsoft.com/office/drawing/2014/main" id="{DBADC23E-81B1-D949-ED13-5AA32B801B31}"/>
+                <a16:creationId xmlns:a16="http://schemas.microsoft.com/office/drawing/2014/main" id="{7236C963-1CCC-2FD2-063D-47F843A5484B}"/>
               </a:ext>
             </a:extLst>
           </p:cNvPr>
@@ -6724,20 +10319,12 @@
             <p:ph type="title"/>
           </p:nvPr>
         </p:nvSpPr>
-        <p:spPr>
-          <a:xfrm>
-            <a:off x="1451579" y="1"/>
-            <a:ext cx="9603275" cy="708659"/>
-          </a:xfrm>
-        </p:spPr>
-        <p:txBody>
-          <a:bodyPr/>
-          <a:lstStyle/>
-          <a:p>
-            <a:r>
-              <a:rPr lang="en-US" dirty="0"/>
-              <a:t>At bottom of Logistic Regression Code</a:t>
-            </a:r>
+        <p:spPr/>
+        <p:txBody>
+          <a:bodyPr/>
+          <a:lstStyle/>
+          <a:p>
+            <a:endParaRPr lang="en-US"/>
           </a:p>
         </p:txBody>
       </p:sp>
@@ -6746,7 +10333,7 @@
           <p:cNvPr id="3" name="Content Placeholder 2">
             <a:extLst>
               <a:ext uri="{FF2B5EF4-FFF2-40B4-BE49-F238E27FC236}">
-                <a16:creationId xmlns:a16="http://schemas.microsoft.com/office/drawing/2014/main" id="{05452937-88E5-8960-688A-42135C3CB740}"/>
+                <a16:creationId xmlns:a16="http://schemas.microsoft.com/office/drawing/2014/main" id="{679AF768-8DBC-9233-CF2E-D7FE75AD8F81}"/>
               </a:ext>
             </a:extLst>
           </p:cNvPr>
@@ -6768,38 +10355,55 @@
       </p:sp>
       <p:pic>
         <p:nvPicPr>
-          <p:cNvPr id="6" name="Picture 5">
+          <p:cNvPr id="3076" name="Picture 4">
             <a:extLst>
               <a:ext uri="{FF2B5EF4-FFF2-40B4-BE49-F238E27FC236}">
-                <a16:creationId xmlns:a16="http://schemas.microsoft.com/office/drawing/2014/main" id="{4B3016EB-70FA-7AC3-CA72-EF73322A694F}"/>
+                <a16:creationId xmlns:a16="http://schemas.microsoft.com/office/drawing/2014/main" id="{A826F514-F114-7785-0FEB-E2D88757920D}"/>
               </a:ext>
             </a:extLst>
           </p:cNvPr>
           <p:cNvPicPr>
-            <a:picLocks noChangeAspect="1"/>
+            <a:picLocks noChangeAspect="1" noChangeArrowheads="1"/>
           </p:cNvPicPr>
           <p:nvPr/>
         </p:nvPicPr>
         <p:blipFill>
-          <a:blip r:embed="rId2"/>
+          <a:blip r:embed="rId2">
+            <a:extLst>
+              <a:ext uri="{28A0092B-C50C-407E-A947-70E740481C1C}">
+                <a14:useLocalDpi xmlns:a14="http://schemas.microsoft.com/office/drawing/2010/main" val="0"/>
+              </a:ext>
+            </a:extLst>
+          </a:blip>
+          <a:srcRect/>
           <a:stretch>
             <a:fillRect/>
           </a:stretch>
         </p:blipFill>
-        <p:spPr>
+        <p:spPr bwMode="auto">
           <a:xfrm>
-            <a:off x="0" y="605590"/>
-            <a:ext cx="12183342" cy="5642810"/>
+            <a:off x="1100138" y="0"/>
+            <a:ext cx="9991725" cy="6858000"/>
           </a:xfrm>
           <a:prstGeom prst="rect">
             <a:avLst/>
           </a:prstGeom>
+          <a:noFill/>
+          <a:extLst>
+            <a:ext uri="{909E8E84-426E-40DD-AFC4-6F175D3DCCD1}">
+              <a14:hiddenFill xmlns:a14="http://schemas.microsoft.com/office/drawing/2010/main">
+                <a:solidFill>
+                  <a:srgbClr val="FFFFFF"/>
+                </a:solidFill>
+              </a14:hiddenFill>
+            </a:ext>
+          </a:extLst>
         </p:spPr>
       </p:pic>
     </p:spTree>
     <p:extLst>
       <p:ext uri="{BB962C8B-B14F-4D97-AF65-F5344CB8AC3E}">
-        <p14:creationId xmlns:p14="http://schemas.microsoft.com/office/powerpoint/2010/main" val="3758841877"/>
+        <p14:creationId xmlns:p14="http://schemas.microsoft.com/office/powerpoint/2010/main" val="2437072657"/>
       </p:ext>
     </p:extLst>
   </p:cSld>
@@ -6831,7 +10435,7 @@
           <p:cNvPr id="2" name="Title 1">
             <a:extLst>
               <a:ext uri="{FF2B5EF4-FFF2-40B4-BE49-F238E27FC236}">
-                <a16:creationId xmlns:a16="http://schemas.microsoft.com/office/drawing/2014/main" id="{B3895D26-77CB-5048-8DE4-A9B849C711E7}"/>
+                <a16:creationId xmlns:a16="http://schemas.microsoft.com/office/drawing/2014/main" id="{47FD83E2-1BFA-E18A-D829-9272305B3397}"/>
               </a:ext>
             </a:extLst>
           </p:cNvPr>
@@ -6839,7 +10443,7 @@
             <a:spLocks noGrp="1"/>
           </p:cNvSpPr>
           <p:nvPr>
-            <p:ph type="ctrTitle"/>
+            <p:ph type="title"/>
           </p:nvPr>
         </p:nvSpPr>
         <p:spPr/>
@@ -6847,19 +10451,16 @@
           <a:bodyPr/>
           <a:lstStyle/>
           <a:p>
-            <a:r>
-              <a:rPr lang="en-US" dirty="0"/>
-              <a:t>Naïve Bayes</a:t>
-            </a:r>
-          </a:p>
-        </p:txBody>
-      </p:sp>
-      <p:sp>
-        <p:nvSpPr>
-          <p:cNvPr id="3" name="Subtitle 2">
+            <a:endParaRPr lang="en-US"/>
+          </a:p>
+        </p:txBody>
+      </p:sp>
+      <p:sp>
+        <p:nvSpPr>
+          <p:cNvPr id="3" name="Content Placeholder 2">
             <a:extLst>
               <a:ext uri="{FF2B5EF4-FFF2-40B4-BE49-F238E27FC236}">
-                <a16:creationId xmlns:a16="http://schemas.microsoft.com/office/drawing/2014/main" id="{A780B032-B292-674D-855C-81EE4ADE6150}"/>
+                <a16:creationId xmlns:a16="http://schemas.microsoft.com/office/drawing/2014/main" id="{F1BBE550-27DC-F43E-8A4A-DD3D7A2B630C}"/>
               </a:ext>
             </a:extLst>
           </p:cNvPr>
@@ -6867,7 +10468,7 @@
             <a:spLocks noGrp="1"/>
           </p:cNvSpPr>
           <p:nvPr>
-            <p:ph type="subTitle" idx="1"/>
+            <p:ph idx="1"/>
           </p:nvPr>
         </p:nvSpPr>
         <p:spPr/>
@@ -6879,10 +10480,57 @@
           </a:p>
         </p:txBody>
       </p:sp>
+      <p:pic>
+        <p:nvPicPr>
+          <p:cNvPr id="6146" name="Picture 2" descr="The Monty Hall Problem: A Simple Visual Explanation">
+            <a:extLst>
+              <a:ext uri="{FF2B5EF4-FFF2-40B4-BE49-F238E27FC236}">
+                <a16:creationId xmlns:a16="http://schemas.microsoft.com/office/drawing/2014/main" id="{23F2205C-FED7-80DB-DAFE-647D3AE86914}"/>
+              </a:ext>
+            </a:extLst>
+          </p:cNvPr>
+          <p:cNvPicPr>
+            <a:picLocks noChangeAspect="1" noChangeArrowheads="1"/>
+          </p:cNvPicPr>
+          <p:nvPr/>
+        </p:nvPicPr>
+        <p:blipFill>
+          <a:blip r:embed="rId2">
+            <a:extLst>
+              <a:ext uri="{28A0092B-C50C-407E-A947-70E740481C1C}">
+                <a14:useLocalDpi xmlns:a14="http://schemas.microsoft.com/office/drawing/2010/main" val="0"/>
+              </a:ext>
+            </a:extLst>
+          </a:blip>
+          <a:srcRect/>
+          <a:stretch>
+            <a:fillRect/>
+          </a:stretch>
+        </p:blipFill>
+        <p:spPr bwMode="auto">
+          <a:xfrm>
+            <a:off x="1808163" y="0"/>
+            <a:ext cx="8574087" cy="6858000"/>
+          </a:xfrm>
+          <a:prstGeom prst="rect">
+            <a:avLst/>
+          </a:prstGeom>
+          <a:noFill/>
+          <a:extLst>
+            <a:ext uri="{909E8E84-426E-40DD-AFC4-6F175D3DCCD1}">
+              <a14:hiddenFill xmlns:a14="http://schemas.microsoft.com/office/drawing/2010/main">
+                <a:solidFill>
+                  <a:srgbClr val="FFFFFF"/>
+                </a:solidFill>
+              </a14:hiddenFill>
+            </a:ext>
+          </a:extLst>
+        </p:spPr>
+      </p:pic>
     </p:spTree>
     <p:extLst>
       <p:ext uri="{BB962C8B-B14F-4D97-AF65-F5344CB8AC3E}">
-        <p14:creationId xmlns:p14="http://schemas.microsoft.com/office/powerpoint/2010/main" val="103797951"/>
+        <p14:creationId xmlns:p14="http://schemas.microsoft.com/office/powerpoint/2010/main" val="1647817983"/>
       </p:ext>
     </p:extLst>
   </p:cSld>
@@ -6909,296 +10557,12 @@
           <a:chExt cx="0" cy="0"/>
         </a:xfrm>
       </p:grpSpPr>
-      <p:sp>
-        <p:nvSpPr>
-          <p:cNvPr id="2" name="Title 1">
-            <a:extLst>
-              <a:ext uri="{FF2B5EF4-FFF2-40B4-BE49-F238E27FC236}">
-                <a16:creationId xmlns:a16="http://schemas.microsoft.com/office/drawing/2014/main" id="{0E22FC0B-61AD-1F6E-3C66-FF8CAE0E2AD4}"/>
-              </a:ext>
-            </a:extLst>
-          </p:cNvPr>
-          <p:cNvSpPr>
-            <a:spLocks noGrp="1"/>
-          </p:cNvSpPr>
-          <p:nvPr>
-            <p:ph type="title"/>
-          </p:nvPr>
-        </p:nvSpPr>
-        <p:spPr/>
-        <p:txBody>
-          <a:bodyPr/>
-          <a:lstStyle/>
-          <a:p>
-            <a:r>
-              <a:rPr lang="en-US" dirty="0"/>
-              <a:t>Probability – Remember it!</a:t>
-            </a:r>
-          </a:p>
-        </p:txBody>
-      </p:sp>
-      <p:sp>
-        <p:nvSpPr>
-          <p:cNvPr id="3" name="Content Placeholder 2">
-            <a:extLst>
-              <a:ext uri="{FF2B5EF4-FFF2-40B4-BE49-F238E27FC236}">
-                <a16:creationId xmlns:a16="http://schemas.microsoft.com/office/drawing/2014/main" id="{FCF803DB-F57D-5E3B-58C8-97671A475C9F}"/>
-              </a:ext>
-            </a:extLst>
-          </p:cNvPr>
-          <p:cNvSpPr>
-            <a:spLocks noGrp="1"/>
-          </p:cNvSpPr>
-          <p:nvPr>
-            <p:ph idx="1"/>
-          </p:nvPr>
-        </p:nvSpPr>
-        <p:spPr>
-          <a:xfrm>
-            <a:off x="1451579" y="1912620"/>
-            <a:ext cx="9603275" cy="4140861"/>
-          </a:xfrm>
-        </p:spPr>
-        <p:txBody>
-          <a:bodyPr>
-            <a:normAutofit lnSpcReduction="10000"/>
-          </a:bodyPr>
-          <a:lstStyle/>
-          <a:p>
-            <a:r>
-              <a:rPr lang="en-US" dirty="0"/>
-              <a:t>Recall the idea of probability. </a:t>
-            </a:r>
-          </a:p>
-          <a:p>
-            <a:pPr lvl="1"/>
-            <a:r>
-              <a:rPr lang="en-US" dirty="0"/>
-              <a:t>P(A) – what is the likelihood that A will happen. </a:t>
-            </a:r>
-          </a:p>
-          <a:p>
-            <a:r>
-              <a:rPr lang="en-US" dirty="0"/>
-              <a:t>Probability comes up directly in several inferential things:</a:t>
-            </a:r>
-          </a:p>
-          <a:p>
-            <a:pPr lvl="1"/>
-            <a:r>
-              <a:rPr lang="en-US" dirty="0"/>
-              <a:t>Monte </a:t>
-            </a:r>
-            <a:r>
-              <a:rPr lang="en-US" dirty="0" err="1"/>
-              <a:t>carlo</a:t>
-            </a:r>
-            <a:r>
-              <a:rPr lang="en-US" dirty="0"/>
-              <a:t> simulation and hypothesis testing. </a:t>
-            </a:r>
-          </a:p>
-          <a:p>
-            <a:pPr lvl="1"/>
-            <a:r>
-              <a:rPr lang="en-US" dirty="0"/>
-              <a:t>Odds and logit for gradient descent and logistic regression. </a:t>
-            </a:r>
-          </a:p>
-          <a:p>
-            <a:r>
-              <a:rPr lang="en-US" dirty="0"/>
-              <a:t>We can understand all* of the stats we’ve done from the perspective of probability. </a:t>
-            </a:r>
-          </a:p>
-          <a:p>
-            <a:pPr lvl="1"/>
-            <a:r>
-              <a:rPr lang="en-US" dirty="0"/>
-              <a:t>We track what happens in data. </a:t>
-            </a:r>
-          </a:p>
-          <a:p>
-            <a:pPr lvl="1"/>
-            <a:r>
-              <a:rPr lang="en-US" dirty="0"/>
-              <a:t>These happenings can be converted into probabilities. </a:t>
-            </a:r>
-          </a:p>
-          <a:p>
-            <a:pPr lvl="1"/>
-            <a:r>
-              <a:rPr lang="en-US" dirty="0"/>
-              <a:t>Bayesian statistics explains the ideas we’ve covered, but looking at probability. </a:t>
-            </a:r>
-          </a:p>
-          <a:p>
-            <a:r>
-              <a:rPr lang="en-US" dirty="0"/>
-              <a:t>Log. Reg. Classification models predict the probability something will happen!</a:t>
-            </a:r>
-          </a:p>
-        </p:txBody>
-      </p:sp>
-    </p:spTree>
-    <p:extLst>
-      <p:ext uri="{BB962C8B-B14F-4D97-AF65-F5344CB8AC3E}">
-        <p14:creationId xmlns:p14="http://schemas.microsoft.com/office/powerpoint/2010/main" val="851535766"/>
-      </p:ext>
-    </p:extLst>
-  </p:cSld>
-  <p:clrMapOvr>
-    <a:masterClrMapping/>
-  </p:clrMapOvr>
-</p:sld>
-</file>
-
-<file path=ppt/slides/slide9.xml><?xml version="1.0" encoding="utf-8"?>
-<p:sld xmlns:a="http://schemas.openxmlformats.org/drawingml/2006/main" xmlns:r="http://schemas.openxmlformats.org/officeDocument/2006/relationships" xmlns:p="http://schemas.openxmlformats.org/presentationml/2006/main" show="0">
-  <p:cSld>
-    <p:spTree>
-      <p:nvGrpSpPr>
-        <p:cNvPr id="1" name=""/>
-        <p:cNvGrpSpPr/>
-        <p:nvPr/>
-      </p:nvGrpSpPr>
-      <p:grpSpPr>
-        <a:xfrm>
-          <a:off x="0" y="0"/>
-          <a:ext cx="0" cy="0"/>
-          <a:chOff x="0" y="0"/>
-          <a:chExt cx="0" cy="0"/>
-        </a:xfrm>
-      </p:grpSpPr>
-      <p:sp>
-        <p:nvSpPr>
-          <p:cNvPr id="2" name="Title 1">
-            <a:extLst>
-              <a:ext uri="{FF2B5EF4-FFF2-40B4-BE49-F238E27FC236}">
-                <a16:creationId xmlns:a16="http://schemas.microsoft.com/office/drawing/2014/main" id="{C350A8CB-103E-B491-DBA9-1234FE730BF2}"/>
-              </a:ext>
-            </a:extLst>
-          </p:cNvPr>
-          <p:cNvSpPr>
-            <a:spLocks noGrp="1"/>
-          </p:cNvSpPr>
-          <p:nvPr>
-            <p:ph type="title"/>
-          </p:nvPr>
-        </p:nvSpPr>
-        <p:spPr/>
-        <p:txBody>
-          <a:bodyPr/>
-          <a:lstStyle/>
-          <a:p>
-            <a:r>
-              <a:rPr lang="en-US" dirty="0"/>
-              <a:t>Note on Features </a:t>
-            </a:r>
-          </a:p>
-        </p:txBody>
-      </p:sp>
-      <p:sp>
-        <p:nvSpPr>
-          <p:cNvPr id="3" name="Content Placeholder 2">
-            <a:extLst>
-              <a:ext uri="{FF2B5EF4-FFF2-40B4-BE49-F238E27FC236}">
-                <a16:creationId xmlns:a16="http://schemas.microsoft.com/office/drawing/2014/main" id="{D46B6B3F-F17C-A75A-D035-14381BBCE32A}"/>
-              </a:ext>
-            </a:extLst>
-          </p:cNvPr>
-          <p:cNvSpPr>
-            <a:spLocks noGrp="1"/>
-          </p:cNvSpPr>
-          <p:nvPr>
-            <p:ph idx="1"/>
-          </p:nvPr>
-        </p:nvSpPr>
-        <p:spPr>
-          <a:xfrm>
-            <a:off x="1451579" y="1853754"/>
-            <a:ext cx="9603275" cy="4199727"/>
-          </a:xfrm>
-        </p:spPr>
-        <p:txBody>
-          <a:bodyPr/>
-          <a:lstStyle/>
-          <a:p>
-            <a:r>
-              <a:rPr lang="en-US" dirty="0"/>
-              <a:t>In this stuff we’ll use totally categorical data. </a:t>
-            </a:r>
-          </a:p>
-          <a:p>
-            <a:pPr lvl="1"/>
-            <a:r>
-              <a:rPr lang="en-US" dirty="0"/>
-              <a:t>Classification of categorical target. </a:t>
-            </a:r>
-          </a:p>
-          <a:p>
-            <a:pPr lvl="1"/>
-            <a:r>
-              <a:rPr lang="en-US" dirty="0"/>
-              <a:t>Features are all categorical. </a:t>
-            </a:r>
-          </a:p>
-          <a:p>
-            <a:r>
-              <a:rPr lang="en-US" dirty="0"/>
-              <a:t>We </a:t>
-            </a:r>
-            <a:r>
-              <a:rPr lang="en-US" i="1" dirty="0"/>
-              <a:t>can</a:t>
-            </a:r>
-            <a:r>
-              <a:rPr lang="en-US" dirty="0"/>
-              <a:t> use numeric features, but we won’t now. </a:t>
-            </a:r>
-          </a:p>
-          <a:p>
-            <a:pPr lvl="1"/>
-            <a:r>
-              <a:rPr lang="en-US" dirty="0"/>
-              <a:t>Practically, this is very easy to do, follows most sklearn conventions. </a:t>
-            </a:r>
-          </a:p>
-          <a:p>
-            <a:pPr lvl="1"/>
-            <a:r>
-              <a:rPr lang="en-US" dirty="0"/>
-              <a:t>Several model types just make more sense to explain with one or the other. </a:t>
-            </a:r>
-          </a:p>
-          <a:p>
-            <a:r>
-              <a:rPr lang="en-US" dirty="0"/>
-              <a:t>This is one where the model assumes normal distribution of features. </a:t>
-            </a:r>
-          </a:p>
-          <a:p>
-            <a:pPr lvl="1"/>
-            <a:r>
-              <a:rPr lang="en-US" dirty="0"/>
-              <a:t>Probability calculations are similar to hypothesis test probabilities. </a:t>
-            </a:r>
-          </a:p>
-          <a:p>
-            <a:pPr lvl="1"/>
-            <a:r>
-              <a:rPr lang="en-US" dirty="0"/>
-              <a:t>The closer the features are to normal, the better the results. </a:t>
-            </a:r>
-          </a:p>
-        </p:txBody>
-      </p:sp>
       <p:pic>
         <p:nvPicPr>
-          <p:cNvPr id="1026" name="Picture 2" descr="Gaussian Naive Bayes - GeeksforGeeks">
+          <p:cNvPr id="5122" name="Picture 2" descr="Discussion of the Monty Hall Dilemma by Peter Stikker">
             <a:extLst>
               <a:ext uri="{FF2B5EF4-FFF2-40B4-BE49-F238E27FC236}">
-                <a16:creationId xmlns:a16="http://schemas.microsoft.com/office/drawing/2014/main" id="{33BDC3CA-1B3E-CF82-C90A-05DF2F13B97B}"/>
+                <a16:creationId xmlns:a16="http://schemas.microsoft.com/office/drawing/2014/main" id="{868711D2-EE49-65F2-93B6-C4901DC2ED23}"/>
               </a:ext>
             </a:extLst>
           </p:cNvPr>
@@ -7207,7 +10571,7 @@
           </p:cNvPicPr>
           <p:nvPr/>
         </p:nvPicPr>
-        <p:blipFill rotWithShape="1">
+        <p:blipFill>
           <a:blip r:embed="rId2">
             <a:extLst>
               <a:ext uri="{28A0092B-C50C-407E-A947-70E740481C1C}">
@@ -7215,15 +10579,15 @@
               </a:ext>
             </a:extLst>
           </a:blip>
-          <a:srcRect l="6236" r="4288"/>
+          <a:srcRect/>
           <a:stretch>
             <a:fillRect/>
           </a:stretch>
         </p:blipFill>
         <p:spPr bwMode="auto">
           <a:xfrm>
-            <a:off x="6705331" y="0"/>
-            <a:ext cx="5486669" cy="3066011"/>
+            <a:off x="291268" y="279399"/>
+            <a:ext cx="11609464" cy="5308601"/>
           </a:xfrm>
           <a:prstGeom prst="rect">
             <a:avLst/>
@@ -7243,7 +10607,120 @@
     </p:spTree>
     <p:extLst>
       <p:ext uri="{BB962C8B-B14F-4D97-AF65-F5344CB8AC3E}">
-        <p14:creationId xmlns:p14="http://schemas.microsoft.com/office/powerpoint/2010/main" val="1072223588"/>
+        <p14:creationId xmlns:p14="http://schemas.microsoft.com/office/powerpoint/2010/main" val="4217518146"/>
+      </p:ext>
+    </p:extLst>
+  </p:cSld>
+  <p:clrMapOvr>
+    <a:masterClrMapping/>
+  </p:clrMapOvr>
+</p:sld>
+</file>
+
+<file path=ppt/slides/slide9.xml><?xml version="1.0" encoding="utf-8"?>
+<p:sld xmlns:a="http://schemas.openxmlformats.org/drawingml/2006/main" xmlns:r="http://schemas.openxmlformats.org/officeDocument/2006/relationships" xmlns:p="http://schemas.openxmlformats.org/presentationml/2006/main">
+  <p:cSld>
+    <p:spTree>
+      <p:nvGrpSpPr>
+        <p:cNvPr id="1" name=""/>
+        <p:cNvGrpSpPr/>
+        <p:nvPr/>
+      </p:nvGrpSpPr>
+      <p:grpSpPr>
+        <a:xfrm>
+          <a:off x="0" y="0"/>
+          <a:ext cx="0" cy="0"/>
+          <a:chOff x="0" y="0"/>
+          <a:chExt cx="0" cy="0"/>
+        </a:xfrm>
+      </p:grpSpPr>
+      <p:sp>
+        <p:nvSpPr>
+          <p:cNvPr id="2" name="Title 1">
+            <a:extLst>
+              <a:ext uri="{FF2B5EF4-FFF2-40B4-BE49-F238E27FC236}">
+                <a16:creationId xmlns:a16="http://schemas.microsoft.com/office/drawing/2014/main" id="{C31883E5-2524-759A-34CB-AF79F119D41C}"/>
+              </a:ext>
+            </a:extLst>
+          </p:cNvPr>
+          <p:cNvSpPr>
+            <a:spLocks noGrp="1"/>
+          </p:cNvSpPr>
+          <p:nvPr>
+            <p:ph type="title"/>
+          </p:nvPr>
+        </p:nvSpPr>
+        <p:spPr/>
+        <p:txBody>
+          <a:bodyPr/>
+          <a:lstStyle/>
+          <a:p>
+            <a:r>
+              <a:rPr lang="en-US" dirty="0"/>
+              <a:t>Why Are densities so Weird? </a:t>
+            </a:r>
+          </a:p>
+        </p:txBody>
+      </p:sp>
+      <p:sp>
+        <p:nvSpPr>
+          <p:cNvPr id="3" name="Content Placeholder 2">
+            <a:extLst>
+              <a:ext uri="{FF2B5EF4-FFF2-40B4-BE49-F238E27FC236}">
+                <a16:creationId xmlns:a16="http://schemas.microsoft.com/office/drawing/2014/main" id="{3532D88E-CBA3-BD41-400C-306B011019C3}"/>
+              </a:ext>
+            </a:extLst>
+          </p:cNvPr>
+          <p:cNvSpPr>
+            <a:spLocks noGrp="1"/>
+          </p:cNvSpPr>
+          <p:nvPr>
+            <p:ph idx="1"/>
+          </p:nvPr>
+        </p:nvSpPr>
+        <p:spPr/>
+        <p:txBody>
+          <a:bodyPr/>
+          <a:lstStyle/>
+          <a:p>
+            <a:endParaRPr lang="en-US"/>
+          </a:p>
+        </p:txBody>
+      </p:sp>
+      <p:pic>
+        <p:nvPicPr>
+          <p:cNvPr id="6" name="Picture 5">
+            <a:extLst>
+              <a:ext uri="{FF2B5EF4-FFF2-40B4-BE49-F238E27FC236}">
+                <a16:creationId xmlns:a16="http://schemas.microsoft.com/office/drawing/2014/main" id="{AADD1F11-10A9-2178-1300-92D45A6C24B1}"/>
+              </a:ext>
+            </a:extLst>
+          </p:cNvPr>
+          <p:cNvPicPr>
+            <a:picLocks noChangeAspect="1"/>
+          </p:cNvPicPr>
+          <p:nvPr/>
+        </p:nvPicPr>
+        <p:blipFill>
+          <a:blip r:embed="rId2"/>
+          <a:stretch>
+            <a:fillRect/>
+          </a:stretch>
+        </p:blipFill>
+        <p:spPr>
+          <a:xfrm>
+            <a:off x="2034540" y="1853754"/>
+            <a:ext cx="7772400" cy="4798169"/>
+          </a:xfrm>
+          <a:prstGeom prst="rect">
+            <a:avLst/>
+          </a:prstGeom>
+        </p:spPr>
+      </p:pic>
+    </p:spTree>
+    <p:extLst>
+      <p:ext uri="{BB962C8B-B14F-4D97-AF65-F5344CB8AC3E}">
+        <p14:creationId xmlns:p14="http://schemas.microsoft.com/office/powerpoint/2010/main" val="1106345949"/>
       </p:ext>
     </p:extLst>
   </p:cSld>

--- a/reference_material/slides/025_Bayes.pptx
+++ b/reference_material/slides/025_Bayes.pptx
@@ -38,16 +38,17 @@
     <p:sldId id="260" r:id="rId32"/>
     <p:sldId id="261" r:id="rId33"/>
     <p:sldId id="262" r:id="rId34"/>
-    <p:sldId id="287" r:id="rId35"/>
-    <p:sldId id="277" r:id="rId36"/>
-    <p:sldId id="289" r:id="rId37"/>
-    <p:sldId id="263" r:id="rId38"/>
-    <p:sldId id="264" r:id="rId39"/>
-    <p:sldId id="283" r:id="rId40"/>
-    <p:sldId id="286" r:id="rId41"/>
-    <p:sldId id="265" r:id="rId42"/>
-    <p:sldId id="296" r:id="rId43"/>
-    <p:sldId id="297" r:id="rId44"/>
+    <p:sldId id="299" r:id="rId35"/>
+    <p:sldId id="287" r:id="rId36"/>
+    <p:sldId id="277" r:id="rId37"/>
+    <p:sldId id="289" r:id="rId38"/>
+    <p:sldId id="283" r:id="rId39"/>
+    <p:sldId id="263" r:id="rId40"/>
+    <p:sldId id="264" r:id="rId41"/>
+    <p:sldId id="286" r:id="rId42"/>
+    <p:sldId id="265" r:id="rId43"/>
+    <p:sldId id="296" r:id="rId44"/>
+    <p:sldId id="297" r:id="rId45"/>
   </p:sldIdLst>
   <p:sldSz cx="12192000" cy="6858000"/>
   <p:notesSz cx="6858000" cy="9144000"/>
@@ -200,6 +201,7 @@
             <p14:sldId id="260"/>
             <p14:sldId id="261"/>
             <p14:sldId id="262"/>
+            <p14:sldId id="299"/>
           </p14:sldIdLst>
         </p14:section>
         <p14:section name="Interpretability" id="{D528C759-143A-6446-821D-C964BB8BF507}">
@@ -211,9 +213,9 @@
           <p14:sldIdLst>
             <p14:sldId id="277"/>
             <p14:sldId id="289"/>
+            <p14:sldId id="283"/>
             <p14:sldId id="263"/>
             <p14:sldId id="264"/>
-            <p14:sldId id="283"/>
             <p14:sldId id="286"/>
             <p14:sldId id="265"/>
             <p14:sldId id="296"/>
@@ -3812,14 +3814,14 @@
             <a:pPr lvl="1"/>
             <a:r>
               <a:rPr lang="en-US" dirty="0"/>
-              <a:t>Behind one door is a car; </a:t>
-            </a:r>
-          </a:p>
-          <a:p>
-            <a:pPr lvl="1"/>
-            <a:r>
-              <a:rPr lang="en-US" dirty="0"/>
-              <a:t>behind the others, goats. </a:t>
+              <a:t>Behind one door is a car.</a:t>
+            </a:r>
+          </a:p>
+          <a:p>
+            <a:pPr lvl="1"/>
+            <a:r>
+              <a:rPr lang="en-US" dirty="0"/>
+              <a:t>Behind the others, goats. </a:t>
             </a:r>
           </a:p>
           <a:p>
@@ -3865,7 +3867,7 @@
             </a:pPr>
             <a:r>
               <a:rPr lang="en-US" dirty="0"/>
-              <a:t>The doors are open, you get what was behind the door you settled on. </a:t>
+              <a:t>The doors are opened, you get what was behind the door you settled on. </a:t>
             </a:r>
           </a:p>
           <a:p>
@@ -8245,14 +8247,14 @@
             <a:pPr lvl="1"/>
             <a:r>
               <a:rPr lang="en-US" dirty="0"/>
-              <a:t>Simple – the math is just what we did by hand. </a:t>
-            </a:r>
-          </a:p>
-          <a:p>
-            <a:pPr lvl="1"/>
-            <a:r>
-              <a:rPr lang="en-US" dirty="0"/>
-              <a:t>Fast – due to the simplicity, training and predicting are usually fast.  </a:t>
+              <a:t>Simple – the math is just what we did by hand. Data can be small. </a:t>
+            </a:r>
+          </a:p>
+          <a:p>
+            <a:pPr lvl="1"/>
+            <a:r>
+              <a:rPr lang="en-US" dirty="0"/>
+              <a:t>Fast – due to the simplicity, training and predicting are usually fast. </a:t>
             </a:r>
           </a:p>
           <a:p>
@@ -8319,7 +8321,7 @@
           <p:cNvPr id="2" name="Title 1">
             <a:extLst>
               <a:ext uri="{FF2B5EF4-FFF2-40B4-BE49-F238E27FC236}">
-                <a16:creationId xmlns:a16="http://schemas.microsoft.com/office/drawing/2014/main" id="{0594A360-1759-643C-64C0-FC355CD2DF81}"/>
+                <a16:creationId xmlns:a16="http://schemas.microsoft.com/office/drawing/2014/main" id="{AAE11913-ADE3-68A0-AFBB-20A2CEEBAF46}"/>
               </a:ext>
             </a:extLst>
           </p:cNvPr>
@@ -8337,7 +8339,7 @@
           <a:p>
             <a:r>
               <a:rPr lang="en-US" dirty="0"/>
-              <a:t>Interpretability</a:t>
+              <a:t>Bayes Model</a:t>
             </a:r>
           </a:p>
         </p:txBody>
@@ -8347,7 +8349,7 @@
           <p:cNvPr id="3" name="Content Placeholder 2">
             <a:extLst>
               <a:ext uri="{FF2B5EF4-FFF2-40B4-BE49-F238E27FC236}">
-                <a16:creationId xmlns:a16="http://schemas.microsoft.com/office/drawing/2014/main" id="{8E75A48A-C4EA-9CA2-71BD-0A1C002A7971}"/>
+                <a16:creationId xmlns:a16="http://schemas.microsoft.com/office/drawing/2014/main" id="{1520DC32-5CC4-5701-B149-64A9C1D4F72B}"/>
               </a:ext>
             </a:extLst>
           </p:cNvPr>
@@ -8363,30 +8365,14 @@
           <a:bodyPr/>
           <a:lstStyle/>
           <a:p>
-            <a:r>
-              <a:rPr lang="en-US" dirty="0"/>
-              <a:t>One metric, outside of accuracy, that a model may be evaluated on is interpretability. </a:t>
-            </a:r>
-          </a:p>
-          <a:p>
-            <a:pPr lvl="1"/>
-            <a:r>
-              <a:rPr lang="en-US" dirty="0"/>
-              <a:t>Can we understand how the model made a decision. </a:t>
-            </a:r>
-          </a:p>
-          <a:p>
-            <a:r>
-              <a:rPr lang="en-US" dirty="0"/>
-              <a:t>We’ve seen parts that go both </a:t>
-            </a:r>
+            <a:endParaRPr lang="en-US"/>
           </a:p>
         </p:txBody>
       </p:sp>
     </p:spTree>
     <p:extLst>
       <p:ext uri="{BB962C8B-B14F-4D97-AF65-F5344CB8AC3E}">
-        <p14:creationId xmlns:p14="http://schemas.microsoft.com/office/powerpoint/2010/main" val="483521231"/>
+        <p14:creationId xmlns:p14="http://schemas.microsoft.com/office/powerpoint/2010/main" val="2950429385"/>
       </p:ext>
     </p:extLst>
   </p:cSld>
@@ -8397,7 +8383,7 @@
 </file>
 
 <file path=ppt/slides/slide35.xml><?xml version="1.0" encoding="utf-8"?>
-<p:sld xmlns:a="http://schemas.openxmlformats.org/drawingml/2006/main" xmlns:r="http://schemas.openxmlformats.org/officeDocument/2006/relationships" xmlns:p="http://schemas.openxmlformats.org/presentationml/2006/main">
+<p:sld xmlns:a="http://schemas.openxmlformats.org/drawingml/2006/main" xmlns:r="http://schemas.openxmlformats.org/officeDocument/2006/relationships" xmlns:p="http://schemas.openxmlformats.org/presentationml/2006/main" show="0">
   <p:cSld>
     <p:spTree>
       <p:nvGrpSpPr>
@@ -8418,7 +8404,7 @@
           <p:cNvPr id="2" name="Title 1">
             <a:extLst>
               <a:ext uri="{FF2B5EF4-FFF2-40B4-BE49-F238E27FC236}">
-                <a16:creationId xmlns:a16="http://schemas.microsoft.com/office/drawing/2014/main" id="{780AA587-6B7B-4684-677B-EF71500D0639}"/>
+                <a16:creationId xmlns:a16="http://schemas.microsoft.com/office/drawing/2014/main" id="{0594A360-1759-643C-64C0-FC355CD2DF81}"/>
               </a:ext>
             </a:extLst>
           </p:cNvPr>
@@ -8436,7 +8422,7 @@
           <a:p>
             <a:r>
               <a:rPr lang="en-US" dirty="0"/>
-              <a:t>Non-Linear Relationships</a:t>
+              <a:t>Interpretability</a:t>
             </a:r>
           </a:p>
         </p:txBody>
@@ -8446,7 +8432,7 @@
           <p:cNvPr id="3" name="Content Placeholder 2">
             <a:extLst>
               <a:ext uri="{FF2B5EF4-FFF2-40B4-BE49-F238E27FC236}">
-                <a16:creationId xmlns:a16="http://schemas.microsoft.com/office/drawing/2014/main" id="{EC7FF0EB-AAA0-3DDF-F4BB-8C77B3DE0B8A}"/>
+                <a16:creationId xmlns:a16="http://schemas.microsoft.com/office/drawing/2014/main" id="{8E75A48A-C4EA-9CA2-71BD-0A1C002A7971}"/>
               </a:ext>
             </a:extLst>
           </p:cNvPr>
@@ -8457,81 +8443,27 @@
             <p:ph idx="1"/>
           </p:nvPr>
         </p:nvSpPr>
-        <p:spPr>
-          <a:xfrm>
-            <a:off x="1451579" y="1948940"/>
-            <a:ext cx="9603275" cy="4104541"/>
-          </a:xfrm>
-        </p:spPr>
+        <p:spPr/>
         <p:txBody>
           <a:bodyPr/>
           <a:lstStyle/>
           <a:p>
             <a:r>
               <a:rPr lang="en-US" dirty="0"/>
-              <a:t>One cool thing about Bayes is that it isn’t linear. </a:t>
-            </a:r>
-          </a:p>
-          <a:p>
-            <a:pPr lvl="1"/>
-            <a:r>
-              <a:rPr lang="en-US" dirty="0"/>
-              <a:t>There’s no y=</a:t>
-            </a:r>
-            <a:r>
-              <a:rPr lang="en-US" dirty="0" err="1"/>
-              <a:t>mx+b</a:t>
-            </a:r>
-            <a:r>
-              <a:rPr lang="en-US" dirty="0"/>
-              <a:t> type equation anywhere. </a:t>
-            </a:r>
-          </a:p>
-          <a:p>
-            <a:r>
-              <a:rPr lang="en-US" dirty="0"/>
-              <a:t>The decisions it makes are the same as a logistic regression, but the method is different. </a:t>
-            </a:r>
-          </a:p>
-          <a:p>
-            <a:pPr lvl="1"/>
-            <a:r>
-              <a:rPr lang="en-US" dirty="0"/>
-              <a:t>Logistic regression requires some linear decision boundary to separate A/B. </a:t>
-            </a:r>
-          </a:p>
-          <a:p>
-            <a:pPr lvl="1"/>
-            <a:r>
-              <a:rPr lang="en-US" dirty="0"/>
-              <a:t>Bayes doesn’t – things can be classified without a linear relationship. </a:t>
-            </a:r>
-          </a:p>
-          <a:p>
-            <a:pPr lvl="1"/>
-            <a:r>
-              <a:rPr lang="en-US" dirty="0"/>
-              <a:t>Different types of models can handle different types of relationships in data. </a:t>
-            </a:r>
-          </a:p>
-          <a:p>
-            <a:r>
-              <a:rPr lang="en-US" dirty="0"/>
-              <a:t>If there is a linear correlation, regression may excel, if not Bayes (or others) may excel…</a:t>
-            </a:r>
-          </a:p>
-          <a:p>
-            <a:pPr lvl="1"/>
-            <a:r>
-              <a:rPr lang="en-US" dirty="0"/>
-              <a:t>Real scenarios may have non-linear relationships. </a:t>
-            </a:r>
-          </a:p>
-          <a:p>
-            <a:pPr lvl="1"/>
-            <a:r>
-              <a:rPr lang="en-US" dirty="0"/>
-              <a:t>Is there a linear relationship between dining options and cancer occurrences – maybe? </a:t>
+              <a:t>One metric, outside of accuracy, that a model may be evaluated on is interpretability. </a:t>
+            </a:r>
+          </a:p>
+          <a:p>
+            <a:pPr lvl="1"/>
+            <a:r>
+              <a:rPr lang="en-US" dirty="0"/>
+              <a:t>Can we understand how the model made a decision. </a:t>
+            </a:r>
+          </a:p>
+          <a:p>
+            <a:r>
+              <a:rPr lang="en-US" dirty="0"/>
+              <a:t>We’ve seen parts that go both </a:t>
             </a:r>
           </a:p>
         </p:txBody>
@@ -8539,7 +8471,7 @@
     </p:spTree>
     <p:extLst>
       <p:ext uri="{BB962C8B-B14F-4D97-AF65-F5344CB8AC3E}">
-        <p14:creationId xmlns:p14="http://schemas.microsoft.com/office/powerpoint/2010/main" val="2500669158"/>
+        <p14:creationId xmlns:p14="http://schemas.microsoft.com/office/powerpoint/2010/main" val="483521231"/>
       </p:ext>
     </p:extLst>
   </p:cSld>
@@ -8571,6 +8503,168 @@
           <p:cNvPr id="2" name="Title 1">
             <a:extLst>
               <a:ext uri="{FF2B5EF4-FFF2-40B4-BE49-F238E27FC236}">
+                <a16:creationId xmlns:a16="http://schemas.microsoft.com/office/drawing/2014/main" id="{780AA587-6B7B-4684-677B-EF71500D0639}"/>
+              </a:ext>
+            </a:extLst>
+          </p:cNvPr>
+          <p:cNvSpPr>
+            <a:spLocks noGrp="1"/>
+          </p:cNvSpPr>
+          <p:nvPr>
+            <p:ph type="title"/>
+          </p:nvPr>
+        </p:nvSpPr>
+        <p:spPr/>
+        <p:txBody>
+          <a:bodyPr/>
+          <a:lstStyle/>
+          <a:p>
+            <a:r>
+              <a:rPr lang="en-US" dirty="0"/>
+              <a:t>Non-Linear Relationships</a:t>
+            </a:r>
+          </a:p>
+        </p:txBody>
+      </p:sp>
+      <p:sp>
+        <p:nvSpPr>
+          <p:cNvPr id="3" name="Content Placeholder 2">
+            <a:extLst>
+              <a:ext uri="{FF2B5EF4-FFF2-40B4-BE49-F238E27FC236}">
+                <a16:creationId xmlns:a16="http://schemas.microsoft.com/office/drawing/2014/main" id="{EC7FF0EB-AAA0-3DDF-F4BB-8C77B3DE0B8A}"/>
+              </a:ext>
+            </a:extLst>
+          </p:cNvPr>
+          <p:cNvSpPr>
+            <a:spLocks noGrp="1"/>
+          </p:cNvSpPr>
+          <p:nvPr>
+            <p:ph idx="1"/>
+          </p:nvPr>
+        </p:nvSpPr>
+        <p:spPr>
+          <a:xfrm>
+            <a:off x="1451579" y="1853754"/>
+            <a:ext cx="9603275" cy="4199727"/>
+          </a:xfrm>
+        </p:spPr>
+        <p:txBody>
+          <a:bodyPr>
+            <a:normAutofit/>
+          </a:bodyPr>
+          <a:lstStyle/>
+          <a:p>
+            <a:r>
+              <a:rPr lang="en-US" dirty="0"/>
+              <a:t>One cool thing about Bayes is that it isn’t linear. </a:t>
+            </a:r>
+          </a:p>
+          <a:p>
+            <a:pPr lvl="1"/>
+            <a:r>
+              <a:rPr lang="en-US" dirty="0"/>
+              <a:t>There’s no y=</a:t>
+            </a:r>
+            <a:r>
+              <a:rPr lang="en-US" dirty="0" err="1"/>
+              <a:t>mx+b</a:t>
+            </a:r>
+            <a:r>
+              <a:rPr lang="en-US" dirty="0"/>
+              <a:t> type equation anywhere. </a:t>
+            </a:r>
+          </a:p>
+          <a:p>
+            <a:r>
+              <a:rPr lang="en-US" dirty="0"/>
+              <a:t>The decisions it makes are the same as a logistic regression, but the method is different. </a:t>
+            </a:r>
+          </a:p>
+          <a:p>
+            <a:pPr lvl="1"/>
+            <a:r>
+              <a:rPr lang="en-US" dirty="0"/>
+              <a:t>Still predict group A/B, still use X feature set, still use same error analysis. </a:t>
+            </a:r>
+          </a:p>
+          <a:p>
+            <a:pPr lvl="1"/>
+            <a:r>
+              <a:rPr lang="en-US" dirty="0"/>
+              <a:t>Logistic regression requires some linear decision boundary to separate A/B. </a:t>
+            </a:r>
+          </a:p>
+          <a:p>
+            <a:pPr lvl="1"/>
+            <a:r>
+              <a:rPr lang="en-US" dirty="0"/>
+              <a:t>Bayes doesn’t – things can be classified without a linear relationship. </a:t>
+            </a:r>
+          </a:p>
+          <a:p>
+            <a:pPr lvl="1"/>
+            <a:r>
+              <a:rPr lang="en-US" dirty="0"/>
+              <a:t>Different types of models can handle different types of relationships in data. </a:t>
+            </a:r>
+          </a:p>
+          <a:p>
+            <a:r>
+              <a:rPr lang="en-US" dirty="0"/>
+              <a:t>If there is a linear correlation, regression may excel, if not Bayes (or others) may excel…</a:t>
+            </a:r>
+          </a:p>
+          <a:p>
+            <a:pPr lvl="1"/>
+            <a:r>
+              <a:rPr lang="en-US" dirty="0"/>
+              <a:t>Real scenarios may have non-linear relationships. </a:t>
+            </a:r>
+          </a:p>
+          <a:p>
+            <a:pPr lvl="1"/>
+            <a:r>
+              <a:rPr lang="en-US" dirty="0"/>
+              <a:t>Is there a linear relationship between dining options and cancer occurrences – maybe? </a:t>
+            </a:r>
+          </a:p>
+        </p:txBody>
+      </p:sp>
+    </p:spTree>
+    <p:extLst>
+      <p:ext uri="{BB962C8B-B14F-4D97-AF65-F5344CB8AC3E}">
+        <p14:creationId xmlns:p14="http://schemas.microsoft.com/office/powerpoint/2010/main" val="2500669158"/>
+      </p:ext>
+    </p:extLst>
+  </p:cSld>
+  <p:clrMapOvr>
+    <a:masterClrMapping/>
+  </p:clrMapOvr>
+</p:sld>
+</file>
+
+<file path=ppt/slides/slide37.xml><?xml version="1.0" encoding="utf-8"?>
+<p:sld xmlns:a="http://schemas.openxmlformats.org/drawingml/2006/main" xmlns:r="http://schemas.openxmlformats.org/officeDocument/2006/relationships" xmlns:p="http://schemas.openxmlformats.org/presentationml/2006/main">
+  <p:cSld>
+    <p:spTree>
+      <p:nvGrpSpPr>
+        <p:cNvPr id="1" name=""/>
+        <p:cNvGrpSpPr/>
+        <p:nvPr/>
+      </p:nvGrpSpPr>
+      <p:grpSpPr>
+        <a:xfrm>
+          <a:off x="0" y="0"/>
+          <a:ext cx="0" cy="0"/>
+          <a:chOff x="0" y="0"/>
+          <a:chExt cx="0" cy="0"/>
+        </a:xfrm>
+      </p:grpSpPr>
+      <p:sp>
+        <p:nvSpPr>
+          <p:cNvPr id="2" name="Title 1">
+            <a:extLst>
+              <a:ext uri="{FF2B5EF4-FFF2-40B4-BE49-F238E27FC236}">
                 <a16:creationId xmlns:a16="http://schemas.microsoft.com/office/drawing/2014/main" id="{866A9EA6-F507-0EAA-3C89-0EC3D6673340}"/>
               </a:ext>
             </a:extLst>
@@ -8613,11 +8707,13 @@
         <p:spPr>
           <a:xfrm>
             <a:off x="6483305" y="2330365"/>
-            <a:ext cx="5264046" cy="2673882"/>
+            <a:ext cx="5264046" cy="3545502"/>
           </a:xfrm>
         </p:spPr>
         <p:txBody>
-          <a:bodyPr/>
+          <a:bodyPr>
+            <a:normAutofit/>
+          </a:bodyPr>
           <a:lstStyle/>
           <a:p>
             <a:r>
@@ -8658,6 +8754,25 @@
             <a:r>
               <a:rPr lang="en-US" dirty="0"/>
               <a:t>Linear models can’t adapt to the relationship.</a:t>
+            </a:r>
+          </a:p>
+          <a:p>
+            <a:r>
+              <a:rPr lang="en-US" dirty="0"/>
+              <a:t>Pattern of our model should ‘fit’ data pattern.</a:t>
+            </a:r>
+          </a:p>
+          <a:p>
+            <a:pPr lvl="1"/>
+            <a:r>
+              <a:rPr lang="en-US" dirty="0"/>
+              <a:t>Bayes can fit where log. Reg. can’t, inherently. </a:t>
+            </a:r>
+          </a:p>
+          <a:p>
+            <a:r>
+              <a:rPr lang="en-US" dirty="0"/>
+              <a:t>We’ll worry more about this next semester. </a:t>
             </a:r>
           </a:p>
           <a:p>
@@ -8728,7 +8843,178 @@
 </p:sld>
 </file>
 
-<file path=ppt/slides/slide37.xml><?xml version="1.0" encoding="utf-8"?>
+<file path=ppt/slides/slide38.xml><?xml version="1.0" encoding="utf-8"?>
+<p:sld xmlns:a="http://schemas.openxmlformats.org/drawingml/2006/main" xmlns:r="http://schemas.openxmlformats.org/officeDocument/2006/relationships" xmlns:p="http://schemas.openxmlformats.org/presentationml/2006/main">
+  <p:cSld>
+    <p:spTree>
+      <p:nvGrpSpPr>
+        <p:cNvPr id="1" name=""/>
+        <p:cNvGrpSpPr/>
+        <p:nvPr/>
+      </p:nvGrpSpPr>
+      <p:grpSpPr>
+        <a:xfrm>
+          <a:off x="0" y="0"/>
+          <a:ext cx="0" cy="0"/>
+          <a:chOff x="0" y="0"/>
+          <a:chExt cx="0" cy="0"/>
+        </a:xfrm>
+      </p:grpSpPr>
+      <p:sp>
+        <p:nvSpPr>
+          <p:cNvPr id="2" name="Title 1">
+            <a:extLst>
+              <a:ext uri="{FF2B5EF4-FFF2-40B4-BE49-F238E27FC236}">
+                <a16:creationId xmlns:a16="http://schemas.microsoft.com/office/drawing/2014/main" id="{14D8C9D8-9487-2297-14C9-A847E7D5831F}"/>
+              </a:ext>
+            </a:extLst>
+          </p:cNvPr>
+          <p:cNvSpPr>
+            <a:spLocks noGrp="1"/>
+          </p:cNvSpPr>
+          <p:nvPr>
+            <p:ph type="title"/>
+          </p:nvPr>
+        </p:nvSpPr>
+        <p:spPr/>
+        <p:txBody>
+          <a:bodyPr/>
+          <a:lstStyle/>
+          <a:p>
+            <a:r>
+              <a:rPr lang="en-US" dirty="0"/>
+              <a:t>Bayes and Sklearn Implementation</a:t>
+            </a:r>
+          </a:p>
+        </p:txBody>
+      </p:sp>
+      <p:sp>
+        <p:nvSpPr>
+          <p:cNvPr id="3" name="Content Placeholder 2">
+            <a:extLst>
+              <a:ext uri="{FF2B5EF4-FFF2-40B4-BE49-F238E27FC236}">
+                <a16:creationId xmlns:a16="http://schemas.microsoft.com/office/drawing/2014/main" id="{C4A5C909-14D4-FC92-D91B-32B5388C2458}"/>
+              </a:ext>
+            </a:extLst>
+          </p:cNvPr>
+          <p:cNvSpPr>
+            <a:spLocks noGrp="1"/>
+          </p:cNvSpPr>
+          <p:nvPr>
+            <p:ph idx="1"/>
+          </p:nvPr>
+        </p:nvSpPr>
+        <p:spPr>
+          <a:xfrm>
+            <a:off x="1451579" y="1853754"/>
+            <a:ext cx="9603275" cy="4277080"/>
+          </a:xfrm>
+        </p:spPr>
+        <p:txBody>
+          <a:bodyPr>
+            <a:normAutofit fontScale="92500" lnSpcReduction="10000"/>
+          </a:bodyPr>
+          <a:lstStyle/>
+          <a:p>
+            <a:r>
+              <a:rPr lang="en-US" i="1" dirty="0"/>
+              <a:t>Using</a:t>
+            </a:r>
+            <a:r>
+              <a:rPr lang="en-US" dirty="0"/>
+              <a:t> bayes models is normally pretty simple, everything is just sklearn standard. </a:t>
+            </a:r>
+          </a:p>
+          <a:p>
+            <a:r>
+              <a:rPr lang="en-US" dirty="0"/>
+              <a:t>There are a couple of specific (potential) things to be aware of:</a:t>
+            </a:r>
+          </a:p>
+          <a:p>
+            <a:pPr lvl="1"/>
+            <a:r>
+              <a:rPr lang="en-US" dirty="0"/>
+              <a:t>Bayes theoretically </a:t>
+            </a:r>
+            <a:r>
+              <a:rPr lang="en-US" b="1" dirty="0"/>
+              <a:t>doesn’t</a:t>
+            </a:r>
+            <a:r>
+              <a:rPr lang="en-US" dirty="0"/>
+              <a:t> require encoding of variables, implementations may. </a:t>
+            </a:r>
+          </a:p>
+          <a:p>
+            <a:pPr lvl="2"/>
+            <a:r>
+              <a:rPr lang="en-US" dirty="0"/>
+              <a:t>From docs: “It is further assumed that all categories of each feature are represented by the numbers 0, …, n - 1, where n refers to the total number of categories for the given feature. This can, for instance, be achieved with the help of </a:t>
+            </a:r>
+            <a:r>
+              <a:rPr lang="en-US" dirty="0" err="1"/>
+              <a:t>OrdinalEncoder</a:t>
+            </a:r>
+            <a:r>
+              <a:rPr lang="en-US" dirty="0"/>
+              <a:t>.”</a:t>
+            </a:r>
+          </a:p>
+          <a:p>
+            <a:pPr lvl="1"/>
+            <a:r>
+              <a:rPr lang="en-US" b="1" dirty="0"/>
+              <a:t>Bayes requires categorical features</a:t>
+            </a:r>
+            <a:r>
+              <a:rPr lang="en-US" dirty="0"/>
+              <a:t>, implementations may do something to automatically handle numeric features or may have some different variant. </a:t>
+            </a:r>
+          </a:p>
+          <a:p>
+            <a:pPr lvl="2"/>
+            <a:r>
+              <a:rPr lang="en-US" dirty="0"/>
+              <a:t>In sklearn there are several Bayes varieties for different applications – Gaussian for numerical. </a:t>
+            </a:r>
+          </a:p>
+          <a:p>
+            <a:r>
+              <a:rPr lang="en-US" dirty="0"/>
+              <a:t>Overall, this can be true in several places:</a:t>
+            </a:r>
+          </a:p>
+          <a:p>
+            <a:pPr lvl="1"/>
+            <a:r>
+              <a:rPr lang="en-US" dirty="0"/>
+              <a:t>ML libraries have a pretty standard way to use algorithms, for ease of use. </a:t>
+            </a:r>
+          </a:p>
+          <a:p>
+            <a:pPr lvl="1"/>
+            <a:r>
+              <a:rPr lang="en-US" dirty="0"/>
+              <a:t>The exact requirements of the theoretical algorithm change to match. </a:t>
+            </a:r>
+          </a:p>
+        </p:txBody>
+      </p:sp>
+    </p:spTree>
+    <p:extLst>
+      <p:ext uri="{BB962C8B-B14F-4D97-AF65-F5344CB8AC3E}">
+        <p14:creationId xmlns:p14="http://schemas.microsoft.com/office/powerpoint/2010/main" val="2850732022"/>
+      </p:ext>
+    </p:extLst>
+  </p:cSld>
+  <p:clrMapOvr>
+    <a:masterClrMapping/>
+  </p:clrMapOvr>
+</p:sld>
+</file>
+
+<file path=ppt/slides/slide39.xml><?xml version="1.0" encoding="utf-8"?>
 <p:sld xmlns:a="http://schemas.openxmlformats.org/drawingml/2006/main" xmlns:r="http://schemas.openxmlformats.org/officeDocument/2006/relationships" xmlns:p="http://schemas.openxmlformats.org/presentationml/2006/main">
   <p:cSld>
     <p:bg>
@@ -9002,7 +9288,184 @@
 </p:sld>
 </file>
 
-<file path=ppt/slides/slide38.xml><?xml version="1.0" encoding="utf-8"?>
+<file path=ppt/slides/slide4.xml><?xml version="1.0" encoding="utf-8"?>
+<p:sld xmlns:a="http://schemas.openxmlformats.org/drawingml/2006/main" xmlns:r="http://schemas.openxmlformats.org/officeDocument/2006/relationships" xmlns:p="http://schemas.openxmlformats.org/presentationml/2006/main">
+  <p:cSld>
+    <p:spTree>
+      <p:nvGrpSpPr>
+        <p:cNvPr id="1" name=""/>
+        <p:cNvGrpSpPr/>
+        <p:nvPr/>
+      </p:nvGrpSpPr>
+      <p:grpSpPr>
+        <a:xfrm>
+          <a:off x="0" y="0"/>
+          <a:ext cx="0" cy="0"/>
+          <a:chOff x="0" y="0"/>
+          <a:chExt cx="0" cy="0"/>
+        </a:xfrm>
+      </p:grpSpPr>
+      <p:sp>
+        <p:nvSpPr>
+          <p:cNvPr id="2" name="Title 1">
+            <a:extLst>
+              <a:ext uri="{FF2B5EF4-FFF2-40B4-BE49-F238E27FC236}">
+                <a16:creationId xmlns:a16="http://schemas.microsoft.com/office/drawing/2014/main" id="{55666A1F-781F-8496-2FD7-3717E90AB8FE}"/>
+              </a:ext>
+            </a:extLst>
+          </p:cNvPr>
+          <p:cNvSpPr>
+            <a:spLocks noGrp="1"/>
+          </p:cNvSpPr>
+          <p:nvPr>
+            <p:ph type="title"/>
+          </p:nvPr>
+        </p:nvSpPr>
+        <p:spPr/>
+        <p:txBody>
+          <a:bodyPr/>
+          <a:lstStyle/>
+          <a:p>
+            <a:r>
+              <a:rPr lang="en-US" dirty="0"/>
+              <a:t>Assignment</a:t>
+            </a:r>
+          </a:p>
+        </p:txBody>
+      </p:sp>
+      <p:sp>
+        <p:nvSpPr>
+          <p:cNvPr id="3" name="Content Placeholder 2">
+            <a:extLst>
+              <a:ext uri="{FF2B5EF4-FFF2-40B4-BE49-F238E27FC236}">
+                <a16:creationId xmlns:a16="http://schemas.microsoft.com/office/drawing/2014/main" id="{4486A5CB-317D-41F7-BDE0-DC1A1C9DA26E}"/>
+              </a:ext>
+            </a:extLst>
+          </p:cNvPr>
+          <p:cNvSpPr>
+            <a:spLocks noGrp="1"/>
+          </p:cNvSpPr>
+          <p:nvPr>
+            <p:ph idx="1"/>
+          </p:nvPr>
+        </p:nvSpPr>
+        <p:spPr>
+          <a:xfrm>
+            <a:off x="1451579" y="2015732"/>
+            <a:ext cx="9603275" cy="4037749"/>
+          </a:xfrm>
+        </p:spPr>
+        <p:txBody>
+          <a:bodyPr/>
+          <a:lstStyle/>
+          <a:p>
+            <a:r>
+              <a:rPr lang="en-US" dirty="0"/>
+              <a:t>Overall, looked pretty good. Small notes only:</a:t>
+            </a:r>
+          </a:p>
+          <a:p>
+            <a:pPr lvl="1"/>
+            <a:r>
+              <a:rPr lang="en-US" dirty="0"/>
+              <a:t>I’m not sure a normal distribution for vote totals is best?</a:t>
+            </a:r>
+          </a:p>
+          <a:p>
+            <a:pPr lvl="2"/>
+            <a:r>
+              <a:rPr lang="en-US" dirty="0"/>
+              <a:t>Small sample, asserting vote totals are normal is an assertion (that may be correct). </a:t>
+            </a:r>
+          </a:p>
+          <a:p>
+            <a:pPr lvl="1"/>
+            <a:r>
+              <a:rPr lang="en-US" dirty="0"/>
+              <a:t>Can’t estimate purple/yellow independently – they sum to 1. </a:t>
+            </a:r>
+          </a:p>
+          <a:p>
+            <a:pPr lvl="2"/>
+            <a:r>
+              <a:rPr lang="en-US" dirty="0"/>
+              <a:t>Could get both at 52% in one simulation round. </a:t>
+            </a:r>
+          </a:p>
+          <a:p>
+            <a:pPr lvl="1"/>
+            <a:r>
+              <a:rPr lang="en-US" dirty="0"/>
+              <a:t>If you do something like </a:t>
+            </a:r>
+            <a:r>
+              <a:rPr lang="en-US" dirty="0" err="1"/>
+              <a:t>multicolinierity</a:t>
+            </a:r>
+            <a:r>
+              <a:rPr lang="en-US" dirty="0"/>
+              <a:t>, test the model after. </a:t>
+            </a:r>
+          </a:p>
+          <a:p>
+            <a:pPr lvl="1"/>
+            <a:r>
+              <a:rPr lang="en-US" dirty="0"/>
+              <a:t>Consider grids of images if you have many. (Is the fig, ax stuff familiar?) </a:t>
+            </a:r>
+          </a:p>
+          <a:p>
+            <a:r>
+              <a:rPr lang="en-US" dirty="0"/>
+              <a:t>I’ll finish the test stuff on Wednesday. </a:t>
+            </a:r>
+          </a:p>
+        </p:txBody>
+      </p:sp>
+      <p:pic>
+        <p:nvPicPr>
+          <p:cNvPr id="4" name="Picture 3">
+            <a:extLst>
+              <a:ext uri="{FF2B5EF4-FFF2-40B4-BE49-F238E27FC236}">
+                <a16:creationId xmlns:a16="http://schemas.microsoft.com/office/drawing/2014/main" id="{09E68606-BAA9-57A1-08DA-24F4DED89D0F}"/>
+              </a:ext>
+            </a:extLst>
+          </p:cNvPr>
+          <p:cNvPicPr>
+            <a:picLocks noChangeAspect="1"/>
+          </p:cNvPicPr>
+          <p:nvPr/>
+        </p:nvPicPr>
+        <p:blipFill>
+          <a:blip r:embed="rId2"/>
+          <a:stretch>
+            <a:fillRect/>
+          </a:stretch>
+        </p:blipFill>
+        <p:spPr>
+          <a:xfrm>
+            <a:off x="6243918" y="97267"/>
+            <a:ext cx="5948082" cy="1918465"/>
+          </a:xfrm>
+          <a:prstGeom prst="rect">
+            <a:avLst/>
+          </a:prstGeom>
+        </p:spPr>
+      </p:pic>
+    </p:spTree>
+    <p:extLst>
+      <p:ext uri="{BB962C8B-B14F-4D97-AF65-F5344CB8AC3E}">
+        <p14:creationId xmlns:p14="http://schemas.microsoft.com/office/powerpoint/2010/main" val="2694829649"/>
+      </p:ext>
+    </p:extLst>
+  </p:cSld>
+  <p:clrMapOvr>
+    <a:masterClrMapping/>
+  </p:clrMapOvr>
+</p:sld>
+</file>
+
+<file path=ppt/slides/slide40.xml><?xml version="1.0" encoding="utf-8"?>
 <p:sld xmlns:a="http://schemas.openxmlformats.org/drawingml/2006/main" xmlns:r="http://schemas.openxmlformats.org/officeDocument/2006/relationships" xmlns:p="http://schemas.openxmlformats.org/presentationml/2006/main">
   <p:cSld>
     <p:bg>
@@ -9232,516 +9695,6 @@
 </p:sld>
 </file>
 
-<file path=ppt/slides/slide39.xml><?xml version="1.0" encoding="utf-8"?>
-<p:sld xmlns:a="http://schemas.openxmlformats.org/drawingml/2006/main" xmlns:r="http://schemas.openxmlformats.org/officeDocument/2006/relationships" xmlns:p="http://schemas.openxmlformats.org/presentationml/2006/main">
-  <p:cSld>
-    <p:spTree>
-      <p:nvGrpSpPr>
-        <p:cNvPr id="1" name=""/>
-        <p:cNvGrpSpPr/>
-        <p:nvPr/>
-      </p:nvGrpSpPr>
-      <p:grpSpPr>
-        <a:xfrm>
-          <a:off x="0" y="0"/>
-          <a:ext cx="0" cy="0"/>
-          <a:chOff x="0" y="0"/>
-          <a:chExt cx="0" cy="0"/>
-        </a:xfrm>
-      </p:grpSpPr>
-      <p:sp>
-        <p:nvSpPr>
-          <p:cNvPr id="2" name="Title 1">
-            <a:extLst>
-              <a:ext uri="{FF2B5EF4-FFF2-40B4-BE49-F238E27FC236}">
-                <a16:creationId xmlns:a16="http://schemas.microsoft.com/office/drawing/2014/main" id="{14D8C9D8-9487-2297-14C9-A847E7D5831F}"/>
-              </a:ext>
-            </a:extLst>
-          </p:cNvPr>
-          <p:cNvSpPr>
-            <a:spLocks noGrp="1"/>
-          </p:cNvSpPr>
-          <p:nvPr>
-            <p:ph type="title"/>
-          </p:nvPr>
-        </p:nvSpPr>
-        <p:spPr/>
-        <p:txBody>
-          <a:bodyPr/>
-          <a:lstStyle/>
-          <a:p>
-            <a:r>
-              <a:rPr lang="en-US" dirty="0"/>
-              <a:t>Bayes and Sklearn Implementation</a:t>
-            </a:r>
-          </a:p>
-        </p:txBody>
-      </p:sp>
-      <p:sp>
-        <p:nvSpPr>
-          <p:cNvPr id="3" name="Content Placeholder 2">
-            <a:extLst>
-              <a:ext uri="{FF2B5EF4-FFF2-40B4-BE49-F238E27FC236}">
-                <a16:creationId xmlns:a16="http://schemas.microsoft.com/office/drawing/2014/main" id="{C4A5C909-14D4-FC92-D91B-32B5388C2458}"/>
-              </a:ext>
-            </a:extLst>
-          </p:cNvPr>
-          <p:cNvSpPr>
-            <a:spLocks noGrp="1"/>
-          </p:cNvSpPr>
-          <p:nvPr>
-            <p:ph idx="1"/>
-          </p:nvPr>
-        </p:nvSpPr>
-        <p:spPr>
-          <a:xfrm>
-            <a:off x="1451579" y="1853754"/>
-            <a:ext cx="9603275" cy="4277080"/>
-          </a:xfrm>
-        </p:spPr>
-        <p:txBody>
-          <a:bodyPr>
-            <a:normAutofit fontScale="92500" lnSpcReduction="10000"/>
-          </a:bodyPr>
-          <a:lstStyle/>
-          <a:p>
-            <a:r>
-              <a:rPr lang="en-US" i="1" dirty="0"/>
-              <a:t>Using</a:t>
-            </a:r>
-            <a:r>
-              <a:rPr lang="en-US" dirty="0"/>
-              <a:t> bayes models is normally pretty simple, everything is just sklearn standard. </a:t>
-            </a:r>
-          </a:p>
-          <a:p>
-            <a:r>
-              <a:rPr lang="en-US" dirty="0"/>
-              <a:t>There are a couple of specific (potential) things to be aware of:</a:t>
-            </a:r>
-          </a:p>
-          <a:p>
-            <a:pPr lvl="1"/>
-            <a:r>
-              <a:rPr lang="en-US" dirty="0"/>
-              <a:t>Bayes theoretically </a:t>
-            </a:r>
-            <a:r>
-              <a:rPr lang="en-US" b="1" dirty="0"/>
-              <a:t>doesn’t</a:t>
-            </a:r>
-            <a:r>
-              <a:rPr lang="en-US" dirty="0"/>
-              <a:t> require encoding of variables, implementations may. </a:t>
-            </a:r>
-          </a:p>
-          <a:p>
-            <a:pPr lvl="2"/>
-            <a:r>
-              <a:rPr lang="en-US" dirty="0"/>
-              <a:t>From docs: “It is further assumed that all categories of each feature are represented by the numbers 0, …, n - 1, where n refers to the total number of categories for the given feature. This can, for instance, be achieved with the help of </a:t>
-            </a:r>
-            <a:r>
-              <a:rPr lang="en-US" dirty="0" err="1"/>
-              <a:t>OrdinalEncoder</a:t>
-            </a:r>
-            <a:r>
-              <a:rPr lang="en-US" dirty="0"/>
-              <a:t>.”</a:t>
-            </a:r>
-          </a:p>
-          <a:p>
-            <a:pPr lvl="1"/>
-            <a:r>
-              <a:rPr lang="en-US" b="1" dirty="0"/>
-              <a:t>Bayes requires categorical features</a:t>
-            </a:r>
-            <a:r>
-              <a:rPr lang="en-US" dirty="0"/>
-              <a:t>, implementations may do something to automatically handle numeric features or may have some different variant. </a:t>
-            </a:r>
-          </a:p>
-          <a:p>
-            <a:pPr lvl="2"/>
-            <a:r>
-              <a:rPr lang="en-US" dirty="0"/>
-              <a:t>In sklearn there are several Bayes varieties for different applications – Gaussian for numerical. </a:t>
-            </a:r>
-          </a:p>
-          <a:p>
-            <a:r>
-              <a:rPr lang="en-US" dirty="0"/>
-              <a:t>Overall, this can be true in several places:</a:t>
-            </a:r>
-          </a:p>
-          <a:p>
-            <a:pPr lvl="1"/>
-            <a:r>
-              <a:rPr lang="en-US" dirty="0"/>
-              <a:t>ML libraries have a pretty standard way to use algorithms, for ease of use. </a:t>
-            </a:r>
-          </a:p>
-          <a:p>
-            <a:pPr lvl="1"/>
-            <a:r>
-              <a:rPr lang="en-US" dirty="0"/>
-              <a:t>The exact requirements of the theoretical algorithm change to match. </a:t>
-            </a:r>
-          </a:p>
-        </p:txBody>
-      </p:sp>
-    </p:spTree>
-    <p:extLst>
-      <p:ext uri="{BB962C8B-B14F-4D97-AF65-F5344CB8AC3E}">
-        <p14:creationId xmlns:p14="http://schemas.microsoft.com/office/powerpoint/2010/main" val="2850732022"/>
-      </p:ext>
-    </p:extLst>
-  </p:cSld>
-  <p:clrMapOvr>
-    <a:masterClrMapping/>
-  </p:clrMapOvr>
-</p:sld>
-</file>
-
-<file path=ppt/slides/slide4.xml><?xml version="1.0" encoding="utf-8"?>
-<p:sld xmlns:a="http://schemas.openxmlformats.org/drawingml/2006/main" xmlns:r="http://schemas.openxmlformats.org/officeDocument/2006/relationships" xmlns:p="http://schemas.openxmlformats.org/presentationml/2006/main">
-  <p:cSld>
-    <p:spTree>
-      <p:nvGrpSpPr>
-        <p:cNvPr id="1" name=""/>
-        <p:cNvGrpSpPr/>
-        <p:nvPr/>
-      </p:nvGrpSpPr>
-      <p:grpSpPr>
-        <a:xfrm>
-          <a:off x="0" y="0"/>
-          <a:ext cx="0" cy="0"/>
-          <a:chOff x="0" y="0"/>
-          <a:chExt cx="0" cy="0"/>
-        </a:xfrm>
-      </p:grpSpPr>
-      <p:sp>
-        <p:nvSpPr>
-          <p:cNvPr id="2" name="Title 1">
-            <a:extLst>
-              <a:ext uri="{FF2B5EF4-FFF2-40B4-BE49-F238E27FC236}">
-                <a16:creationId xmlns:a16="http://schemas.microsoft.com/office/drawing/2014/main" id="{55666A1F-781F-8496-2FD7-3717E90AB8FE}"/>
-              </a:ext>
-            </a:extLst>
-          </p:cNvPr>
-          <p:cNvSpPr>
-            <a:spLocks noGrp="1"/>
-          </p:cNvSpPr>
-          <p:nvPr>
-            <p:ph type="title"/>
-          </p:nvPr>
-        </p:nvSpPr>
-        <p:spPr/>
-        <p:txBody>
-          <a:bodyPr/>
-          <a:lstStyle/>
-          <a:p>
-            <a:r>
-              <a:rPr lang="en-US" dirty="0"/>
-              <a:t>Assignment</a:t>
-            </a:r>
-          </a:p>
-        </p:txBody>
-      </p:sp>
-      <p:sp>
-        <p:nvSpPr>
-          <p:cNvPr id="3" name="Content Placeholder 2">
-            <a:extLst>
-              <a:ext uri="{FF2B5EF4-FFF2-40B4-BE49-F238E27FC236}">
-                <a16:creationId xmlns:a16="http://schemas.microsoft.com/office/drawing/2014/main" id="{4486A5CB-317D-41F7-BDE0-DC1A1C9DA26E}"/>
-              </a:ext>
-            </a:extLst>
-          </p:cNvPr>
-          <p:cNvSpPr>
-            <a:spLocks noGrp="1"/>
-          </p:cNvSpPr>
-          <p:nvPr>
-            <p:ph idx="1"/>
-          </p:nvPr>
-        </p:nvSpPr>
-        <p:spPr>
-          <a:xfrm>
-            <a:off x="1451579" y="2015732"/>
-            <a:ext cx="9603275" cy="4037749"/>
-          </a:xfrm>
-        </p:spPr>
-        <p:txBody>
-          <a:bodyPr/>
-          <a:lstStyle/>
-          <a:p>
-            <a:r>
-              <a:rPr lang="en-US" dirty="0"/>
-              <a:t>Overall, looked pretty good. Small notes only:</a:t>
-            </a:r>
-          </a:p>
-          <a:p>
-            <a:pPr lvl="1"/>
-            <a:r>
-              <a:rPr lang="en-US" dirty="0"/>
-              <a:t>I’m not sure a normal distribution for vote totals is best?</a:t>
-            </a:r>
-          </a:p>
-          <a:p>
-            <a:pPr lvl="2"/>
-            <a:r>
-              <a:rPr lang="en-US" dirty="0"/>
-              <a:t>Small sample, asserting vote totals are normal is an assertion (that may be correct). </a:t>
-            </a:r>
-          </a:p>
-          <a:p>
-            <a:pPr lvl="1"/>
-            <a:r>
-              <a:rPr lang="en-US" dirty="0"/>
-              <a:t>Can’t estimate purple/yellow independently – they sum to 1. </a:t>
-            </a:r>
-          </a:p>
-          <a:p>
-            <a:pPr lvl="2"/>
-            <a:r>
-              <a:rPr lang="en-US" dirty="0"/>
-              <a:t>Could get both at 52% in one simulation round. </a:t>
-            </a:r>
-          </a:p>
-          <a:p>
-            <a:pPr lvl="1"/>
-            <a:r>
-              <a:rPr lang="en-US" dirty="0"/>
-              <a:t>If you do something like </a:t>
-            </a:r>
-            <a:r>
-              <a:rPr lang="en-US" dirty="0" err="1"/>
-              <a:t>multicolinierity</a:t>
-            </a:r>
-            <a:r>
-              <a:rPr lang="en-US" dirty="0"/>
-              <a:t>, test the model after. </a:t>
-            </a:r>
-          </a:p>
-          <a:p>
-            <a:pPr lvl="1"/>
-            <a:r>
-              <a:rPr lang="en-US" dirty="0"/>
-              <a:t>Consider grids of images if you have many. (Is the fig, ax stuff familiar?) </a:t>
-            </a:r>
-          </a:p>
-          <a:p>
-            <a:r>
-              <a:rPr lang="en-US" dirty="0"/>
-              <a:t>I’ll finish the test stuff on Wednesday. </a:t>
-            </a:r>
-          </a:p>
-        </p:txBody>
-      </p:sp>
-      <p:pic>
-        <p:nvPicPr>
-          <p:cNvPr id="4" name="Picture 3">
-            <a:extLst>
-              <a:ext uri="{FF2B5EF4-FFF2-40B4-BE49-F238E27FC236}">
-                <a16:creationId xmlns:a16="http://schemas.microsoft.com/office/drawing/2014/main" id="{09E68606-BAA9-57A1-08DA-24F4DED89D0F}"/>
-              </a:ext>
-            </a:extLst>
-          </p:cNvPr>
-          <p:cNvPicPr>
-            <a:picLocks noChangeAspect="1"/>
-          </p:cNvPicPr>
-          <p:nvPr/>
-        </p:nvPicPr>
-        <p:blipFill>
-          <a:blip r:embed="rId2"/>
-          <a:stretch>
-            <a:fillRect/>
-          </a:stretch>
-        </p:blipFill>
-        <p:spPr>
-          <a:xfrm>
-            <a:off x="6243918" y="97267"/>
-            <a:ext cx="5948082" cy="1918465"/>
-          </a:xfrm>
-          <a:prstGeom prst="rect">
-            <a:avLst/>
-          </a:prstGeom>
-        </p:spPr>
-      </p:pic>
-    </p:spTree>
-    <p:extLst>
-      <p:ext uri="{BB962C8B-B14F-4D97-AF65-F5344CB8AC3E}">
-        <p14:creationId xmlns:p14="http://schemas.microsoft.com/office/powerpoint/2010/main" val="2694829649"/>
-      </p:ext>
-    </p:extLst>
-  </p:cSld>
-  <p:clrMapOvr>
-    <a:masterClrMapping/>
-  </p:clrMapOvr>
-</p:sld>
-</file>
-
-<file path=ppt/slides/slide40.xml><?xml version="1.0" encoding="utf-8"?>
-<p:sld xmlns:a="http://schemas.openxmlformats.org/drawingml/2006/main" xmlns:r="http://schemas.openxmlformats.org/officeDocument/2006/relationships" xmlns:p="http://schemas.openxmlformats.org/presentationml/2006/main">
-  <p:cSld>
-    <p:spTree>
-      <p:nvGrpSpPr>
-        <p:cNvPr id="1" name=""/>
-        <p:cNvGrpSpPr/>
-        <p:nvPr/>
-      </p:nvGrpSpPr>
-      <p:grpSpPr>
-        <a:xfrm>
-          <a:off x="0" y="0"/>
-          <a:ext cx="0" cy="0"/>
-          <a:chOff x="0" y="0"/>
-          <a:chExt cx="0" cy="0"/>
-        </a:xfrm>
-      </p:grpSpPr>
-      <p:sp>
-        <p:nvSpPr>
-          <p:cNvPr id="2" name="Title 1">
-            <a:extLst>
-              <a:ext uri="{FF2B5EF4-FFF2-40B4-BE49-F238E27FC236}">
-                <a16:creationId xmlns:a16="http://schemas.microsoft.com/office/drawing/2014/main" id="{6CC17B9A-26F0-8DE2-CC61-F8AF3EA571D9}"/>
-              </a:ext>
-            </a:extLst>
-          </p:cNvPr>
-          <p:cNvSpPr>
-            <a:spLocks noGrp="1"/>
-          </p:cNvSpPr>
-          <p:nvPr>
-            <p:ph type="title"/>
-          </p:nvPr>
-        </p:nvSpPr>
-        <p:spPr/>
-        <p:txBody>
-          <a:bodyPr/>
-          <a:lstStyle/>
-          <a:p>
-            <a:r>
-              <a:rPr lang="en-US" dirty="0"/>
-              <a:t>Real Life Bayes</a:t>
-            </a:r>
-          </a:p>
-        </p:txBody>
-      </p:sp>
-      <p:sp>
-        <p:nvSpPr>
-          <p:cNvPr id="3" name="Content Placeholder 2">
-            <a:extLst>
-              <a:ext uri="{FF2B5EF4-FFF2-40B4-BE49-F238E27FC236}">
-                <a16:creationId xmlns:a16="http://schemas.microsoft.com/office/drawing/2014/main" id="{6EF5DD75-66BE-9946-9CBF-EFF64298032A}"/>
-              </a:ext>
-            </a:extLst>
-          </p:cNvPr>
-          <p:cNvSpPr>
-            <a:spLocks noGrp="1"/>
-          </p:cNvSpPr>
-          <p:nvPr>
-            <p:ph idx="1"/>
-          </p:nvPr>
-        </p:nvSpPr>
-        <p:spPr>
-          <a:xfrm>
-            <a:off x="1451579" y="1853755"/>
-            <a:ext cx="9603275" cy="4199726"/>
-          </a:xfrm>
-        </p:spPr>
-        <p:txBody>
-          <a:bodyPr/>
-          <a:lstStyle/>
-          <a:p>
-            <a:r>
-              <a:rPr lang="en-US" dirty="0"/>
-              <a:t>Bayes models are used in several real-life places. </a:t>
-            </a:r>
-          </a:p>
-          <a:p>
-            <a:pPr lvl="1"/>
-            <a:r>
-              <a:rPr lang="en-US" dirty="0"/>
-              <a:t>Spam detection. </a:t>
-            </a:r>
-          </a:p>
-          <a:p>
-            <a:pPr lvl="1"/>
-            <a:r>
-              <a:rPr lang="en-US" dirty="0"/>
-              <a:t>Markov chain type of things. You don’t need details, but these are probabilistic things that depend only on previous states. </a:t>
-            </a:r>
-          </a:p>
-          <a:p>
-            <a:pPr lvl="1"/>
-            <a:r>
-              <a:rPr lang="en-US" dirty="0"/>
-              <a:t>Other probabilistic “state-needing” things. E.g. modelling one customer’s behavior, finance.</a:t>
-            </a:r>
-          </a:p>
-          <a:p>
-            <a:pPr lvl="1"/>
-            <a:r>
-              <a:rPr lang="en-US" dirty="0"/>
-              <a:t>Optimization – when doing other ML stuff, Bayes can help narrow down option choices.  </a:t>
-            </a:r>
-          </a:p>
-          <a:p>
-            <a:r>
-              <a:rPr lang="en-US" dirty="0"/>
-              <a:t>Bayes has tended to perform well on unstructured (non-tabular) problems (like spam). </a:t>
-            </a:r>
-          </a:p>
-          <a:p>
-            <a:pPr lvl="1"/>
-            <a:r>
-              <a:rPr lang="en-US" dirty="0"/>
-              <a:t>Bayes used to be best, but newer (</a:t>
-            </a:r>
-            <a:r>
-              <a:rPr lang="en-US" dirty="0" err="1"/>
-              <a:t>xgb</a:t>
-            </a:r>
-            <a:r>
-              <a:rPr lang="en-US" dirty="0"/>
-              <a:t>, neural networks) models can be good/better. </a:t>
-            </a:r>
-          </a:p>
-          <a:p>
-            <a:pPr lvl="1"/>
-            <a:r>
-              <a:rPr lang="en-US" dirty="0"/>
-              <a:t>For something like spam, fast processing of Bayes can really matter. (Est 130 billion </a:t>
-            </a:r>
-            <a:r>
-              <a:rPr lang="en-US" dirty="0" err="1"/>
-              <a:t>gmails</a:t>
-            </a:r>
-            <a:r>
-              <a:rPr lang="en-US" dirty="0"/>
-              <a:t>/day)</a:t>
-            </a:r>
-          </a:p>
-          <a:p>
-            <a:pPr lvl="1"/>
-            <a:r>
-              <a:rPr lang="en-US" dirty="0"/>
-              <a:t>The relationship of words in text and spam status probably isn’t linear…</a:t>
-            </a:r>
-          </a:p>
-        </p:txBody>
-      </p:sp>
-    </p:spTree>
-    <p:extLst>
-      <p:ext uri="{BB962C8B-B14F-4D97-AF65-F5344CB8AC3E}">
-        <p14:creationId xmlns:p14="http://schemas.microsoft.com/office/powerpoint/2010/main" val="2979603588"/>
-      </p:ext>
-    </p:extLst>
-  </p:cSld>
-  <p:clrMapOvr>
-    <a:masterClrMapping/>
-  </p:clrMapOvr>
-</p:sld>
-</file>
-
 <file path=ppt/slides/slide41.xml><?xml version="1.0" encoding="utf-8"?>
 <p:sld xmlns:a="http://schemas.openxmlformats.org/drawingml/2006/main" xmlns:r="http://schemas.openxmlformats.org/officeDocument/2006/relationships" xmlns:p="http://schemas.openxmlformats.org/presentationml/2006/main">
   <p:cSld>
@@ -9764,7 +9717,7 @@
           <p:cNvPr id="2" name="Title 1">
             <a:extLst>
               <a:ext uri="{FF2B5EF4-FFF2-40B4-BE49-F238E27FC236}">
-                <a16:creationId xmlns:a16="http://schemas.microsoft.com/office/drawing/2014/main" id="{0AD813C7-2AD5-8445-A578-9756556E98FC}"/>
+                <a16:creationId xmlns:a16="http://schemas.microsoft.com/office/drawing/2014/main" id="{6CC17B9A-26F0-8DE2-CC61-F8AF3EA571D9}"/>
               </a:ext>
             </a:extLst>
           </p:cNvPr>
@@ -9782,7 +9735,7 @@
           <a:p>
             <a:r>
               <a:rPr lang="en-US" dirty="0"/>
-              <a:t>Naïve Bayes Conclusion</a:t>
+              <a:t>Real Life Bayes</a:t>
             </a:r>
           </a:p>
         </p:txBody>
@@ -9792,7 +9745,7 @@
           <p:cNvPr id="3" name="Content Placeholder 2">
             <a:extLst>
               <a:ext uri="{FF2B5EF4-FFF2-40B4-BE49-F238E27FC236}">
-                <a16:creationId xmlns:a16="http://schemas.microsoft.com/office/drawing/2014/main" id="{AB982E42-0273-FB4E-B3D8-2E3564257E94}"/>
+                <a16:creationId xmlns:a16="http://schemas.microsoft.com/office/drawing/2014/main" id="{6EF5DD75-66BE-9946-9CBF-EFF64298032A}"/>
               </a:ext>
             </a:extLst>
           </p:cNvPr>
@@ -9805,92 +9758,88 @@
         </p:nvSpPr>
         <p:spPr>
           <a:xfrm>
-            <a:off x="1451579" y="1853754"/>
-            <a:ext cx="9603275" cy="4303206"/>
+            <a:off x="1451579" y="1853755"/>
+            <a:ext cx="9603275" cy="4199726"/>
           </a:xfrm>
         </p:spPr>
         <p:txBody>
-          <a:bodyPr>
-            <a:normAutofit fontScale="85000" lnSpcReduction="10000"/>
-          </a:bodyPr>
-          <a:lstStyle/>
-          <a:p>
-            <a:r>
-              <a:rPr lang="en-US" dirty="0"/>
-              <a:t>Bayes is one of the simpler classifiers that we can create. </a:t>
-            </a:r>
-          </a:p>
-          <a:p>
-            <a:pPr lvl="1"/>
-            <a:r>
-              <a:rPr lang="en-US" dirty="0"/>
-              <a:t>Bayes regression exists, but is not super common so we don’t worry about it. </a:t>
-            </a:r>
-          </a:p>
-          <a:p>
-            <a:r>
-              <a:rPr lang="en-US" dirty="0"/>
-              <a:t>Bayesian models have different logic than regression – no linear dependance, no residual. </a:t>
-            </a:r>
-          </a:p>
-          <a:p>
-            <a:pPr lvl="1"/>
-            <a:r>
-              <a:rPr lang="en-US" dirty="0"/>
-              <a:t>There is still a model (inputs-&gt;output), but how it works is totally different. </a:t>
-            </a:r>
-          </a:p>
-          <a:p>
-            <a:r>
-              <a:rPr lang="en-US" dirty="0"/>
-              <a:t>Strengths:</a:t>
-            </a:r>
-          </a:p>
-          <a:p>
-            <a:pPr lvl="1"/>
-            <a:r>
-              <a:rPr lang="en-US" dirty="0"/>
-              <a:t>It is fast, both making predictions and in training – probability calcs are quick. </a:t>
-            </a:r>
-          </a:p>
-          <a:p>
-            <a:pPr lvl="1"/>
-            <a:r>
-              <a:rPr lang="en-US" dirty="0"/>
-              <a:t>Often performs well on “unstructured” things, like email spam detection (more in NLP part). </a:t>
-            </a:r>
-          </a:p>
-          <a:p>
-            <a:r>
-              <a:rPr lang="en-US" dirty="0"/>
-              <a:t>Weaknesses:</a:t>
-            </a:r>
-          </a:p>
-          <a:p>
-            <a:pPr lvl="1"/>
-            <a:r>
-              <a:rPr lang="en-US" dirty="0"/>
-              <a:t>Handling mixed data (num and cat) can be very annoying. </a:t>
-            </a:r>
-          </a:p>
-          <a:p>
-            <a:pPr lvl="1"/>
-            <a:r>
-              <a:rPr lang="en-US" dirty="0"/>
-              <a:t>Independence of features isn’t perfect in most real-life scenarios*. </a:t>
-            </a:r>
-          </a:p>
-          <a:p>
-            <a:pPr lvl="1"/>
-            <a:r>
-              <a:rPr lang="en-US" dirty="0"/>
-              <a:t>Limited ability to make model better through tuning (next semester). </a:t>
-            </a:r>
-          </a:p>
-          <a:p>
-            <a:r>
-              <a:rPr lang="en-US" dirty="0"/>
-              <a:t>Bayes is good at specific tasks, but other models beat it in general. </a:t>
+          <a:bodyPr/>
+          <a:lstStyle/>
+          <a:p>
+            <a:r>
+              <a:rPr lang="en-US" dirty="0"/>
+              <a:t>Bayes models are used in several real-life places, often unstructured. </a:t>
+            </a:r>
+          </a:p>
+          <a:p>
+            <a:pPr lvl="1"/>
+            <a:r>
+              <a:rPr lang="en-US" dirty="0"/>
+              <a:t>Spam detection. </a:t>
+            </a:r>
+          </a:p>
+          <a:p>
+            <a:pPr lvl="1"/>
+            <a:r>
+              <a:rPr lang="en-US" dirty="0"/>
+              <a:t>Markov chain type of things. You don’t need details, but these are probabilistic things that depend only on previous states. </a:t>
+            </a:r>
+          </a:p>
+          <a:p>
+            <a:pPr lvl="1"/>
+            <a:r>
+              <a:rPr lang="en-US" dirty="0"/>
+              <a:t>Other probabilistic “state-needing” things. E.g. modelling one customer’s behavior, finance.</a:t>
+            </a:r>
+          </a:p>
+          <a:p>
+            <a:pPr lvl="1"/>
+            <a:r>
+              <a:rPr lang="en-US" dirty="0"/>
+              <a:t>Optimization – when doing other ML stuff, Bayes can help narrow down option choices.  </a:t>
+            </a:r>
+          </a:p>
+          <a:p>
+            <a:r>
+              <a:rPr lang="en-US" dirty="0"/>
+              <a:t>Bayes has tended to perform well on unstructured (non-tabular) problems (like spam). </a:t>
+            </a:r>
+          </a:p>
+          <a:p>
+            <a:pPr lvl="1"/>
+            <a:r>
+              <a:rPr lang="en-US" dirty="0"/>
+              <a:t>Bayes used to be best, but newer (</a:t>
+            </a:r>
+            <a:r>
+              <a:rPr lang="en-US" dirty="0" err="1"/>
+              <a:t>xgb</a:t>
+            </a:r>
+            <a:r>
+              <a:rPr lang="en-US" dirty="0"/>
+              <a:t>, neural networks) models can be good/better. </a:t>
+            </a:r>
+          </a:p>
+          <a:p>
+            <a:pPr lvl="1"/>
+            <a:r>
+              <a:rPr lang="en-US" dirty="0"/>
+              <a:t>For something like spam, fast processing of Bayes can really matter. (Est 130 billion </a:t>
+            </a:r>
+            <a:r>
+              <a:rPr lang="en-US" dirty="0" err="1"/>
+              <a:t>gmails</a:t>
+            </a:r>
+            <a:r>
+              <a:rPr lang="en-US" dirty="0"/>
+              <a:t>/day)</a:t>
+            </a:r>
+          </a:p>
+          <a:p>
+            <a:pPr lvl="1"/>
+            <a:r>
+              <a:rPr lang="en-US" dirty="0"/>
+              <a:t>The relationship of words in text and spam status probably isn’t linear…</a:t>
             </a:r>
           </a:p>
         </p:txBody>
@@ -9898,7 +9847,7 @@
     </p:spTree>
     <p:extLst>
       <p:ext uri="{BB962C8B-B14F-4D97-AF65-F5344CB8AC3E}">
-        <p14:creationId xmlns:p14="http://schemas.microsoft.com/office/powerpoint/2010/main" val="3093447189"/>
+        <p14:creationId xmlns:p14="http://schemas.microsoft.com/office/powerpoint/2010/main" val="2979603588"/>
       </p:ext>
     </p:extLst>
   </p:cSld>
@@ -9930,7 +9879,7 @@
           <p:cNvPr id="2" name="Title 1">
             <a:extLst>
               <a:ext uri="{FF2B5EF4-FFF2-40B4-BE49-F238E27FC236}">
-                <a16:creationId xmlns:a16="http://schemas.microsoft.com/office/drawing/2014/main" id="{1B344066-0542-F810-8C3E-2334F8C40458}"/>
+                <a16:creationId xmlns:a16="http://schemas.microsoft.com/office/drawing/2014/main" id="{0AD813C7-2AD5-8445-A578-9756556E98FC}"/>
               </a:ext>
             </a:extLst>
           </p:cNvPr>
@@ -9948,7 +9897,7 @@
           <a:p>
             <a:r>
               <a:rPr lang="en-US" dirty="0"/>
-              <a:t>Build-A-Bayes</a:t>
+              <a:t>Naïve Bayes Conclusion</a:t>
             </a:r>
           </a:p>
         </p:txBody>
@@ -9958,7 +9907,7 @@
           <p:cNvPr id="3" name="Content Placeholder 2">
             <a:extLst>
               <a:ext uri="{FF2B5EF4-FFF2-40B4-BE49-F238E27FC236}">
-                <a16:creationId xmlns:a16="http://schemas.microsoft.com/office/drawing/2014/main" id="{87E3821B-3F71-E693-8F9F-1253EB48983E}"/>
+                <a16:creationId xmlns:a16="http://schemas.microsoft.com/office/drawing/2014/main" id="{AB982E42-0273-FB4E-B3D8-2E3564257E94}"/>
               </a:ext>
             </a:extLst>
           </p:cNvPr>
@@ -9969,48 +9918,94 @@
             <p:ph idx="1"/>
           </p:nvPr>
         </p:nvSpPr>
-        <p:spPr/>
-        <p:txBody>
-          <a:bodyPr/>
-          <a:lstStyle/>
-          <a:p>
-            <a:r>
-              <a:rPr lang="en-US" dirty="0"/>
-              <a:t>In workbook 032 we have an example of a Bayes model, made by hand. </a:t>
-            </a:r>
-          </a:p>
-          <a:p>
-            <a:r>
-              <a:rPr lang="en-US" dirty="0"/>
-              <a:t>We don’t need to do this by hand, but can we read through and follow…</a:t>
-            </a:r>
-          </a:p>
-          <a:p>
-            <a:r>
-              <a:rPr lang="en-US" dirty="0"/>
-              <a:t>This is generally a decent self-check. </a:t>
-            </a:r>
-          </a:p>
-          <a:p>
-            <a:pPr lvl="1"/>
-            <a:r>
-              <a:rPr lang="en-US" dirty="0"/>
-              <a:t>We know what the model does – calculate probs, likelihoods, combine them, </a:t>
-            </a:r>
-            <a:r>
-              <a:rPr lang="en-US" dirty="0" err="1"/>
-              <a:t>etc</a:t>
-            </a:r>
-            <a:r>
-              <a:rPr lang="en-US" dirty="0"/>
-              <a:t>…</a:t>
-            </a:r>
-          </a:p>
-          <a:p>
-            <a:pPr lvl="1"/>
-            <a:r>
-              <a:rPr lang="en-US" dirty="0"/>
-              <a:t>We can use a simple example and track it through the algorithm. </a:t>
+        <p:spPr>
+          <a:xfrm>
+            <a:off x="1451579" y="1853754"/>
+            <a:ext cx="9603275" cy="4303206"/>
+          </a:xfrm>
+        </p:spPr>
+        <p:txBody>
+          <a:bodyPr>
+            <a:normAutofit fontScale="85000" lnSpcReduction="10000"/>
+          </a:bodyPr>
+          <a:lstStyle/>
+          <a:p>
+            <a:r>
+              <a:rPr lang="en-US" dirty="0"/>
+              <a:t>Bayes is one of the simpler classifiers that we can create. </a:t>
+            </a:r>
+          </a:p>
+          <a:p>
+            <a:pPr lvl="1"/>
+            <a:r>
+              <a:rPr lang="en-US" dirty="0"/>
+              <a:t>Bayes regression exists, but is not super common so we don’t worry about it. </a:t>
+            </a:r>
+          </a:p>
+          <a:p>
+            <a:r>
+              <a:rPr lang="en-US" dirty="0"/>
+              <a:t>Bayesian models have different logic than regression – no linear dependance, no residual. </a:t>
+            </a:r>
+          </a:p>
+          <a:p>
+            <a:pPr lvl="1"/>
+            <a:r>
+              <a:rPr lang="en-US" dirty="0"/>
+              <a:t>There is still a model (inputs-&gt;output), but how it works is totally different. </a:t>
+            </a:r>
+          </a:p>
+          <a:p>
+            <a:r>
+              <a:rPr lang="en-US" dirty="0"/>
+              <a:t>Strengths:</a:t>
+            </a:r>
+          </a:p>
+          <a:p>
+            <a:pPr lvl="1"/>
+            <a:r>
+              <a:rPr lang="en-US" dirty="0"/>
+              <a:t>It is fast, both making predictions and in training – probability calcs are quick. </a:t>
+            </a:r>
+          </a:p>
+          <a:p>
+            <a:pPr lvl="1"/>
+            <a:r>
+              <a:rPr lang="en-US" dirty="0"/>
+              <a:t>Often performs well on “unstructured” things, like email spam detection (more in NLP part). </a:t>
+            </a:r>
+          </a:p>
+          <a:p>
+            <a:r>
+              <a:rPr lang="en-US" dirty="0"/>
+              <a:t>Weaknesses:</a:t>
+            </a:r>
+          </a:p>
+          <a:p>
+            <a:pPr lvl="1"/>
+            <a:r>
+              <a:rPr lang="en-US" dirty="0"/>
+              <a:t>Handling mixed data (num and cat) can be very annoying. </a:t>
+            </a:r>
+          </a:p>
+          <a:p>
+            <a:pPr lvl="1"/>
+            <a:r>
+              <a:rPr lang="en-US" dirty="0"/>
+              <a:t>Independence of features isn’t perfect in most real-life scenarios*. </a:t>
+            </a:r>
+          </a:p>
+          <a:p>
+            <a:pPr lvl="1"/>
+            <a:r>
+              <a:rPr lang="en-US" dirty="0"/>
+              <a:t>Limited ability to make model better through tuning (next semester). </a:t>
+            </a:r>
+          </a:p>
+          <a:p>
+            <a:r>
+              <a:rPr lang="en-US" dirty="0"/>
+              <a:t>Bayes is good at specific tasks, but other models beat it in general. </a:t>
             </a:r>
           </a:p>
         </p:txBody>
@@ -10018,7 +10013,7 @@
     </p:spTree>
     <p:extLst>
       <p:ext uri="{BB962C8B-B14F-4D97-AF65-F5344CB8AC3E}">
-        <p14:creationId xmlns:p14="http://schemas.microsoft.com/office/powerpoint/2010/main" val="2375008139"/>
+        <p14:creationId xmlns:p14="http://schemas.microsoft.com/office/powerpoint/2010/main" val="3093447189"/>
       </p:ext>
     </p:extLst>
   </p:cSld>
@@ -10050,6 +10045,132 @@
           <p:cNvPr id="2" name="Title 1">
             <a:extLst>
               <a:ext uri="{FF2B5EF4-FFF2-40B4-BE49-F238E27FC236}">
+                <a16:creationId xmlns:a16="http://schemas.microsoft.com/office/drawing/2014/main" id="{1B344066-0542-F810-8C3E-2334F8C40458}"/>
+              </a:ext>
+            </a:extLst>
+          </p:cNvPr>
+          <p:cNvSpPr>
+            <a:spLocks noGrp="1"/>
+          </p:cNvSpPr>
+          <p:nvPr>
+            <p:ph type="title"/>
+          </p:nvPr>
+        </p:nvSpPr>
+        <p:spPr/>
+        <p:txBody>
+          <a:bodyPr/>
+          <a:lstStyle/>
+          <a:p>
+            <a:r>
+              <a:rPr lang="en-US" dirty="0"/>
+              <a:t>Build-A-Bayes</a:t>
+            </a:r>
+          </a:p>
+        </p:txBody>
+      </p:sp>
+      <p:sp>
+        <p:nvSpPr>
+          <p:cNvPr id="3" name="Content Placeholder 2">
+            <a:extLst>
+              <a:ext uri="{FF2B5EF4-FFF2-40B4-BE49-F238E27FC236}">
+                <a16:creationId xmlns:a16="http://schemas.microsoft.com/office/drawing/2014/main" id="{87E3821B-3F71-E693-8F9F-1253EB48983E}"/>
+              </a:ext>
+            </a:extLst>
+          </p:cNvPr>
+          <p:cNvSpPr>
+            <a:spLocks noGrp="1"/>
+          </p:cNvSpPr>
+          <p:nvPr>
+            <p:ph idx="1"/>
+          </p:nvPr>
+        </p:nvSpPr>
+        <p:spPr/>
+        <p:txBody>
+          <a:bodyPr/>
+          <a:lstStyle/>
+          <a:p>
+            <a:r>
+              <a:rPr lang="en-US" dirty="0"/>
+              <a:t>In workbook 032 we have an example of a Bayes model, made by hand. </a:t>
+            </a:r>
+          </a:p>
+          <a:p>
+            <a:r>
+              <a:rPr lang="en-US" dirty="0"/>
+              <a:t>We don’t need to do this by hand, but can we read through and follow…</a:t>
+            </a:r>
+          </a:p>
+          <a:p>
+            <a:r>
+              <a:rPr lang="en-US" dirty="0"/>
+              <a:t>This is generally a decent self-check. </a:t>
+            </a:r>
+          </a:p>
+          <a:p>
+            <a:pPr lvl="1"/>
+            <a:r>
+              <a:rPr lang="en-US" dirty="0"/>
+              <a:t>We know what the model does – calculate probs, likelihoods, combine them, </a:t>
+            </a:r>
+            <a:r>
+              <a:rPr lang="en-US" dirty="0" err="1"/>
+              <a:t>etc</a:t>
+            </a:r>
+            <a:r>
+              <a:rPr lang="en-US" dirty="0"/>
+              <a:t>…</a:t>
+            </a:r>
+          </a:p>
+          <a:p>
+            <a:pPr lvl="1"/>
+            <a:r>
+              <a:rPr lang="en-US" dirty="0"/>
+              <a:t>We can use a simple example and track it through the algorithm. </a:t>
+            </a:r>
+          </a:p>
+          <a:p>
+            <a:r>
+              <a:rPr lang="en-US" dirty="0"/>
+              <a:t>You can try-a-bayes for the project, your call. You might need to do some data prep. </a:t>
+            </a:r>
+          </a:p>
+        </p:txBody>
+      </p:sp>
+    </p:spTree>
+    <p:extLst>
+      <p:ext uri="{BB962C8B-B14F-4D97-AF65-F5344CB8AC3E}">
+        <p14:creationId xmlns:p14="http://schemas.microsoft.com/office/powerpoint/2010/main" val="2375008139"/>
+      </p:ext>
+    </p:extLst>
+  </p:cSld>
+  <p:clrMapOvr>
+    <a:masterClrMapping/>
+  </p:clrMapOvr>
+</p:sld>
+</file>
+
+<file path=ppt/slides/slide44.xml><?xml version="1.0" encoding="utf-8"?>
+<p:sld xmlns:a="http://schemas.openxmlformats.org/drawingml/2006/main" xmlns:r="http://schemas.openxmlformats.org/officeDocument/2006/relationships" xmlns:p="http://schemas.openxmlformats.org/presentationml/2006/main">
+  <p:cSld>
+    <p:spTree>
+      <p:nvGrpSpPr>
+        <p:cNvPr id="1" name=""/>
+        <p:cNvGrpSpPr/>
+        <p:nvPr/>
+      </p:nvGrpSpPr>
+      <p:grpSpPr>
+        <a:xfrm>
+          <a:off x="0" y="0"/>
+          <a:ext cx="0" cy="0"/>
+          <a:chOff x="0" y="0"/>
+          <a:chExt cx="0" cy="0"/>
+        </a:xfrm>
+      </p:grpSpPr>
+      <p:sp>
+        <p:nvSpPr>
+          <p:cNvPr id="2" name="Title 1">
+            <a:extLst>
+              <a:ext uri="{FF2B5EF4-FFF2-40B4-BE49-F238E27FC236}">
                 <a16:creationId xmlns:a16="http://schemas.microsoft.com/office/drawing/2014/main" id="{C0EE6A90-CF72-AE42-9444-D85AFF64323D}"/>
               </a:ext>
             </a:extLst>
@@ -10110,7 +10231,7 @@
             <a:pPr lvl="1"/>
             <a:r>
               <a:rPr lang="en-US" dirty="0"/>
-              <a:t>Use a different model type, evaluate models better, more data prep (pipeline). </a:t>
+              <a:t>More EDA, use a different model type, evaluate models better, more data prep (pipeline). </a:t>
             </a:r>
           </a:p>
           <a:p>
@@ -10130,7 +10251,15 @@
             <a:pPr lvl="1"/>
             <a:r>
               <a:rPr lang="en-US" dirty="0"/>
-              <a:t>Data – manipulating 2D data in assorted ways. </a:t>
+              <a:t>Data – manipulating 2D data in assorted ways, convert types, loops, vector </a:t>
+            </a:r>
+            <a:r>
+              <a:rPr lang="en-US" dirty="0" err="1"/>
+              <a:t>opps</a:t>
+            </a:r>
+            <a:r>
+              <a:rPr lang="en-US" dirty="0"/>
+              <a:t>. </a:t>
             </a:r>
           </a:p>
           <a:p>
